--- a/PFUMA_ZAS2026_Deck.pptx
+++ b/PFUMA_ZAS2026_Deck.pptx
@@ -17,9 +17,10 @@
     <p:sldId id="265" r:id="rId11"/>
     <p:sldId id="266" r:id="rId12"/>
     <p:sldId id="267" r:id="rId13"/>
+    <p:sldId id="268" r:id="rId14"/>
   </p:sldIdLst>
   <p:notesMasterIdLst>
-    <p:notesMasterId r:id="rId14"/>
+    <p:notesMasterId r:id="rId15"/>
   </p:notesMasterIdLst>
   <p:sldSz cx="12192000" cy="6858000"/>
   <p:notesSz cx="6858000" cy="12192000"/>
@@ -777,7 +778,7 @@
           <a:p>
             <a:r>
               <a:rPr lang="en-US" dirty="0"/>
-              <a:t>Close by getting them to DO something: offer a demo account on the spot. If they're a farmer, vet or supplier genuinely interested, take their contact — a follow-up after the show is worth more than a booth conversation they forget by the next stall.</a:t>
+              <a:t/>
             </a:r>
             <a:endParaRPr lang="en-US" dirty="0"/>
           </a:p>
@@ -801,6 +802,94 @@
             <a:fld id="{F7021451-1387-4CA6-816F-3879F97B5CBC}" type="slidenum">
               <a:rPr lang="en-US"/>
               <a:t>12</a:t>
+            </a:fld>
+            <a:endParaRPr lang="en-US"/>
+          </a:p>
+        </p:txBody>
+      </p:sp>
+    </p:spTree>
+    <p:extLst>
+      <p:ext uri="{BB962C8B-B14F-4D97-AF65-F5344CB8AC3E}">
+        <p14:creationId xmlns:p14="http://schemas.microsoft.com/office/powerpoint/2010/main" val="1024086991"/>
+      </p:ext>
+    </p:extLst>
+  </p:cSld>
+  <p:clrMapOvr>
+    <a:masterClrMapping/>
+  </p:clrMapOvr>
+</p:notes>
+</file>
+
+<file path=ppt/notesSlides/notesSlide13.xml><?xml version="1.0" encoding="utf-8"?>
+<p:notes xmlns:a="http://schemas.openxmlformats.org/drawingml/2006/main" xmlns:r="http://schemas.openxmlformats.org/officeDocument/2006/relationships" xmlns:p="http://schemas.openxmlformats.org/presentationml/2006/main">
+  <p:cSld>
+    <p:spTree>
+      <p:nvGrpSpPr>
+        <p:cNvPr id="1" name=""/>
+        <p:cNvGrpSpPr/>
+        <p:nvPr/>
+      </p:nvGrpSpPr>
+      <p:grpSpPr>
+        <a:xfrm>
+          <a:off x="0" y="0"/>
+          <a:ext cx="0" cy="0"/>
+          <a:chOff x="0" y="0"/>
+          <a:chExt cx="0" cy="0"/>
+        </a:xfrm>
+      </p:grpSpPr>
+      <p:sp>
+        <p:nvSpPr>
+          <p:cNvPr id="2" name="Slide Image Placeholder 1"/>
+          <p:cNvSpPr>
+            <a:spLocks noGrp="1" noRot="1" noChangeAspect="1"/>
+          </p:cNvSpPr>
+          <p:nvPr>
+            <p:ph type="sldImg"/>
+          </p:nvPr>
+        </p:nvSpPr>
+        <p:spPr/>
+      </p:sp>
+      <p:sp>
+        <p:nvSpPr>
+          <p:cNvPr id="3" name="Notes Placeholder 2"/>
+          <p:cNvSpPr>
+            <a:spLocks noGrp="1"/>
+          </p:cNvSpPr>
+          <p:nvPr>
+            <p:ph type="body" idx="1"/>
+          </p:nvPr>
+        </p:nvSpPr>
+        <p:spPr/>
+        <p:txBody>
+          <a:bodyPr/>
+          <a:lstStyle/>
+          <a:p>
+            <a:r>
+              <a:rPr lang="en-US" dirty="0"/>
+              <a:t>Close by getting them to DO something: offer a demo account on the spot. If they're a farmer, vet or supplier genuinely interested, take their contact — a follow-up after the show is worth more than a booth conversation they forget by the next stall.</a:t>
+            </a:r>
+            <a:endParaRPr lang="en-US" dirty="0"/>
+          </a:p>
+        </p:txBody>
+      </p:sp>
+      <p:sp>
+        <p:nvSpPr>
+          <p:cNvPr id="4" name="Slide Number Placeholder 3"/>
+          <p:cNvSpPr>
+            <a:spLocks noGrp="1"/>
+          </p:cNvSpPr>
+          <p:nvPr>
+            <p:ph type="sldNum" sz="quarter" idx="10"/>
+          </p:nvPr>
+        </p:nvSpPr>
+        <p:spPr/>
+        <p:txBody>
+          <a:bodyPr/>
+          <a:lstStyle/>
+          <a:p>
+            <a:fld id="{F7021451-1387-4CA6-816F-3879F97B5CBC}" type="slidenum">
+              <a:rPr lang="en-US"/>
+              <a:t>13</a:t>
             </a:fld>
             <a:endParaRPr lang="en-US"/>
           </a:p>
@@ -1393,7 +1482,7 @@
           <a:p>
             <a:r>
               <a:rPr lang="en-US" dirty="0"/>
-              <a:t/>
+              <a:t>One sentence version: we designed real collar hardware — ESP32, GPS, heart-rate and temperature sensors, talking to a base station over long-range radio — so it works on a farm with no WiFi and no cell signal near the cattle. If they push, show the actual_equipment photos on the laptop.</a:t>
             </a:r>
             <a:endParaRPr lang="en-US" dirty="0"/>
           </a:p>
@@ -2234,7 +2323,7 @@
         <p:spPr>
           <a:xfrm>
             <a:off x="4849978" y="4791456"/>
-            <a:ext cx="2156155" cy="402336"/>
+            <a:ext cx="2514600" cy="402336"/>
           </a:xfrm>
           <a:prstGeom prst="roundRect">
             <a:avLst>
@@ -2261,7 +2350,7 @@
         <p:spPr>
           <a:xfrm>
             <a:off x="4849978" y="4791456"/>
-            <a:ext cx="2156155" cy="402336"/>
+            <a:ext cx="2514600" cy="402336"/>
           </a:xfrm>
           <a:prstGeom prst="rect">
             <a:avLst/>
@@ -2285,7 +2374,7 @@
                 <a:ea typeface="Arial" pitchFamily="34" charset="-122"/>
                 <a:cs typeface="Arial" pitchFamily="34" charset="-120"/>
               </a:rPr>
-              <a:t>AI ASSISTANT IN SHONA</a:t>
+              <a:t>AI ASSISTANT + IOT COLLAR</a:t>
             </a:r>
             <a:endParaRPr lang="en-US" sz="1050" dirty="0"/>
           </a:p>
@@ -2837,7 +2926,7 @@
                 <a:ea typeface="Arial" pitchFamily="34" charset="-122"/>
                 <a:cs typeface="Arial" pitchFamily="34" charset="-120"/>
               </a:rPr>
-              <a:t>WHAT'S ACTUALLY BUILT</a:t>
+              <a:t>WHAT THIS CHANGES</a:t>
             </a:r>
             <a:endParaRPr lang="en-US" sz="3400" dirty="0"/>
           </a:p>
@@ -2845,57 +2934,18 @@
       </p:sp>
       <p:sp>
         <p:nvSpPr>
-          <p:cNvPr id="5" name="Text 3"/>
-          <p:cNvSpPr/>
-          <p:nvPr/>
-        </p:nvSpPr>
-        <p:spPr>
-          <a:xfrm>
-            <a:off x="566928" y="1371600"/>
-            <a:ext cx="10607040" cy="347472"/>
-          </a:xfrm>
-          <a:prstGeom prst="rect">
-            <a:avLst/>
-          </a:prstGeom>
-          <a:noFill/>
-          <a:ln/>
-        </p:spPr>
-        <p:txBody>
-          <a:bodyPr wrap="square" lIns="0" tIns="0" rIns="0" bIns="0" rtlCol="0" anchor="ctr"/>
-          <a:lstStyle/>
-          <a:p>
-            <a:pPr indent="0" marL="0">
-              <a:buNone/>
-            </a:pPr>
-            <a:r>
-              <a:rPr lang="en-US" sz="1500" dirty="0">
-                <a:solidFill>
-                  <a:srgbClr val="3F5545"/>
-                </a:solidFill>
-                <a:latin typeface="Calibri" pitchFamily="34" charset="0"/>
-                <a:ea typeface="Calibri" pitchFamily="34" charset="-122"/>
-                <a:cs typeface="Calibri" pitchFamily="34" charset="-120"/>
-              </a:rPr>
-              <a:t>Most projects at this stage are a UI mockup. Here is what already runs.</a:t>
-            </a:r>
-            <a:endParaRPr lang="en-US" sz="1500" dirty="0"/>
-          </a:p>
-        </p:txBody>
-      </p:sp>
-      <p:sp>
-        <p:nvSpPr>
-          <p:cNvPr id="6" name="Shape 4"/>
-          <p:cNvSpPr/>
-          <p:nvPr/>
-        </p:nvSpPr>
-        <p:spPr>
-          <a:xfrm>
-            <a:off x="566928" y="1901952"/>
-            <a:ext cx="3602736" cy="1755648"/>
+          <p:cNvPr id="5" name="Shape 3"/>
+          <p:cNvSpPr/>
+          <p:nvPr/>
+        </p:nvSpPr>
+        <p:spPr>
+          <a:xfrm>
+            <a:off x="566928" y="1517904"/>
+            <a:ext cx="11057839" cy="822960"/>
           </a:xfrm>
           <a:prstGeom prst="roundRect">
             <a:avLst>
-              <a:gd name="adj" fmla="val 3125"/>
+              <a:gd name="adj" fmla="val 6667"/>
             </a:avLst>
           </a:prstGeom>
           <a:solidFill>
@@ -2907,38 +2957,31 @@
             </a:solidFill>
             <a:prstDash val="solid"/>
           </a:ln>
-          <a:effectLst>
-            <a:outerShdw sx="100000" sy="100000" kx="0" ky="0" algn="bl" rotWithShape="0" blurRad="127000" dist="25400" dir="5400000">
-              <a:srgbClr val="1B5E20">
-                <a:alpha val="10000"/>
-              </a:srgbClr>
-            </a:outerShdw>
-          </a:effectLst>
-        </p:spPr>
-      </p:sp>
-      <p:sp>
-        <p:nvSpPr>
-          <p:cNvPr id="7" name="Shape 5"/>
-          <p:cNvSpPr/>
-          <p:nvPr/>
-        </p:nvSpPr>
-        <p:spPr>
-          <a:xfrm>
-            <a:off x="841248" y="2176272"/>
-            <a:ext cx="548640" cy="548640"/>
+        </p:spPr>
+      </p:sp>
+      <p:sp>
+        <p:nvSpPr>
+          <p:cNvPr id="6" name="Shape 4"/>
+          <p:cNvSpPr/>
+          <p:nvPr/>
+        </p:nvSpPr>
+        <p:spPr>
+          <a:xfrm>
+            <a:off x="822960" y="1673352"/>
+            <a:ext cx="512064" cy="512064"/>
           </a:xfrm>
           <a:prstGeom prst="ellipse">
             <a:avLst/>
           </a:prstGeom>
           <a:solidFill>
-            <a:srgbClr val="E7F3EA"/>
+            <a:srgbClr val="1B5E20"/>
           </a:solidFill>
           <a:ln/>
         </p:spPr>
       </p:sp>
       <p:pic>
         <p:nvPicPr>
-          <p:cNvPr id="8" name="Image 0" descr="preencoded.png">    </p:cNvPr>
+          <p:cNvPr id="7" name="Image 0" descr="preencoded.png">    </p:cNvPr>
           <p:cNvPicPr>
             <a:picLocks noChangeAspect="1"/>
           </p:cNvPicPr>
@@ -2952,8 +2995,8 @@
         </p:blipFill>
         <p:spPr>
           <a:xfrm>
-            <a:off x="983894" y="2318918"/>
-            <a:ext cx="263347" cy="263347"/>
+            <a:off x="956097" y="1806489"/>
+            <a:ext cx="245791" cy="245791"/>
           </a:xfrm>
           <a:prstGeom prst="rect">
             <a:avLst/>
@@ -2962,14 +3005,14 @@
       </p:pic>
       <p:sp>
         <p:nvSpPr>
-          <p:cNvPr id="9" name="Text 6"/>
-          <p:cNvSpPr/>
-          <p:nvPr/>
-        </p:nvSpPr>
-        <p:spPr>
-          <a:xfrm>
-            <a:off x="1536192" y="2176272"/>
-            <a:ext cx="2359152" cy="548640"/>
+          <p:cNvPr id="8" name="Text 5"/>
+          <p:cNvSpPr/>
+          <p:nvPr/>
+        </p:nvSpPr>
+        <p:spPr>
+          <a:xfrm>
+            <a:off x="1499616" y="1517904"/>
+            <a:ext cx="2377440" cy="822960"/>
           </a:xfrm>
           <a:prstGeom prst="rect">
             <a:avLst/>
@@ -2985,49 +3028,49 @@
               <a:buNone/>
             </a:pPr>
             <a:r>
-              <a:rPr lang="en-US" sz="1400" b="1" dirty="0">
-                <a:solidFill>
-                  <a:srgbClr val="0A2410"/>
+              <a:rPr lang="en-US" sz="1200" b="1" spc="80" kern="0" dirty="0">
+                <a:solidFill>
+                  <a:srgbClr val="1B5E20"/>
                 </a:solidFill>
                 <a:latin typeface="Arial" pitchFamily="34" charset="0"/>
                 <a:ea typeface="Arial" pitchFamily="34" charset="-122"/>
                 <a:cs typeface="Arial" pitchFamily="34" charset="-120"/>
               </a:rPr>
-              <a:t>Working backend</a:t>
-            </a:r>
-            <a:endParaRPr lang="en-US" sz="1400" dirty="0"/>
-          </a:p>
-        </p:txBody>
-      </p:sp>
-      <p:sp>
-        <p:nvSpPr>
-          <p:cNvPr id="10" name="Text 7"/>
-          <p:cNvSpPr/>
-          <p:nvPr/>
-        </p:nvSpPr>
-        <p:spPr>
-          <a:xfrm>
-            <a:off x="841248" y="2816352"/>
-            <a:ext cx="3054096" cy="676656"/>
-          </a:xfrm>
-          <a:prstGeom prst="rect">
-            <a:avLst/>
-          </a:prstGeom>
-          <a:noFill/>
-          <a:ln/>
-        </p:spPr>
-        <p:txBody>
-          <a:bodyPr wrap="square" lIns="0" tIns="0" rIns="0" bIns="0" rtlCol="0" anchor="t"/>
+              <a:t>FOR THE FARMER</a:t>
+            </a:r>
+            <a:endParaRPr lang="en-US" sz="1200" dirty="0"/>
+          </a:p>
+        </p:txBody>
+      </p:sp>
+      <p:sp>
+        <p:nvSpPr>
+          <p:cNvPr id="9" name="Text 6"/>
+          <p:cNvSpPr/>
+          <p:nvPr/>
+        </p:nvSpPr>
+        <p:spPr>
+          <a:xfrm>
+            <a:off x="3913632" y="1517904"/>
+            <a:ext cx="7436815" cy="822960"/>
+          </a:xfrm>
+          <a:prstGeom prst="rect">
+            <a:avLst/>
+          </a:prstGeom>
+          <a:noFill/>
+          <a:ln/>
+        </p:spPr>
+        <p:txBody>
+          <a:bodyPr wrap="square" lIns="0" tIns="0" rIns="0" bIns="0" rtlCol="0" anchor="ctr"/>
           <a:lstStyle/>
           <a:p>
             <a:pPr indent="0" marL="0">
               <a:lnSpc>
-                <a:spcPts val="1500"/>
+                <a:spcPts val="1550"/>
               </a:lnSpc>
               <a:buNone/>
             </a:pPr>
             <a:r>
-              <a:rPr lang="en-US" sz="1200" dirty="0">
+              <a:rPr lang="en-US" sz="1250" dirty="0">
                 <a:solidFill>
                   <a:srgbClr val="3F5545"/>
                 </a:solidFill>
@@ -3035,26 +3078,26 @@
                 <a:ea typeface="Calibri" pitchFamily="34" charset="-122"/>
                 <a:cs typeface="Calibri" pitchFamily="34" charset="-120"/>
               </a:rPr>
-              <a:t>Flask + PyMySQL with 30+ endpoints — not a stubbed demo API.</a:t>
-            </a:r>
-            <a:endParaRPr lang="en-US" sz="1200" dirty="0"/>
-          </a:p>
-        </p:txBody>
-      </p:sp>
-      <p:sp>
-        <p:nvSpPr>
-          <p:cNvPr id="11" name="Shape 8"/>
-          <p:cNvSpPr/>
-          <p:nvPr/>
-        </p:nvSpPr>
-        <p:spPr>
-          <a:xfrm>
-            <a:off x="4370832" y="1901952"/>
-            <a:ext cx="3602736" cy="1755648"/>
+              <a:t>Ownership he can prove, disease caught early, and a fair, documented sales channel instead of an isolated lowball offer. Verified profiles and clean sale history also make livestock wealth easier to borrow against.</a:t>
+            </a:r>
+            <a:endParaRPr lang="en-US" sz="1250" dirty="0"/>
+          </a:p>
+        </p:txBody>
+      </p:sp>
+      <p:sp>
+        <p:nvSpPr>
+          <p:cNvPr id="10" name="Shape 7"/>
+          <p:cNvSpPr/>
+          <p:nvPr/>
+        </p:nvSpPr>
+        <p:spPr>
+          <a:xfrm>
+            <a:off x="566928" y="2450592"/>
+            <a:ext cx="11057839" cy="822960"/>
           </a:xfrm>
           <a:prstGeom prst="roundRect">
             <a:avLst>
-              <a:gd name="adj" fmla="val 3125"/>
+              <a:gd name="adj" fmla="val 6667"/>
             </a:avLst>
           </a:prstGeom>
           <a:solidFill>
@@ -3066,38 +3109,31 @@
             </a:solidFill>
             <a:prstDash val="solid"/>
           </a:ln>
-          <a:effectLst>
-            <a:outerShdw sx="100000" sy="100000" kx="0" ky="0" algn="bl" rotWithShape="0" blurRad="127000" dist="25400" dir="5400000">
-              <a:srgbClr val="1B5E20">
-                <a:alpha val="10000"/>
-              </a:srgbClr>
-            </a:outerShdw>
-          </a:effectLst>
-        </p:spPr>
-      </p:sp>
-      <p:sp>
-        <p:nvSpPr>
-          <p:cNvPr id="12" name="Shape 9"/>
-          <p:cNvSpPr/>
-          <p:nvPr/>
-        </p:nvSpPr>
-        <p:spPr>
-          <a:xfrm>
-            <a:off x="4645152" y="2176272"/>
-            <a:ext cx="548640" cy="548640"/>
+        </p:spPr>
+      </p:sp>
+      <p:sp>
+        <p:nvSpPr>
+          <p:cNvPr id="11" name="Shape 8"/>
+          <p:cNvSpPr/>
+          <p:nvPr/>
+        </p:nvSpPr>
+        <p:spPr>
+          <a:xfrm>
+            <a:off x="822960" y="2606040"/>
+            <a:ext cx="512064" cy="512064"/>
           </a:xfrm>
           <a:prstGeom prst="ellipse">
             <a:avLst/>
           </a:prstGeom>
           <a:solidFill>
-            <a:srgbClr val="E7F3EA"/>
+            <a:srgbClr val="1B5E20"/>
           </a:solidFill>
           <a:ln/>
         </p:spPr>
       </p:sp>
       <p:pic>
         <p:nvPicPr>
-          <p:cNvPr id="13" name="Image 1" descr="preencoded.png">    </p:cNvPr>
+          <p:cNvPr id="12" name="Image 1" descr="preencoded.png">    </p:cNvPr>
           <p:cNvPicPr>
             <a:picLocks noChangeAspect="1"/>
           </p:cNvPicPr>
@@ -3111,8 +3147,8 @@
         </p:blipFill>
         <p:spPr>
           <a:xfrm>
-            <a:off x="4787798" y="2318918"/>
-            <a:ext cx="263347" cy="263347"/>
+            <a:off x="956097" y="2739177"/>
+            <a:ext cx="245791" cy="245791"/>
           </a:xfrm>
           <a:prstGeom prst="rect">
             <a:avLst/>
@@ -3121,14 +3157,14 @@
       </p:pic>
       <p:sp>
         <p:nvSpPr>
-          <p:cNvPr id="14" name="Text 10"/>
-          <p:cNvSpPr/>
-          <p:nvPr/>
-        </p:nvSpPr>
-        <p:spPr>
-          <a:xfrm>
-            <a:off x="5340096" y="2176272"/>
-            <a:ext cx="2359152" cy="548640"/>
+          <p:cNvPr id="13" name="Text 9"/>
+          <p:cNvSpPr/>
+          <p:nvPr/>
+        </p:nvSpPr>
+        <p:spPr>
+          <a:xfrm>
+            <a:off x="1499616" y="2450592"/>
+            <a:ext cx="2377440" cy="822960"/>
           </a:xfrm>
           <a:prstGeom prst="rect">
             <a:avLst/>
@@ -3144,49 +3180,49 @@
               <a:buNone/>
             </a:pPr>
             <a:r>
-              <a:rPr lang="en-US" sz="1400" b="1" dirty="0">
-                <a:solidFill>
-                  <a:srgbClr val="0A2410"/>
+              <a:rPr lang="en-US" sz="1200" b="1" spc="80" kern="0" dirty="0">
+                <a:solidFill>
+                  <a:srgbClr val="1B5E20"/>
                 </a:solidFill>
                 <a:latin typeface="Arial" pitchFamily="34" charset="0"/>
                 <a:ea typeface="Arial" pitchFamily="34" charset="-122"/>
                 <a:cs typeface="Arial" pitchFamily="34" charset="-120"/>
               </a:rPr>
-              <a:t>Real database</a:t>
-            </a:r>
-            <a:endParaRPr lang="en-US" sz="1400" dirty="0"/>
-          </a:p>
-        </p:txBody>
-      </p:sp>
-      <p:sp>
-        <p:nvSpPr>
-          <p:cNvPr id="15" name="Text 11"/>
-          <p:cNvSpPr/>
-          <p:nvPr/>
-        </p:nvSpPr>
-        <p:spPr>
-          <a:xfrm>
-            <a:off x="4645152" y="2816352"/>
-            <a:ext cx="3054096" cy="676656"/>
-          </a:xfrm>
-          <a:prstGeom prst="rect">
-            <a:avLst/>
-          </a:prstGeom>
-          <a:noFill/>
-          <a:ln/>
-        </p:spPr>
-        <p:txBody>
-          <a:bodyPr wrap="square" lIns="0" tIns="0" rIns="0" bIns="0" rtlCol="0" anchor="t"/>
+              <a:t>FOR THE VETERINARIAN</a:t>
+            </a:r>
+            <a:endParaRPr lang="en-US" sz="1200" dirty="0"/>
+          </a:p>
+        </p:txBody>
+      </p:sp>
+      <p:sp>
+        <p:nvSpPr>
+          <p:cNvPr id="14" name="Text 10"/>
+          <p:cNvSpPr/>
+          <p:nvPr/>
+        </p:nvSpPr>
+        <p:spPr>
+          <a:xfrm>
+            <a:off x="3913632" y="2450592"/>
+            <a:ext cx="7436815" cy="822960"/>
+          </a:xfrm>
+          <a:prstGeom prst="rect">
+            <a:avLst/>
+          </a:prstGeom>
+          <a:noFill/>
+          <a:ln/>
+        </p:spPr>
+        <p:txBody>
+          <a:bodyPr wrap="square" lIns="0" tIns="0" rIns="0" bIns="0" rtlCol="0" anchor="ctr"/>
           <a:lstStyle/>
           <a:p>
             <a:pPr indent="0" marL="0">
               <a:lnSpc>
-                <a:spcPts val="1500"/>
+                <a:spcPts val="1550"/>
               </a:lnSpc>
               <a:buNone/>
             </a:pPr>
             <a:r>
-              <a:rPr lang="en-US" sz="1200" dirty="0">
+              <a:rPr lang="en-US" sz="1250" dirty="0">
                 <a:solidFill>
                   <a:srgbClr val="3F5545"/>
                 </a:solidFill>
@@ -3194,26 +3230,26 @@
                 <a:ea typeface="Calibri" pitchFamily="34" charset="-122"/>
                 <a:cs typeface="Calibri" pitchFamily="34" charset="-120"/>
               </a:rPr>
-              <a:t>A MySQL schema covering animals, health records, listings, clearances and users.</a:t>
-            </a:r>
-            <a:endParaRPr lang="en-US" sz="1200" dirty="0"/>
-          </a:p>
-        </p:txBody>
-      </p:sp>
-      <p:sp>
-        <p:nvSpPr>
-          <p:cNvPr id="16" name="Shape 12"/>
-          <p:cNvSpPr/>
-          <p:nvPr/>
-        </p:nvSpPr>
-        <p:spPr>
-          <a:xfrm>
-            <a:off x="8174736" y="1901952"/>
-            <a:ext cx="3602736" cy="1755648"/>
+              <a:t>Fewer wasted trips and real outbreak visibility. Province and district tagging builds exactly the regional surveillance data DVS needs for contact tracing.</a:t>
+            </a:r>
+            <a:endParaRPr lang="en-US" sz="1250" dirty="0"/>
+          </a:p>
+        </p:txBody>
+      </p:sp>
+      <p:sp>
+        <p:nvSpPr>
+          <p:cNvPr id="15" name="Shape 11"/>
+          <p:cNvSpPr/>
+          <p:nvPr/>
+        </p:nvSpPr>
+        <p:spPr>
+          <a:xfrm>
+            <a:off x="566928" y="3383280"/>
+            <a:ext cx="11057839" cy="822960"/>
           </a:xfrm>
           <a:prstGeom prst="roundRect">
             <a:avLst>
-              <a:gd name="adj" fmla="val 3125"/>
+              <a:gd name="adj" fmla="val 6667"/>
             </a:avLst>
           </a:prstGeom>
           <a:solidFill>
@@ -3225,38 +3261,31 @@
             </a:solidFill>
             <a:prstDash val="solid"/>
           </a:ln>
-          <a:effectLst>
-            <a:outerShdw sx="100000" sy="100000" kx="0" ky="0" algn="bl" rotWithShape="0" blurRad="127000" dist="25400" dir="5400000">
-              <a:srgbClr val="1B5E20">
-                <a:alpha val="10000"/>
-              </a:srgbClr>
-            </a:outerShdw>
-          </a:effectLst>
-        </p:spPr>
-      </p:sp>
-      <p:sp>
-        <p:nvSpPr>
-          <p:cNvPr id="17" name="Shape 13"/>
-          <p:cNvSpPr/>
-          <p:nvPr/>
-        </p:nvSpPr>
-        <p:spPr>
-          <a:xfrm>
-            <a:off x="8449056" y="2176272"/>
-            <a:ext cx="548640" cy="548640"/>
+        </p:spPr>
+      </p:sp>
+      <p:sp>
+        <p:nvSpPr>
+          <p:cNvPr id="16" name="Shape 12"/>
+          <p:cNvSpPr/>
+          <p:nvPr/>
+        </p:nvSpPr>
+        <p:spPr>
+          <a:xfrm>
+            <a:off x="822960" y="3538728"/>
+            <a:ext cx="512064" cy="512064"/>
           </a:xfrm>
           <a:prstGeom prst="ellipse">
             <a:avLst/>
           </a:prstGeom>
           <a:solidFill>
-            <a:srgbClr val="E7F3EA"/>
+            <a:srgbClr val="1B5E20"/>
           </a:solidFill>
           <a:ln/>
         </p:spPr>
       </p:sp>
       <p:pic>
         <p:nvPicPr>
-          <p:cNvPr id="18" name="Image 2" descr="preencoded.png">    </p:cNvPr>
+          <p:cNvPr id="17" name="Image 2" descr="preencoded.png">    </p:cNvPr>
           <p:cNvPicPr>
             <a:picLocks noChangeAspect="1"/>
           </p:cNvPicPr>
@@ -3270,8 +3299,8 @@
         </p:blipFill>
         <p:spPr>
           <a:xfrm>
-            <a:off x="8591702" y="2318918"/>
-            <a:ext cx="263347" cy="263347"/>
+            <a:off x="956097" y="3671865"/>
+            <a:ext cx="245791" cy="245791"/>
           </a:xfrm>
           <a:prstGeom prst="rect">
             <a:avLst/>
@@ -3280,14 +3309,14 @@
       </p:pic>
       <p:sp>
         <p:nvSpPr>
-          <p:cNvPr id="19" name="Text 14"/>
-          <p:cNvSpPr/>
-          <p:nvPr/>
-        </p:nvSpPr>
-        <p:spPr>
-          <a:xfrm>
-            <a:off x="9144000" y="2176272"/>
-            <a:ext cx="2359152" cy="548640"/>
+          <p:cNvPr id="18" name="Text 13"/>
+          <p:cNvSpPr/>
+          <p:nvPr/>
+        </p:nvSpPr>
+        <p:spPr>
+          <a:xfrm>
+            <a:off x="1499616" y="3383280"/>
+            <a:ext cx="2377440" cy="822960"/>
           </a:xfrm>
           <a:prstGeom prst="rect">
             <a:avLst/>
@@ -3303,49 +3332,49 @@
               <a:buNone/>
             </a:pPr>
             <a:r>
-              <a:rPr lang="en-US" sz="1400" b="1" dirty="0">
-                <a:solidFill>
-                  <a:srgbClr val="0A2410"/>
+              <a:rPr lang="en-US" sz="1200" b="1" spc="80" kern="0" dirty="0">
+                <a:solidFill>
+                  <a:srgbClr val="1B5E20"/>
                 </a:solidFill>
                 <a:latin typeface="Arial" pitchFamily="34" charset="0"/>
                 <a:ea typeface="Arial" pitchFamily="34" charset="-122"/>
                 <a:cs typeface="Arial" pitchFamily="34" charset="-120"/>
               </a:rPr>
-              <a:t>Real security</a:t>
-            </a:r>
-            <a:endParaRPr lang="en-US" sz="1400" dirty="0"/>
-          </a:p>
-        </p:txBody>
-      </p:sp>
-      <p:sp>
-        <p:nvSpPr>
-          <p:cNvPr id="20" name="Text 15"/>
-          <p:cNvSpPr/>
-          <p:nvPr/>
-        </p:nvSpPr>
-        <p:spPr>
-          <a:xfrm>
-            <a:off x="8449056" y="2816352"/>
-            <a:ext cx="3054096" cy="676656"/>
-          </a:xfrm>
-          <a:prstGeom prst="rect">
-            <a:avLst/>
-          </a:prstGeom>
-          <a:noFill/>
-          <a:ln/>
-        </p:spPr>
-        <p:txBody>
-          <a:bodyPr wrap="square" lIns="0" tIns="0" rIns="0" bIns="0" rtlCol="0" anchor="t"/>
+              <a:t>FOR SUPPLIERS AND RETAILERS</a:t>
+            </a:r>
+            <a:endParaRPr lang="en-US" sz="1200" dirty="0"/>
+          </a:p>
+        </p:txBody>
+      </p:sp>
+      <p:sp>
+        <p:nvSpPr>
+          <p:cNvPr id="19" name="Text 14"/>
+          <p:cNvSpPr/>
+          <p:nvPr/>
+        </p:nvSpPr>
+        <p:spPr>
+          <a:xfrm>
+            <a:off x="3913632" y="3383280"/>
+            <a:ext cx="7436815" cy="822960"/>
+          </a:xfrm>
+          <a:prstGeom prst="rect">
+            <a:avLst/>
+          </a:prstGeom>
+          <a:noFill/>
+          <a:ln/>
+        </p:spPr>
+        <p:txBody>
+          <a:bodyPr wrap="square" lIns="0" tIns="0" rIns="0" bIns="0" rtlCol="0" anchor="ctr"/>
           <a:lstStyle/>
           <a:p>
             <a:pPr indent="0" marL="0">
               <a:lnSpc>
-                <a:spcPts val="1500"/>
+                <a:spcPts val="1550"/>
               </a:lnSpc>
               <a:buNone/>
             </a:pPr>
             <a:r>
-              <a:rPr lang="en-US" sz="1200" dirty="0">
+              <a:rPr lang="en-US" sz="1250" dirty="0">
                 <a:solidFill>
                   <a:srgbClr val="3F5545"/>
                 </a:solidFill>
@@ -3353,26 +3382,26 @@
                 <a:ea typeface="Calibri" pitchFamily="34" charset="-122"/>
                 <a:cs typeface="Calibri" pitchFamily="34" charset="-120"/>
               </a:rPr>
-              <a:t>bcrypt hashing, JWT sessions, per-owner scoping, uploads served outside the web root.</a:t>
-            </a:r>
-            <a:endParaRPr lang="en-US" sz="1200" dirty="0"/>
-          </a:p>
-        </p:txBody>
-      </p:sp>
-      <p:sp>
-        <p:nvSpPr>
-          <p:cNvPr id="21" name="Shape 16"/>
-          <p:cNvSpPr/>
-          <p:nvPr/>
-        </p:nvSpPr>
-        <p:spPr>
-          <a:xfrm>
-            <a:off x="566928" y="3858768"/>
-            <a:ext cx="3602736" cy="1755648"/>
+              <a:t>A direct channel to the farmers who need their stock, and buyers who are no longer one bad purchase away from a receiving-stolen-goods charge.</a:t>
+            </a:r>
+            <a:endParaRPr lang="en-US" sz="1250" dirty="0"/>
+          </a:p>
+        </p:txBody>
+      </p:sp>
+      <p:sp>
+        <p:nvSpPr>
+          <p:cNvPr id="20" name="Shape 15"/>
+          <p:cNvSpPr/>
+          <p:nvPr/>
+        </p:nvSpPr>
+        <p:spPr>
+          <a:xfrm>
+            <a:off x="566928" y="4315968"/>
+            <a:ext cx="11057839" cy="822960"/>
           </a:xfrm>
           <a:prstGeom prst="roundRect">
             <a:avLst>
-              <a:gd name="adj" fmla="val 3125"/>
+              <a:gd name="adj" fmla="val 6667"/>
             </a:avLst>
           </a:prstGeom>
           <a:solidFill>
@@ -3384,38 +3413,31 @@
             </a:solidFill>
             <a:prstDash val="solid"/>
           </a:ln>
-          <a:effectLst>
-            <a:outerShdw sx="100000" sy="100000" kx="0" ky="0" algn="bl" rotWithShape="0" blurRad="127000" dist="25400" dir="5400000">
-              <a:srgbClr val="1B5E20">
-                <a:alpha val="10000"/>
-              </a:srgbClr>
-            </a:outerShdw>
-          </a:effectLst>
-        </p:spPr>
-      </p:sp>
-      <p:sp>
-        <p:nvSpPr>
-          <p:cNvPr id="22" name="Shape 17"/>
-          <p:cNvSpPr/>
-          <p:nvPr/>
-        </p:nvSpPr>
-        <p:spPr>
-          <a:xfrm>
-            <a:off x="841248" y="4133088"/>
-            <a:ext cx="548640" cy="548640"/>
+        </p:spPr>
+      </p:sp>
+      <p:sp>
+        <p:nvSpPr>
+          <p:cNvPr id="21" name="Shape 16"/>
+          <p:cNvSpPr/>
+          <p:nvPr/>
+        </p:nvSpPr>
+        <p:spPr>
+          <a:xfrm>
+            <a:off x="822960" y="4471416"/>
+            <a:ext cx="512064" cy="512064"/>
           </a:xfrm>
           <a:prstGeom prst="ellipse">
             <a:avLst/>
           </a:prstGeom>
           <a:solidFill>
-            <a:srgbClr val="E7F3EA"/>
+            <a:srgbClr val="1B5E20"/>
           </a:solidFill>
           <a:ln/>
         </p:spPr>
       </p:sp>
       <p:pic>
         <p:nvPicPr>
-          <p:cNvPr id="23" name="Image 3" descr="preencoded.png">    </p:cNvPr>
+          <p:cNvPr id="22" name="Image 3" descr="preencoded.png">    </p:cNvPr>
           <p:cNvPicPr>
             <a:picLocks noChangeAspect="1"/>
           </p:cNvPicPr>
@@ -3429,8 +3451,8 @@
         </p:blipFill>
         <p:spPr>
           <a:xfrm>
-            <a:off x="983894" y="4275734"/>
-            <a:ext cx="263347" cy="263347"/>
+            <a:off x="956097" y="4604553"/>
+            <a:ext cx="245791" cy="245791"/>
           </a:xfrm>
           <a:prstGeom prst="rect">
             <a:avLst/>
@@ -3439,14 +3461,14 @@
       </p:pic>
       <p:sp>
         <p:nvSpPr>
-          <p:cNvPr id="24" name="Text 18"/>
-          <p:cNvSpPr/>
-          <p:nvPr/>
-        </p:nvSpPr>
-        <p:spPr>
-          <a:xfrm>
-            <a:off x="1536192" y="4133088"/>
-            <a:ext cx="2359152" cy="548640"/>
+          <p:cNvPr id="23" name="Text 17"/>
+          <p:cNvSpPr/>
+          <p:nvPr/>
+        </p:nvSpPr>
+        <p:spPr>
+          <a:xfrm>
+            <a:off x="1499616" y="4315968"/>
+            <a:ext cx="2377440" cy="822960"/>
           </a:xfrm>
           <a:prstGeom prst="rect">
             <a:avLst/>
@@ -3462,49 +3484,49 @@
               <a:buNone/>
             </a:pPr>
             <a:r>
-              <a:rPr lang="en-US" sz="1400" b="1" dirty="0">
-                <a:solidFill>
-                  <a:srgbClr val="0A2410"/>
+              <a:rPr lang="en-US" sz="1200" b="1" spc="80" kern="0" dirty="0">
+                <a:solidFill>
+                  <a:srgbClr val="1B5E20"/>
                 </a:solidFill>
                 <a:latin typeface="Arial" pitchFamily="34" charset="0"/>
                 <a:ea typeface="Arial" pitchFamily="34" charset="-122"/>
                 <a:cs typeface="Arial" pitchFamily="34" charset="-120"/>
               </a:rPr>
-              <a:t>Web + mobile</a:t>
-            </a:r>
-            <a:endParaRPr lang="en-US" sz="1400" dirty="0"/>
-          </a:p>
-        </p:txBody>
-      </p:sp>
-      <p:sp>
-        <p:nvSpPr>
-          <p:cNvPr id="25" name="Text 19"/>
-          <p:cNvSpPr/>
-          <p:nvPr/>
-        </p:nvSpPr>
-        <p:spPr>
-          <a:xfrm>
-            <a:off x="841248" y="4773168"/>
-            <a:ext cx="3054096" cy="676656"/>
-          </a:xfrm>
-          <a:prstGeom prst="rect">
-            <a:avLst/>
-          </a:prstGeom>
-          <a:noFill/>
-          <a:ln/>
-        </p:spPr>
-        <p:txBody>
-          <a:bodyPr wrap="square" lIns="0" tIns="0" rIns="0" bIns="0" rtlCol="0" anchor="t"/>
+              <a:t>FOR POLICE AND DVS</a:t>
+            </a:r>
+            <a:endParaRPr lang="en-US" sz="1200" dirty="0"/>
+          </a:p>
+        </p:txBody>
+      </p:sp>
+      <p:sp>
+        <p:nvSpPr>
+          <p:cNvPr id="24" name="Text 18"/>
+          <p:cNvSpPr/>
+          <p:nvPr/>
+        </p:nvSpPr>
+        <p:spPr>
+          <a:xfrm>
+            <a:off x="3913632" y="4315968"/>
+            <a:ext cx="7436815" cy="822960"/>
+          </a:xfrm>
+          <a:prstGeom prst="rect">
+            <a:avLst/>
+          </a:prstGeom>
+          <a:noFill/>
+          <a:ln/>
+        </p:spPr>
+        <p:txBody>
+          <a:bodyPr wrap="square" lIns="0" tIns="0" rIns="0" bIns="0" rtlCol="0" anchor="ctr"/>
           <a:lstStyle/>
           <a:p>
             <a:pPr indent="0" marL="0">
               <a:lnSpc>
-                <a:spcPts val="1500"/>
+                <a:spcPts val="1550"/>
               </a:lnSpc>
               <a:buNone/>
             </a:pPr>
             <a:r>
-              <a:rPr lang="en-US" sz="1200" dirty="0">
+              <a:rPr lang="en-US" sz="1250" dirty="0">
                 <a:solidFill>
                   <a:srgbClr val="3F5545"/>
                 </a:solidFill>
@@ -3512,26 +3534,26 @@
                 <a:ea typeface="Calibri" pitchFamily="34" charset="-122"/>
                 <a:cs typeface="Calibri" pitchFamily="34" charset="-120"/>
               </a:rPr>
-              <a:t>React (Vite) + Tailwind on the desktop, an Expo app on the phone, one API behind both.</a:t>
-            </a:r>
-            <a:endParaRPr lang="en-US" sz="1200" dirty="0"/>
-          </a:p>
-        </p:txBody>
-      </p:sp>
-      <p:sp>
-        <p:nvSpPr>
-          <p:cNvPr id="26" name="Shape 20"/>
-          <p:cNvSpPr/>
-          <p:nvPr/>
-        </p:nvSpPr>
-        <p:spPr>
-          <a:xfrm>
-            <a:off x="4370832" y="3858768"/>
-            <a:ext cx="3602736" cy="1755648"/>
+              <a:t>Clearance stops being a paper courtesy and becomes a structural gate. Officers review from a queue instead of chasing paperwork on foot.</a:t>
+            </a:r>
+            <a:endParaRPr lang="en-US" sz="1250" dirty="0"/>
+          </a:p>
+        </p:txBody>
+      </p:sp>
+      <p:sp>
+        <p:nvSpPr>
+          <p:cNvPr id="25" name="Shape 19"/>
+          <p:cNvSpPr/>
+          <p:nvPr/>
+        </p:nvSpPr>
+        <p:spPr>
+          <a:xfrm>
+            <a:off x="566928" y="5248656"/>
+            <a:ext cx="11057839" cy="822960"/>
           </a:xfrm>
           <a:prstGeom prst="roundRect">
             <a:avLst>
-              <a:gd name="adj" fmla="val 3125"/>
+              <a:gd name="adj" fmla="val 6667"/>
             </a:avLst>
           </a:prstGeom>
           <a:solidFill>
@@ -3543,38 +3565,31 @@
             </a:solidFill>
             <a:prstDash val="solid"/>
           </a:ln>
-          <a:effectLst>
-            <a:outerShdw sx="100000" sy="100000" kx="0" ky="0" algn="bl" rotWithShape="0" blurRad="127000" dist="25400" dir="5400000">
-              <a:srgbClr val="1B5E20">
-                <a:alpha val="10000"/>
-              </a:srgbClr>
-            </a:outerShdw>
-          </a:effectLst>
-        </p:spPr>
-      </p:sp>
-      <p:sp>
-        <p:nvSpPr>
-          <p:cNvPr id="27" name="Shape 21"/>
-          <p:cNvSpPr/>
-          <p:nvPr/>
-        </p:nvSpPr>
-        <p:spPr>
-          <a:xfrm>
-            <a:off x="4645152" y="4133088"/>
-            <a:ext cx="548640" cy="548640"/>
+        </p:spPr>
+      </p:sp>
+      <p:sp>
+        <p:nvSpPr>
+          <p:cNvPr id="26" name="Shape 20"/>
+          <p:cNvSpPr/>
+          <p:nvPr/>
+        </p:nvSpPr>
+        <p:spPr>
+          <a:xfrm>
+            <a:off x="822960" y="5404104"/>
+            <a:ext cx="512064" cy="512064"/>
           </a:xfrm>
           <a:prstGeom prst="ellipse">
             <a:avLst/>
           </a:prstGeom>
           <a:solidFill>
-            <a:srgbClr val="E7F3EA"/>
+            <a:srgbClr val="1B5E20"/>
           </a:solidFill>
           <a:ln/>
         </p:spPr>
       </p:sp>
       <p:pic>
         <p:nvPicPr>
-          <p:cNvPr id="28" name="Image 4" descr="preencoded.png">    </p:cNvPr>
+          <p:cNvPr id="27" name="Image 4" descr="preencoded.png">    </p:cNvPr>
           <p:cNvPicPr>
             <a:picLocks noChangeAspect="1"/>
           </p:cNvPicPr>
@@ -3588,8 +3603,8 @@
         </p:blipFill>
         <p:spPr>
           <a:xfrm>
-            <a:off x="4787798" y="4275734"/>
-            <a:ext cx="263347" cy="263347"/>
+            <a:off x="956097" y="5537241"/>
+            <a:ext cx="245791" cy="245791"/>
           </a:xfrm>
           <a:prstGeom prst="rect">
             <a:avLst/>
@@ -3598,14 +3613,14 @@
       </p:pic>
       <p:sp>
         <p:nvSpPr>
-          <p:cNvPr id="29" name="Text 22"/>
-          <p:cNvSpPr/>
-          <p:nvPr/>
-        </p:nvSpPr>
-        <p:spPr>
-          <a:xfrm>
-            <a:off x="5340096" y="4133088"/>
-            <a:ext cx="2359152" cy="548640"/>
+          <p:cNvPr id="28" name="Text 21"/>
+          <p:cNvSpPr/>
+          <p:nvPr/>
+        </p:nvSpPr>
+        <p:spPr>
+          <a:xfrm>
+            <a:off x="1499616" y="5248656"/>
+            <a:ext cx="2377440" cy="822960"/>
           </a:xfrm>
           <a:prstGeom prst="rect">
             <a:avLst/>
@@ -3621,49 +3636,49 @@
               <a:buNone/>
             </a:pPr>
             <a:r>
-              <a:rPr lang="en-US" sz="1400" b="1" dirty="0">
-                <a:solidFill>
-                  <a:srgbClr val="0A2410"/>
+              <a:rPr lang="en-US" sz="1200" b="1" spc="80" kern="0" dirty="0">
+                <a:solidFill>
+                  <a:srgbClr val="1B5E20"/>
                 </a:solidFill>
                 <a:latin typeface="Arial" pitchFamily="34" charset="0"/>
                 <a:ea typeface="Arial" pitchFamily="34" charset="-122"/>
                 <a:cs typeface="Arial" pitchFamily="34" charset="-120"/>
               </a:rPr>
-              <a:t>Tested logic</a:t>
-            </a:r>
-            <a:endParaRPr lang="en-US" sz="1400" dirty="0"/>
-          </a:p>
-        </p:txBody>
-      </p:sp>
-      <p:sp>
-        <p:nvSpPr>
-          <p:cNvPr id="30" name="Text 23"/>
-          <p:cNvSpPr/>
-          <p:nvPr/>
-        </p:nvSpPr>
-        <p:spPr>
-          <a:xfrm>
-            <a:off x="4645152" y="4773168"/>
-            <a:ext cx="3054096" cy="676656"/>
-          </a:xfrm>
-          <a:prstGeom prst="rect">
-            <a:avLst/>
-          </a:prstGeom>
-          <a:noFill/>
-          <a:ln/>
-        </p:spPr>
-        <p:txBody>
-          <a:bodyPr wrap="square" lIns="0" tIns="0" rIns="0" bIns="0" rtlCol="0" anchor="t"/>
+              <a:t>FOR THE COUNTRY</a:t>
+            </a:r>
+            <a:endParaRPr lang="en-US" sz="1200" dirty="0"/>
+          </a:p>
+        </p:txBody>
+      </p:sp>
+      <p:sp>
+        <p:nvSpPr>
+          <p:cNvPr id="29" name="Text 22"/>
+          <p:cNvSpPr/>
+          <p:nvPr/>
+        </p:nvSpPr>
+        <p:spPr>
+          <a:xfrm>
+            <a:off x="3913632" y="5248656"/>
+            <a:ext cx="7436815" cy="822960"/>
+          </a:xfrm>
+          <a:prstGeom prst="rect">
+            <a:avLst/>
+          </a:prstGeom>
+          <a:noFill/>
+          <a:ln/>
+        </p:spPr>
+        <p:txBody>
+          <a:bodyPr wrap="square" lIns="0" tIns="0" rIns="0" bIns="0" rtlCol="0" anchor="ctr"/>
           <a:lstStyle/>
           <a:p>
             <a:pPr indent="0" marL="0">
               <a:lnSpc>
-                <a:spcPts val="1500"/>
+                <a:spcPts val="1550"/>
               </a:lnSpc>
               <a:buNone/>
             </a:pPr>
             <a:r>
-              <a:rPr lang="en-US" sz="1200" dirty="0">
+              <a:rPr lang="en-US" sz="1250" dirty="0">
                 <a:solidFill>
                   <a:srgbClr val="3F5545"/>
                 </a:solidFill>
@@ -3671,100 +3686,22 @@
                 <a:ea typeface="Calibri" pitchFamily="34" charset="-122"/>
                 <a:cs typeface="Calibri" pitchFamily="34" charset="-120"/>
               </a:rPr>
-              <a:t>The diagnostics engine and regional protocol data are covered by a passing test suite.</a:t>
-            </a:r>
-            <a:endParaRPr lang="en-US" sz="1200" dirty="0"/>
-          </a:p>
-        </p:txBody>
-      </p:sp>
-      <p:sp>
-        <p:nvSpPr>
-          <p:cNvPr id="31" name="Shape 24"/>
-          <p:cNvSpPr/>
-          <p:nvPr/>
-        </p:nvSpPr>
-        <p:spPr>
-          <a:xfrm>
-            <a:off x="8174736" y="3858768"/>
-            <a:ext cx="3602736" cy="1755648"/>
-          </a:xfrm>
-          <a:prstGeom prst="roundRect">
-            <a:avLst>
-              <a:gd name="adj" fmla="val 3125"/>
-            </a:avLst>
-          </a:prstGeom>
-          <a:solidFill>
-            <a:srgbClr val="FFFFFF"/>
-          </a:solidFill>
-          <a:ln w="12700">
-            <a:solidFill>
-              <a:srgbClr val="D8E6DB"/>
-            </a:solidFill>
-            <a:prstDash val="solid"/>
-          </a:ln>
-          <a:effectLst>
-            <a:outerShdw sx="100000" sy="100000" kx="0" ky="0" algn="bl" rotWithShape="0" blurRad="127000" dist="25400" dir="5400000">
-              <a:srgbClr val="1B5E20">
-                <a:alpha val="10000"/>
-              </a:srgbClr>
-            </a:outerShdw>
-          </a:effectLst>
-        </p:spPr>
-      </p:sp>
-      <p:sp>
-        <p:nvSpPr>
-          <p:cNvPr id="32" name="Shape 25"/>
-          <p:cNvSpPr/>
-          <p:nvPr/>
-        </p:nvSpPr>
-        <p:spPr>
-          <a:xfrm>
-            <a:off x="8449056" y="4133088"/>
-            <a:ext cx="548640" cy="548640"/>
-          </a:xfrm>
-          <a:prstGeom prst="ellipse">
-            <a:avLst/>
-          </a:prstGeom>
-          <a:solidFill>
-            <a:srgbClr val="E7F3EA"/>
-          </a:solidFill>
-          <a:ln/>
-        </p:spPr>
-      </p:sp>
-      <p:pic>
-        <p:nvPicPr>
-          <p:cNvPr id="33" name="Image 5" descr="preencoded.png">    </p:cNvPr>
-          <p:cNvPicPr>
-            <a:picLocks noChangeAspect="1"/>
-          </p:cNvPicPr>
-          <p:nvPr/>
-        </p:nvPicPr>
-        <p:blipFill>
-          <a:blip r:embed="rId7"/>
-          <a:stretch>
-            <a:fillRect/>
-          </a:stretch>
-        </p:blipFill>
-        <p:spPr>
-          <a:xfrm>
-            <a:off x="8591702" y="4275734"/>
-            <a:ext cx="263347" cy="263347"/>
-          </a:xfrm>
-          <a:prstGeom prst="rect">
-            <a:avLst/>
-          </a:prstGeom>
-        </p:spPr>
-      </p:pic>
-      <p:sp>
-        <p:nvSpPr>
-          <p:cNvPr id="34" name="Text 26"/>
-          <p:cNvSpPr/>
-          <p:nvPr/>
-        </p:nvSpPr>
-        <p:spPr>
-          <a:xfrm>
-            <a:off x="9144000" y="4133088"/>
-            <a:ext cx="2359152" cy="548640"/>
+              <a:t>Fewer disease deaths, less theft, better price discovery and easier access to vets compound into real rural household income — a measurable outcome, not a technology showcase.</a:t>
+            </a:r>
+            <a:endParaRPr lang="en-US" sz="1250" dirty="0"/>
+          </a:p>
+        </p:txBody>
+      </p:sp>
+      <p:sp>
+        <p:nvSpPr>
+          <p:cNvPr id="30" name="Text 23"/>
+          <p:cNvSpPr/>
+          <p:nvPr/>
+        </p:nvSpPr>
+        <p:spPr>
+          <a:xfrm>
+            <a:off x="566928" y="6254496"/>
+            <a:ext cx="11057839" cy="310896"/>
           </a:xfrm>
           <a:prstGeom prst="rect">
             <a:avLst/>
@@ -3776,124 +3713,21 @@
           <a:bodyPr wrap="square" lIns="0" tIns="0" rIns="0" bIns="0" rtlCol="0" anchor="ctr"/>
           <a:lstStyle/>
           <a:p>
-            <a:pPr indent="0" marL="0">
-              <a:buNone/>
-            </a:pPr>
-            <a:r>
-              <a:rPr lang="en-US" sz="1400" b="1" dirty="0">
-                <a:solidFill>
-                  <a:srgbClr val="0A2410"/>
-                </a:solidFill>
-                <a:latin typeface="Arial" pitchFamily="34" charset="0"/>
-                <a:ea typeface="Arial" pitchFamily="34" charset="-122"/>
-                <a:cs typeface="Arial" pitchFamily="34" charset="-120"/>
-              </a:rPr>
-              <a:t>Cited legal research</a:t>
-            </a:r>
-            <a:endParaRPr lang="en-US" sz="1400" dirty="0"/>
-          </a:p>
-        </p:txBody>
-      </p:sp>
-      <p:sp>
-        <p:nvSpPr>
-          <p:cNvPr id="35" name="Text 27"/>
-          <p:cNvSpPr/>
-          <p:nvPr/>
-        </p:nvSpPr>
-        <p:spPr>
-          <a:xfrm>
-            <a:off x="8449056" y="4773168"/>
-            <a:ext cx="3054096" cy="676656"/>
-          </a:xfrm>
-          <a:prstGeom prst="rect">
-            <a:avLst/>
-          </a:prstGeom>
-          <a:noFill/>
-          <a:ln/>
-        </p:spPr>
-        <p:txBody>
-          <a:bodyPr wrap="square" lIns="0" tIns="0" rIns="0" bIns="0" rtlCol="0" anchor="t"/>
-          <a:lstStyle/>
-          <a:p>
-            <a:pPr indent="0" marL="0">
-              <a:lnSpc>
-                <a:spcPts val="1500"/>
-              </a:lnSpc>
-              <a:buNone/>
-            </a:pPr>
-            <a:r>
-              <a:rPr lang="en-US" sz="1200" dirty="0">
-                <a:solidFill>
-                  <a:srgbClr val="3F5545"/>
+            <a:pPr algn="l" indent="0" marL="0">
+              <a:buNone/>
+            </a:pPr>
+            <a:r>
+              <a:rPr lang="en-US" sz="1150" i="1" dirty="0">
+                <a:solidFill>
+                  <a:srgbClr val="6B8272"/>
                 </a:solidFill>
                 <a:latin typeface="Calibri" pitchFamily="34" charset="0"/>
                 <a:ea typeface="Calibri" pitchFamily="34" charset="-122"/>
                 <a:cs typeface="Calibri" pitchFamily="34" charset="-120"/>
               </a:rPr>
-              <a:t>Six Acts mapped to features, with sources — and the gaps named rather than hidden.</a:t>
-            </a:r>
-            <a:endParaRPr lang="en-US" sz="1200" dirty="0"/>
-          </a:p>
-        </p:txBody>
-      </p:sp>
-      <p:sp>
-        <p:nvSpPr>
-          <p:cNvPr id="36" name="Shape 28"/>
-          <p:cNvSpPr/>
-          <p:nvPr/>
-        </p:nvSpPr>
-        <p:spPr>
-          <a:xfrm>
-            <a:off x="566928" y="5687568"/>
-            <a:ext cx="11057839" cy="621792"/>
-          </a:xfrm>
-          <a:prstGeom prst="roundRect">
-            <a:avLst>
-              <a:gd name="adj" fmla="val 8824"/>
-            </a:avLst>
-          </a:prstGeom>
-          <a:solidFill>
-            <a:srgbClr val="1B5E20"/>
-          </a:solidFill>
-          <a:ln/>
-        </p:spPr>
-      </p:sp>
-      <p:sp>
-        <p:nvSpPr>
-          <p:cNvPr id="37" name="Text 29"/>
-          <p:cNvSpPr/>
-          <p:nvPr/>
-        </p:nvSpPr>
-        <p:spPr>
-          <a:xfrm>
-            <a:off x="841248" y="5687568"/>
-            <a:ext cx="10509199" cy="621792"/>
-          </a:xfrm>
-          <a:prstGeom prst="rect">
-            <a:avLst/>
-          </a:prstGeom>
-          <a:noFill/>
-          <a:ln/>
-        </p:spPr>
-        <p:txBody>
-          <a:bodyPr wrap="square" lIns="0" tIns="0" rIns="0" bIns="0" rtlCol="0" anchor="ctr"/>
-          <a:lstStyle/>
-          <a:p>
-            <a:pPr indent="0" marL="0">
-              <a:buNone/>
-            </a:pPr>
-            <a:r>
-              <a:rPr lang="en-US" sz="1350" b="1" dirty="0">
-                <a:solidFill>
-                  <a:srgbClr val="FFFFFF"/>
-                </a:solidFill>
-                <a:latin typeface="Calibri" pitchFamily="34" charset="0"/>
-                <a:ea typeface="Calibri" pitchFamily="34" charset="-122"/>
-                <a:cs typeface="Calibri" pitchFamily="34" charset="-120"/>
-              </a:rPr>
-              <a:t>We built the boring, unglamorous part first — real auth, real database, real legal research. That is the difference between a showcase and a system.</a:t>
-            </a:r>
-            <a:endParaRPr lang="en-US" sz="1350" dirty="0"/>
+              <a:t>The signup flow accepts title deeds, 99-year leases, offer letters, A1/A2 permits and communal land allocation letters — so communal farmers are not excluded by design.</a:t>
+            </a:r>
+            <a:endParaRPr lang="en-US" sz="1150" dirty="0"/>
           </a:p>
         </p:txBody>
       </p:sp>
@@ -4030,7 +3864,7 @@
                 <a:ea typeface="Arial" pitchFamily="34" charset="-122"/>
                 <a:cs typeface="Arial" pitchFamily="34" charset="-120"/>
               </a:rPr>
-              <a:t>QUESTIONS YOU'LL GET AT THE STAND</a:t>
+              <a:t>WHAT'S ACTUALLY BUILT</a:t>
             </a:r>
             <a:endParaRPr lang="en-US" sz="3400" dirty="0"/>
           </a:p>
@@ -4038,18 +3872,57 @@
       </p:sp>
       <p:sp>
         <p:nvSpPr>
-          <p:cNvPr id="5" name="Shape 3"/>
-          <p:cNvSpPr/>
-          <p:nvPr/>
-        </p:nvSpPr>
-        <p:spPr>
-          <a:xfrm>
-            <a:off x="566928" y="1517904"/>
-            <a:ext cx="5504688" cy="1865376"/>
+          <p:cNvPr id="5" name="Text 3"/>
+          <p:cNvSpPr/>
+          <p:nvPr/>
+        </p:nvSpPr>
+        <p:spPr>
+          <a:xfrm>
+            <a:off x="566928" y="1371600"/>
+            <a:ext cx="10607040" cy="347472"/>
+          </a:xfrm>
+          <a:prstGeom prst="rect">
+            <a:avLst/>
+          </a:prstGeom>
+          <a:noFill/>
+          <a:ln/>
+        </p:spPr>
+        <p:txBody>
+          <a:bodyPr wrap="square" lIns="0" tIns="0" rIns="0" bIns="0" rtlCol="0" anchor="ctr"/>
+          <a:lstStyle/>
+          <a:p>
+            <a:pPr indent="0" marL="0">
+              <a:buNone/>
+            </a:pPr>
+            <a:r>
+              <a:rPr lang="en-US" sz="1500" dirty="0">
+                <a:solidFill>
+                  <a:srgbClr val="3F5545"/>
+                </a:solidFill>
+                <a:latin typeface="Calibri" pitchFamily="34" charset="0"/>
+                <a:ea typeface="Calibri" pitchFamily="34" charset="-122"/>
+                <a:cs typeface="Calibri" pitchFamily="34" charset="-120"/>
+              </a:rPr>
+              <a:t>Most projects at this stage are a UI mockup. Here is what already runs.</a:t>
+            </a:r>
+            <a:endParaRPr lang="en-US" sz="1500" dirty="0"/>
+          </a:p>
+        </p:txBody>
+      </p:sp>
+      <p:sp>
+        <p:nvSpPr>
+          <p:cNvPr id="6" name="Shape 4"/>
+          <p:cNvSpPr/>
+          <p:nvPr/>
+        </p:nvSpPr>
+        <p:spPr>
+          <a:xfrm>
+            <a:off x="566928" y="1901952"/>
+            <a:ext cx="3602736" cy="1755648"/>
           </a:xfrm>
           <a:prstGeom prst="roundRect">
             <a:avLst>
-              <a:gd name="adj" fmla="val 2941"/>
+              <a:gd name="adj" fmla="val 3125"/>
             </a:avLst>
           </a:prstGeom>
           <a:solidFill>
@@ -4072,27 +3945,27 @@
       </p:sp>
       <p:sp>
         <p:nvSpPr>
-          <p:cNvPr id="6" name="Shape 4"/>
-          <p:cNvSpPr/>
-          <p:nvPr/>
-        </p:nvSpPr>
-        <p:spPr>
-          <a:xfrm>
-            <a:off x="841248" y="1792224"/>
-            <a:ext cx="475488" cy="475488"/>
+          <p:cNvPr id="7" name="Shape 5"/>
+          <p:cNvSpPr/>
+          <p:nvPr/>
+        </p:nvSpPr>
+        <p:spPr>
+          <a:xfrm>
+            <a:off x="841248" y="2176272"/>
+            <a:ext cx="548640" cy="548640"/>
           </a:xfrm>
           <a:prstGeom prst="ellipse">
             <a:avLst/>
           </a:prstGeom>
           <a:solidFill>
-            <a:srgbClr val="FBC02D"/>
+            <a:srgbClr val="E7F3EA"/>
           </a:solidFill>
           <a:ln/>
         </p:spPr>
       </p:sp>
       <p:pic>
         <p:nvPicPr>
-          <p:cNvPr id="7" name="Image 0" descr="preencoded.png">    </p:cNvPr>
+          <p:cNvPr id="8" name="Image 0" descr="preencoded.png">    </p:cNvPr>
           <p:cNvPicPr>
             <a:picLocks noChangeAspect="1"/>
           </p:cNvPicPr>
@@ -4106,8 +3979,8 @@
         </p:blipFill>
         <p:spPr>
           <a:xfrm>
-            <a:off x="964875" y="1915851"/>
-            <a:ext cx="228234" cy="228234"/>
+            <a:off x="983894" y="2318918"/>
+            <a:ext cx="263347" cy="263347"/>
           </a:xfrm>
           <a:prstGeom prst="rect">
             <a:avLst/>
@@ -4116,14 +3989,14 @@
       </p:pic>
       <p:sp>
         <p:nvSpPr>
-          <p:cNvPr id="8" name="Text 5"/>
-          <p:cNvSpPr/>
-          <p:nvPr/>
-        </p:nvSpPr>
-        <p:spPr>
-          <a:xfrm>
-            <a:off x="1444752" y="1755648"/>
-            <a:ext cx="4352544" cy="548640"/>
+          <p:cNvPr id="9" name="Text 6"/>
+          <p:cNvSpPr/>
+          <p:nvPr/>
+        </p:nvSpPr>
+        <p:spPr>
+          <a:xfrm>
+            <a:off x="1536192" y="2176272"/>
+            <a:ext cx="2359152" cy="548640"/>
           </a:xfrm>
           <a:prstGeom prst="rect">
             <a:avLst/>
@@ -4136,9 +4009,6 @@
           <a:lstStyle/>
           <a:p>
             <a:pPr indent="0" marL="0">
-              <a:lnSpc>
-                <a:spcPts val="1800"/>
-              </a:lnSpc>
               <a:buNone/>
             </a:pPr>
             <a:r>
@@ -4150,7 +4020,7 @@
                 <a:ea typeface="Arial" pitchFamily="34" charset="-122"/>
                 <a:cs typeface="Arial" pitchFamily="34" charset="-120"/>
               </a:rPr>
-              <a:t>What if a farmer doesn't have a smartphone?</a:t>
+              <a:t>Working backend</a:t>
             </a:r>
             <a:endParaRPr lang="en-US" sz="1400" dirty="0"/>
           </a:p>
@@ -4158,14 +4028,14 @@
       </p:sp>
       <p:sp>
         <p:nvSpPr>
-          <p:cNvPr id="9" name="Text 6"/>
-          <p:cNvSpPr/>
-          <p:nvPr/>
-        </p:nvSpPr>
-        <p:spPr>
-          <a:xfrm>
-            <a:off x="841248" y="2377440"/>
-            <a:ext cx="4956048" cy="914400"/>
+          <p:cNvPr id="10" name="Text 7"/>
+          <p:cNvSpPr/>
+          <p:nvPr/>
+        </p:nvSpPr>
+        <p:spPr>
+          <a:xfrm>
+            <a:off x="841248" y="2816352"/>
+            <a:ext cx="3054096" cy="676656"/>
           </a:xfrm>
           <a:prstGeom prst="rect">
             <a:avLst/>
@@ -4179,12 +4049,12 @@
           <a:p>
             <a:pPr indent="0" marL="0">
               <a:lnSpc>
-                <a:spcPts val="1600"/>
+                <a:spcPts val="1500"/>
               </a:lnSpc>
               <a:buNone/>
             </a:pPr>
             <a:r>
-              <a:rPr lang="en-US" sz="1250" dirty="0">
+              <a:rPr lang="en-US" sz="1200" dirty="0">
                 <a:solidFill>
                   <a:srgbClr val="3F5545"/>
                 </a:solidFill>
@@ -4192,26 +4062,26 @@
                 <a:ea typeface="Calibri" pitchFamily="34" charset="-122"/>
                 <a:cs typeface="Calibri" pitchFamily="34" charset="-120"/>
               </a:rPr>
-              <a:t>A real gap in version one — it needs a phone or the web app. Every digital agriculture tool has to solve it. It is on the roadmap, not something we pretend isn't a limitation.</a:t>
-            </a:r>
-            <a:endParaRPr lang="en-US" sz="1250" dirty="0"/>
-          </a:p>
-        </p:txBody>
-      </p:sp>
-      <p:sp>
-        <p:nvSpPr>
-          <p:cNvPr id="10" name="Shape 7"/>
-          <p:cNvSpPr/>
-          <p:nvPr/>
-        </p:nvSpPr>
-        <p:spPr>
-          <a:xfrm>
-            <a:off x="6300216" y="1517904"/>
-            <a:ext cx="5504688" cy="1865376"/>
+              <a:t>Flask + PyMySQL with 30+ endpoints — not a stubbed demo API.</a:t>
+            </a:r>
+            <a:endParaRPr lang="en-US" sz="1200" dirty="0"/>
+          </a:p>
+        </p:txBody>
+      </p:sp>
+      <p:sp>
+        <p:nvSpPr>
+          <p:cNvPr id="11" name="Shape 8"/>
+          <p:cNvSpPr/>
+          <p:nvPr/>
+        </p:nvSpPr>
+        <p:spPr>
+          <a:xfrm>
+            <a:off x="4370832" y="1901952"/>
+            <a:ext cx="3602736" cy="1755648"/>
           </a:xfrm>
           <a:prstGeom prst="roundRect">
             <a:avLst>
-              <a:gd name="adj" fmla="val 2941"/>
+              <a:gd name="adj" fmla="val 3125"/>
             </a:avLst>
           </a:prstGeom>
           <a:solidFill>
@@ -4234,27 +4104,27 @@
       </p:sp>
       <p:sp>
         <p:nvSpPr>
-          <p:cNvPr id="11" name="Shape 8"/>
-          <p:cNvSpPr/>
-          <p:nvPr/>
-        </p:nvSpPr>
-        <p:spPr>
-          <a:xfrm>
-            <a:off x="6574536" y="1792224"/>
-            <a:ext cx="475488" cy="475488"/>
+          <p:cNvPr id="12" name="Shape 9"/>
+          <p:cNvSpPr/>
+          <p:nvPr/>
+        </p:nvSpPr>
+        <p:spPr>
+          <a:xfrm>
+            <a:off x="4645152" y="2176272"/>
+            <a:ext cx="548640" cy="548640"/>
           </a:xfrm>
           <a:prstGeom prst="ellipse">
             <a:avLst/>
           </a:prstGeom>
           <a:solidFill>
-            <a:srgbClr val="FBC02D"/>
+            <a:srgbClr val="E7F3EA"/>
           </a:solidFill>
           <a:ln/>
         </p:spPr>
       </p:sp>
       <p:pic>
         <p:nvPicPr>
-          <p:cNvPr id="12" name="Image 1" descr="preencoded.png">    </p:cNvPr>
+          <p:cNvPr id="13" name="Image 1" descr="preencoded.png">    </p:cNvPr>
           <p:cNvPicPr>
             <a:picLocks noChangeAspect="1"/>
           </p:cNvPicPr>
@@ -4268,8 +4138,8 @@
         </p:blipFill>
         <p:spPr>
           <a:xfrm>
-            <a:off x="6698163" y="1915851"/>
-            <a:ext cx="228234" cy="228234"/>
+            <a:off x="4787798" y="2318918"/>
+            <a:ext cx="263347" cy="263347"/>
           </a:xfrm>
           <a:prstGeom prst="rect">
             <a:avLst/>
@@ -4278,14 +4148,14 @@
       </p:pic>
       <p:sp>
         <p:nvSpPr>
-          <p:cNvPr id="13" name="Text 9"/>
-          <p:cNvSpPr/>
-          <p:nvPr/>
-        </p:nvSpPr>
-        <p:spPr>
-          <a:xfrm>
-            <a:off x="7178040" y="1755648"/>
-            <a:ext cx="4352544" cy="548640"/>
+          <p:cNvPr id="14" name="Text 10"/>
+          <p:cNvSpPr/>
+          <p:nvPr/>
+        </p:nvSpPr>
+        <p:spPr>
+          <a:xfrm>
+            <a:off x="5340096" y="2176272"/>
+            <a:ext cx="2359152" cy="548640"/>
           </a:xfrm>
           <a:prstGeom prst="rect">
             <a:avLst/>
@@ -4298,9 +4168,6 @@
           <a:lstStyle/>
           <a:p>
             <a:pPr indent="0" marL="0">
-              <a:lnSpc>
-                <a:spcPts val="1800"/>
-              </a:lnSpc>
               <a:buNone/>
             </a:pPr>
             <a:r>
@@ -4312,7 +4179,7 @@
                 <a:ea typeface="Arial" pitchFamily="34" charset="-122"/>
                 <a:cs typeface="Arial" pitchFamily="34" charset="-120"/>
               </a:rPr>
-              <a:t>Isn't this just another app abandoned in a year?</a:t>
+              <a:t>Real database</a:t>
             </a:r>
             <a:endParaRPr lang="en-US" sz="1400" dirty="0"/>
           </a:p>
@@ -4320,14 +4187,14 @@
       </p:sp>
       <p:sp>
         <p:nvSpPr>
-          <p:cNvPr id="14" name="Text 10"/>
-          <p:cNvSpPr/>
-          <p:nvPr/>
-        </p:nvSpPr>
-        <p:spPr>
-          <a:xfrm>
-            <a:off x="6574536" y="2377440"/>
-            <a:ext cx="4956048" cy="914400"/>
+          <p:cNvPr id="15" name="Text 11"/>
+          <p:cNvSpPr/>
+          <p:nvPr/>
+        </p:nvSpPr>
+        <p:spPr>
+          <a:xfrm>
+            <a:off x="4645152" y="2816352"/>
+            <a:ext cx="3054096" cy="676656"/>
           </a:xfrm>
           <a:prstGeom prst="rect">
             <a:avLst/>
@@ -4341,12 +4208,12 @@
           <a:p>
             <a:pPr indent="0" marL="0">
               <a:lnSpc>
-                <a:spcPts val="1600"/>
+                <a:spcPts val="1500"/>
               </a:lnSpc>
               <a:buNone/>
             </a:pPr>
             <a:r>
-              <a:rPr lang="en-US" sz="1250" dirty="0">
+              <a:rPr lang="en-US" sz="1200" dirty="0">
                 <a:solidFill>
                   <a:srgbClr val="3F5545"/>
                 </a:solidFill>
@@ -4354,26 +4221,26 @@
                 <a:ea typeface="Calibri" pitchFamily="34" charset="-122"/>
                 <a:cs typeface="Calibri" pitchFamily="34" charset="-120"/>
               </a:rPr>
-              <a:t>We built the unglamorous part first: real authentication, a real database, real legal research. Most projects at this stage are a mockup — ours has a working backend and law you can check line by line.</a:t>
-            </a:r>
-            <a:endParaRPr lang="en-US" sz="1250" dirty="0"/>
-          </a:p>
-        </p:txBody>
-      </p:sp>
-      <p:sp>
-        <p:nvSpPr>
-          <p:cNvPr id="15" name="Shape 11"/>
-          <p:cNvSpPr/>
-          <p:nvPr/>
-        </p:nvSpPr>
-        <p:spPr>
-          <a:xfrm>
-            <a:off x="566928" y="3584448"/>
-            <a:ext cx="5504688" cy="1865376"/>
+              <a:t>A MySQL schema covering animals, health records, listings, clearances and users.</a:t>
+            </a:r>
+            <a:endParaRPr lang="en-US" sz="1200" dirty="0"/>
+          </a:p>
+        </p:txBody>
+      </p:sp>
+      <p:sp>
+        <p:nvSpPr>
+          <p:cNvPr id="16" name="Shape 12"/>
+          <p:cNvSpPr/>
+          <p:nvPr/>
+        </p:nvSpPr>
+        <p:spPr>
+          <a:xfrm>
+            <a:off x="8174736" y="1901952"/>
+            <a:ext cx="3602736" cy="1755648"/>
           </a:xfrm>
           <a:prstGeom prst="roundRect">
             <a:avLst>
-              <a:gd name="adj" fmla="val 2941"/>
+              <a:gd name="adj" fmla="val 3125"/>
             </a:avLst>
           </a:prstGeom>
           <a:solidFill>
@@ -4396,27 +4263,27 @@
       </p:sp>
       <p:sp>
         <p:nvSpPr>
-          <p:cNvPr id="16" name="Shape 12"/>
-          <p:cNvSpPr/>
-          <p:nvPr/>
-        </p:nvSpPr>
-        <p:spPr>
-          <a:xfrm>
-            <a:off x="841248" y="3858768"/>
-            <a:ext cx="475488" cy="475488"/>
+          <p:cNvPr id="17" name="Shape 13"/>
+          <p:cNvSpPr/>
+          <p:nvPr/>
+        </p:nvSpPr>
+        <p:spPr>
+          <a:xfrm>
+            <a:off x="8449056" y="2176272"/>
+            <a:ext cx="548640" cy="548640"/>
           </a:xfrm>
           <a:prstGeom prst="ellipse">
             <a:avLst/>
           </a:prstGeom>
           <a:solidFill>
-            <a:srgbClr val="FBC02D"/>
+            <a:srgbClr val="E7F3EA"/>
           </a:solidFill>
           <a:ln/>
         </p:spPr>
       </p:sp>
       <p:pic>
         <p:nvPicPr>
-          <p:cNvPr id="17" name="Image 2" descr="preencoded.png">    </p:cNvPr>
+          <p:cNvPr id="18" name="Image 2" descr="preencoded.png">    </p:cNvPr>
           <p:cNvPicPr>
             <a:picLocks noChangeAspect="1"/>
           </p:cNvPicPr>
@@ -4430,8 +4297,8 @@
         </p:blipFill>
         <p:spPr>
           <a:xfrm>
-            <a:off x="964875" y="3982395"/>
-            <a:ext cx="228234" cy="228234"/>
+            <a:off x="8591702" y="2318918"/>
+            <a:ext cx="263347" cy="263347"/>
           </a:xfrm>
           <a:prstGeom prst="rect">
             <a:avLst/>
@@ -4440,14 +4307,14 @@
       </p:pic>
       <p:sp>
         <p:nvSpPr>
-          <p:cNvPr id="18" name="Text 13"/>
-          <p:cNvSpPr/>
-          <p:nvPr/>
-        </p:nvSpPr>
-        <p:spPr>
-          <a:xfrm>
-            <a:off x="1444752" y="3822192"/>
-            <a:ext cx="4352544" cy="548640"/>
+          <p:cNvPr id="19" name="Text 14"/>
+          <p:cNvSpPr/>
+          <p:nvPr/>
+        </p:nvSpPr>
+        <p:spPr>
+          <a:xfrm>
+            <a:off x="9144000" y="2176272"/>
+            <a:ext cx="2359152" cy="548640"/>
           </a:xfrm>
           <a:prstGeom prst="rect">
             <a:avLst/>
@@ -4460,9 +4327,6 @@
           <a:lstStyle/>
           <a:p>
             <a:pPr indent="0" marL="0">
-              <a:lnSpc>
-                <a:spcPts val="1800"/>
-              </a:lnSpc>
               <a:buNone/>
             </a:pPr>
             <a:r>
@@ -4474,7 +4338,7 @@
                 <a:ea typeface="Arial" pitchFamily="34" charset="-122"/>
                 <a:cs typeface="Arial" pitchFamily="34" charset="-120"/>
               </a:rPr>
-              <a:t>How is this different from calling the vet or the police?</a:t>
+              <a:t>Real security</a:t>
             </a:r>
             <a:endParaRPr lang="en-US" sz="1400" dirty="0"/>
           </a:p>
@@ -4482,14 +4346,14 @@
       </p:sp>
       <p:sp>
         <p:nvSpPr>
-          <p:cNvPr id="19" name="Text 14"/>
-          <p:cNvSpPr/>
-          <p:nvPr/>
-        </p:nvSpPr>
-        <p:spPr>
-          <a:xfrm>
-            <a:off x="841248" y="4443984"/>
-            <a:ext cx="4956048" cy="914400"/>
+          <p:cNvPr id="20" name="Text 15"/>
+          <p:cNvSpPr/>
+          <p:nvPr/>
+        </p:nvSpPr>
+        <p:spPr>
+          <a:xfrm>
+            <a:off x="8449056" y="2816352"/>
+            <a:ext cx="3054096" cy="676656"/>
           </a:xfrm>
           <a:prstGeom prst="rect">
             <a:avLst/>
@@ -4503,12 +4367,12 @@
           <a:p>
             <a:pPr indent="0" marL="0">
               <a:lnSpc>
-                <a:spcPts val="1600"/>
+                <a:spcPts val="1500"/>
               </a:lnSpc>
               <a:buNone/>
             </a:pPr>
             <a:r>
-              <a:rPr lang="en-US" sz="1250" dirty="0">
+              <a:rPr lang="en-US" sz="1200" dirty="0">
                 <a:solidFill>
                   <a:srgbClr val="3F5545"/>
                 </a:solidFill>
@@ -4516,26 +4380,26 @@
                 <a:ea typeface="Calibri" pitchFamily="34" charset="-122"/>
                 <a:cs typeface="Calibri" pitchFamily="34" charset="-120"/>
               </a:rPr>
-              <a:t>You still call them. PFUMA doesn't replace the relationship, it gives it a paper trail. A phone call disappears. A record in PFUMA doesn't.</a:t>
-            </a:r>
-            <a:endParaRPr lang="en-US" sz="1250" dirty="0"/>
-          </a:p>
-        </p:txBody>
-      </p:sp>
-      <p:sp>
-        <p:nvSpPr>
-          <p:cNvPr id="20" name="Shape 15"/>
-          <p:cNvSpPr/>
-          <p:nvPr/>
-        </p:nvSpPr>
-        <p:spPr>
-          <a:xfrm>
-            <a:off x="6300216" y="3584448"/>
-            <a:ext cx="5504688" cy="1865376"/>
+              <a:t>bcrypt hashing, JWT sessions, per-owner scoping, uploads served outside the web root.</a:t>
+            </a:r>
+            <a:endParaRPr lang="en-US" sz="1200" dirty="0"/>
+          </a:p>
+        </p:txBody>
+      </p:sp>
+      <p:sp>
+        <p:nvSpPr>
+          <p:cNvPr id="21" name="Shape 16"/>
+          <p:cNvSpPr/>
+          <p:nvPr/>
+        </p:nvSpPr>
+        <p:spPr>
+          <a:xfrm>
+            <a:off x="566928" y="3858768"/>
+            <a:ext cx="3602736" cy="1755648"/>
           </a:xfrm>
           <a:prstGeom prst="roundRect">
             <a:avLst>
-              <a:gd name="adj" fmla="val 2941"/>
+              <a:gd name="adj" fmla="val 3125"/>
             </a:avLst>
           </a:prstGeom>
           <a:solidFill>
@@ -4558,27 +4422,27 @@
       </p:sp>
       <p:sp>
         <p:nvSpPr>
-          <p:cNvPr id="21" name="Shape 16"/>
-          <p:cNvSpPr/>
-          <p:nvPr/>
-        </p:nvSpPr>
-        <p:spPr>
-          <a:xfrm>
-            <a:off x="6574536" y="3858768"/>
-            <a:ext cx="475488" cy="475488"/>
+          <p:cNvPr id="22" name="Shape 17"/>
+          <p:cNvSpPr/>
+          <p:nvPr/>
+        </p:nvSpPr>
+        <p:spPr>
+          <a:xfrm>
+            <a:off x="841248" y="4133088"/>
+            <a:ext cx="548640" cy="548640"/>
           </a:xfrm>
           <a:prstGeom prst="ellipse">
             <a:avLst/>
           </a:prstGeom>
           <a:solidFill>
-            <a:srgbClr val="FBC02D"/>
+            <a:srgbClr val="E7F3EA"/>
           </a:solidFill>
           <a:ln/>
         </p:spPr>
       </p:sp>
       <p:pic>
         <p:nvPicPr>
-          <p:cNvPr id="22" name="Image 3" descr="preencoded.png">    </p:cNvPr>
+          <p:cNvPr id="23" name="Image 3" descr="preencoded.png">    </p:cNvPr>
           <p:cNvPicPr>
             <a:picLocks noChangeAspect="1"/>
           </p:cNvPicPr>
@@ -4592,8 +4456,8 @@
         </p:blipFill>
         <p:spPr>
           <a:xfrm>
-            <a:off x="6698163" y="3982395"/>
-            <a:ext cx="228234" cy="228234"/>
+            <a:off x="983894" y="4275734"/>
+            <a:ext cx="263347" cy="263347"/>
           </a:xfrm>
           <a:prstGeom prst="rect">
             <a:avLst/>
@@ -4602,14 +4466,14 @@
       </p:pic>
       <p:sp>
         <p:nvSpPr>
-          <p:cNvPr id="23" name="Text 17"/>
-          <p:cNvSpPr/>
-          <p:nvPr/>
-        </p:nvSpPr>
-        <p:spPr>
-          <a:xfrm>
-            <a:off x="7178040" y="3822192"/>
-            <a:ext cx="4352544" cy="548640"/>
+          <p:cNvPr id="24" name="Text 18"/>
+          <p:cNvSpPr/>
+          <p:nvPr/>
+        </p:nvSpPr>
+        <p:spPr>
+          <a:xfrm>
+            <a:off x="1536192" y="4133088"/>
+            <a:ext cx="2359152" cy="548640"/>
           </a:xfrm>
           <a:prstGeom prst="rect">
             <a:avLst/>
@@ -4622,9 +4486,6 @@
           <a:lstStyle/>
           <a:p>
             <a:pPr indent="0" marL="0">
-              <a:lnSpc>
-                <a:spcPts val="1800"/>
-              </a:lnSpc>
               <a:buNone/>
             </a:pPr>
             <a:r>
@@ -4636,7 +4497,7 @@
                 <a:ea typeface="Arial" pitchFamily="34" charset="-122"/>
                 <a:cs typeface="Arial" pitchFamily="34" charset="-120"/>
               </a:rPr>
-              <a:t>Who stops a fake officer approving fake sales?</a:t>
+              <a:t>Web + mobile</a:t>
             </a:r>
             <a:endParaRPr lang="en-US" sz="1400" dirty="0"/>
           </a:p>
@@ -4644,14 +4505,14 @@
       </p:sp>
       <p:sp>
         <p:nvSpPr>
-          <p:cNvPr id="24" name="Text 18"/>
-          <p:cNvSpPr/>
-          <p:nvPr/>
-        </p:nvSpPr>
-        <p:spPr>
-          <a:xfrm>
-            <a:off x="6574536" y="4443984"/>
-            <a:ext cx="4956048" cy="914400"/>
+          <p:cNvPr id="25" name="Text 19"/>
+          <p:cNvSpPr/>
+          <p:nvPr/>
+        </p:nvSpPr>
+        <p:spPr>
+          <a:xfrm>
+            <a:off x="841248" y="4773168"/>
+            <a:ext cx="3054096" cy="676656"/>
           </a:xfrm>
           <a:prstGeom prst="rect">
             <a:avLst/>
@@ -4665,12 +4526,12 @@
           <a:p>
             <a:pPr indent="0" marL="0">
               <a:lnSpc>
-                <a:spcPts val="1600"/>
+                <a:spcPts val="1500"/>
               </a:lnSpc>
               <a:buNone/>
             </a:pPr>
             <a:r>
-              <a:rPr lang="en-US" sz="1250" dirty="0">
+              <a:rPr lang="en-US" sz="1200" dirty="0">
                 <a:solidFill>
                   <a:srgbClr val="3F5545"/>
                 </a:solidFill>
@@ -4678,49 +4539,100 @@
                 <a:ea typeface="Calibri" pitchFamily="34" charset="-122"/>
                 <a:cs typeface="Calibri" pitchFamily="34" charset="-120"/>
               </a:rPr>
-              <a:t>Police accounts aren't self-signup. An existing verified officer creates and vouches for the next one — the same way real ZRP units onboard members. You cannot register as police off the street.</a:t>
-            </a:r>
-            <a:endParaRPr lang="en-US" sz="1250" dirty="0"/>
-          </a:p>
-        </p:txBody>
-      </p:sp>
-      <p:sp>
-        <p:nvSpPr>
-          <p:cNvPr id="25" name="Shape 19"/>
-          <p:cNvSpPr/>
-          <p:nvPr/>
-        </p:nvSpPr>
-        <p:spPr>
-          <a:xfrm>
-            <a:off x="566928" y="5577840"/>
-            <a:ext cx="11057839" cy="658368"/>
+              <a:t>React (Vite) + Tailwind on the desktop, an Expo app on the phone, one API behind both.</a:t>
+            </a:r>
+            <a:endParaRPr lang="en-US" sz="1200" dirty="0"/>
+          </a:p>
+        </p:txBody>
+      </p:sp>
+      <p:sp>
+        <p:nvSpPr>
+          <p:cNvPr id="26" name="Shape 20"/>
+          <p:cNvSpPr/>
+          <p:nvPr/>
+        </p:nvSpPr>
+        <p:spPr>
+          <a:xfrm>
+            <a:off x="4370832" y="3858768"/>
+            <a:ext cx="3602736" cy="1755648"/>
           </a:xfrm>
           <a:prstGeom prst="roundRect">
             <a:avLst>
-              <a:gd name="adj" fmla="val 8333"/>
+              <a:gd name="adj" fmla="val 3125"/>
             </a:avLst>
           </a:prstGeom>
           <a:solidFill>
-            <a:srgbClr val="EAF4EC"/>
+            <a:srgbClr val="FFFFFF"/>
           </a:solidFill>
           <a:ln w="12700">
             <a:solidFill>
-              <a:srgbClr val="CFE3D4"/>
+              <a:srgbClr val="D8E6DB"/>
             </a:solidFill>
             <a:prstDash val="solid"/>
           </a:ln>
-        </p:spPr>
-      </p:sp>
-      <p:sp>
-        <p:nvSpPr>
-          <p:cNvPr id="26" name="Text 20"/>
-          <p:cNvSpPr/>
-          <p:nvPr/>
-        </p:nvSpPr>
-        <p:spPr>
-          <a:xfrm>
-            <a:off x="841248" y="5577840"/>
-            <a:ext cx="10509199" cy="658368"/>
+          <a:effectLst>
+            <a:outerShdw sx="100000" sy="100000" kx="0" ky="0" algn="bl" rotWithShape="0" blurRad="127000" dist="25400" dir="5400000">
+              <a:srgbClr val="1B5E20">
+                <a:alpha val="10000"/>
+              </a:srgbClr>
+            </a:outerShdw>
+          </a:effectLst>
+        </p:spPr>
+      </p:sp>
+      <p:sp>
+        <p:nvSpPr>
+          <p:cNvPr id="27" name="Shape 21"/>
+          <p:cNvSpPr/>
+          <p:nvPr/>
+        </p:nvSpPr>
+        <p:spPr>
+          <a:xfrm>
+            <a:off x="4645152" y="4133088"/>
+            <a:ext cx="548640" cy="548640"/>
+          </a:xfrm>
+          <a:prstGeom prst="ellipse">
+            <a:avLst/>
+          </a:prstGeom>
+          <a:solidFill>
+            <a:srgbClr val="E7F3EA"/>
+          </a:solidFill>
+          <a:ln/>
+        </p:spPr>
+      </p:sp>
+      <p:pic>
+        <p:nvPicPr>
+          <p:cNvPr id="28" name="Image 4" descr="preencoded.png">    </p:cNvPr>
+          <p:cNvPicPr>
+            <a:picLocks noChangeAspect="1"/>
+          </p:cNvPicPr>
+          <p:nvPr/>
+        </p:nvPicPr>
+        <p:blipFill>
+          <a:blip r:embed="rId6"/>
+          <a:stretch>
+            <a:fillRect/>
+          </a:stretch>
+        </p:blipFill>
+        <p:spPr>
+          <a:xfrm>
+            <a:off x="4787798" y="4275734"/>
+            <a:ext cx="263347" cy="263347"/>
+          </a:xfrm>
+          <a:prstGeom prst="rect">
+            <a:avLst/>
+          </a:prstGeom>
+        </p:spPr>
+      </p:pic>
+      <p:sp>
+        <p:nvSpPr>
+          <p:cNvPr id="29" name="Text 22"/>
+          <p:cNvSpPr/>
+          <p:nvPr/>
+        </p:nvSpPr>
+        <p:spPr>
+          <a:xfrm>
+            <a:off x="5340096" y="4133088"/>
+            <a:ext cx="2359152" cy="548640"/>
           </a:xfrm>
           <a:prstGeom prst="rect">
             <a:avLst/>
@@ -4736,21 +4648,208 @@
               <a:buNone/>
             </a:pPr>
             <a:r>
-              <a:rPr lang="en-US" sz="1300" b="1" dirty="0">
-                <a:solidFill>
-                  <a:srgbClr val="1B5E20"/>
+              <a:rPr lang="en-US" sz="1400" b="1" dirty="0">
+                <a:solidFill>
+                  <a:srgbClr val="0A2410"/>
+                </a:solidFill>
+                <a:latin typeface="Arial" pitchFamily="34" charset="0"/>
+                <a:ea typeface="Arial" pitchFamily="34" charset="-122"/>
+                <a:cs typeface="Arial" pitchFamily="34" charset="-120"/>
+              </a:rPr>
+              <a:t>Hardware design</a:t>
+            </a:r>
+            <a:endParaRPr lang="en-US" sz="1400" dirty="0"/>
+          </a:p>
+        </p:txBody>
+      </p:sp>
+      <p:sp>
+        <p:nvSpPr>
+          <p:cNvPr id="30" name="Text 23"/>
+          <p:cNvSpPr/>
+          <p:nvPr/>
+        </p:nvSpPr>
+        <p:spPr>
+          <a:xfrm>
+            <a:off x="4645152" y="4773168"/>
+            <a:ext cx="3054096" cy="676656"/>
+          </a:xfrm>
+          <a:prstGeom prst="rect">
+            <a:avLst/>
+          </a:prstGeom>
+          <a:noFill/>
+          <a:ln/>
+        </p:spPr>
+        <p:txBody>
+          <a:bodyPr wrap="square" lIns="0" tIns="0" rIns="0" bIns="0" rtlCol="0" anchor="t"/>
+          <a:lstStyle/>
+          <a:p>
+            <a:pPr indent="0" marL="0">
+              <a:lnSpc>
+                <a:spcPts val="1500"/>
+              </a:lnSpc>
+              <a:buNone/>
+            </a:pPr>
+            <a:r>
+              <a:rPr lang="en-US" sz="1200" dirty="0">
+                <a:solidFill>
+                  <a:srgbClr val="3F5545"/>
                 </a:solidFill>
                 <a:latin typeface="Calibri" pitchFamily="34" charset="0"/>
                 <a:ea typeface="Calibri" pitchFamily="34" charset="-122"/>
                 <a:cs typeface="Calibri" pitchFamily="34" charset="-120"/>
               </a:rPr>
-              <a:t>Don't dodge these — they are good questions,  </a:t>
-            </a:r>
+              <a:t>Two boards, full pin-level wiring, BOM with supplier links, firmware for both.</a:t>
+            </a:r>
+            <a:endParaRPr lang="en-US" sz="1200" dirty="0"/>
+          </a:p>
+        </p:txBody>
+      </p:sp>
+      <p:sp>
+        <p:nvSpPr>
+          <p:cNvPr id="31" name="Shape 24"/>
+          <p:cNvSpPr/>
+          <p:nvPr/>
+        </p:nvSpPr>
+        <p:spPr>
+          <a:xfrm>
+            <a:off x="8174736" y="3858768"/>
+            <a:ext cx="3602736" cy="1755648"/>
+          </a:xfrm>
+          <a:prstGeom prst="roundRect">
+            <a:avLst>
+              <a:gd name="adj" fmla="val 3125"/>
+            </a:avLst>
+          </a:prstGeom>
+          <a:solidFill>
+            <a:srgbClr val="FFFFFF"/>
+          </a:solidFill>
+          <a:ln w="12700">
+            <a:solidFill>
+              <a:srgbClr val="D8E6DB"/>
+            </a:solidFill>
+            <a:prstDash val="solid"/>
+          </a:ln>
+          <a:effectLst>
+            <a:outerShdw sx="100000" sy="100000" kx="0" ky="0" algn="bl" rotWithShape="0" blurRad="127000" dist="25400" dir="5400000">
+              <a:srgbClr val="1B5E20">
+                <a:alpha val="10000"/>
+              </a:srgbClr>
+            </a:outerShdw>
+          </a:effectLst>
+        </p:spPr>
+      </p:sp>
+      <p:sp>
+        <p:nvSpPr>
+          <p:cNvPr id="32" name="Shape 25"/>
+          <p:cNvSpPr/>
+          <p:nvPr/>
+        </p:nvSpPr>
+        <p:spPr>
+          <a:xfrm>
+            <a:off x="8449056" y="4133088"/>
+            <a:ext cx="548640" cy="548640"/>
+          </a:xfrm>
+          <a:prstGeom prst="ellipse">
+            <a:avLst/>
+          </a:prstGeom>
+          <a:solidFill>
+            <a:srgbClr val="E7F3EA"/>
+          </a:solidFill>
+          <a:ln/>
+        </p:spPr>
+      </p:sp>
+      <p:pic>
+        <p:nvPicPr>
+          <p:cNvPr id="33" name="Image 5" descr="preencoded.png">    </p:cNvPr>
+          <p:cNvPicPr>
+            <a:picLocks noChangeAspect="1"/>
+          </p:cNvPicPr>
+          <p:nvPr/>
+        </p:nvPicPr>
+        <p:blipFill>
+          <a:blip r:embed="rId7"/>
+          <a:stretch>
+            <a:fillRect/>
+          </a:stretch>
+        </p:blipFill>
+        <p:spPr>
+          <a:xfrm>
+            <a:off x="8591702" y="4275734"/>
+            <a:ext cx="263347" cy="263347"/>
+          </a:xfrm>
+          <a:prstGeom prst="rect">
+            <a:avLst/>
+          </a:prstGeom>
+        </p:spPr>
+      </p:pic>
+      <p:sp>
+        <p:nvSpPr>
+          <p:cNvPr id="34" name="Text 26"/>
+          <p:cNvSpPr/>
+          <p:nvPr/>
+        </p:nvSpPr>
+        <p:spPr>
+          <a:xfrm>
+            <a:off x="9144000" y="4133088"/>
+            <a:ext cx="2359152" cy="548640"/>
+          </a:xfrm>
+          <a:prstGeom prst="rect">
+            <a:avLst/>
+          </a:prstGeom>
+          <a:noFill/>
+          <a:ln/>
+        </p:spPr>
+        <p:txBody>
+          <a:bodyPr wrap="square" lIns="0" tIns="0" rIns="0" bIns="0" rtlCol="0" anchor="ctr"/>
+          <a:lstStyle/>
+          <a:p>
             <a:pPr indent="0" marL="0">
               <a:buNone/>
             </a:pPr>
             <a:r>
-              <a:rPr lang="en-US" sz="1300" dirty="0">
+              <a:rPr lang="en-US" sz="1400" b="1" dirty="0">
+                <a:solidFill>
+                  <a:srgbClr val="0A2410"/>
+                </a:solidFill>
+                <a:latin typeface="Arial" pitchFamily="34" charset="0"/>
+                <a:ea typeface="Arial" pitchFamily="34" charset="-122"/>
+                <a:cs typeface="Arial" pitchFamily="34" charset="-120"/>
+              </a:rPr>
+              <a:t>Cited legal research</a:t>
+            </a:r>
+            <a:endParaRPr lang="en-US" sz="1400" dirty="0"/>
+          </a:p>
+        </p:txBody>
+      </p:sp>
+      <p:sp>
+        <p:nvSpPr>
+          <p:cNvPr id="35" name="Text 27"/>
+          <p:cNvSpPr/>
+          <p:nvPr/>
+        </p:nvSpPr>
+        <p:spPr>
+          <a:xfrm>
+            <a:off x="8449056" y="4773168"/>
+            <a:ext cx="3054096" cy="676656"/>
+          </a:xfrm>
+          <a:prstGeom prst="rect">
+            <a:avLst/>
+          </a:prstGeom>
+          <a:noFill/>
+          <a:ln/>
+        </p:spPr>
+        <p:txBody>
+          <a:bodyPr wrap="square" lIns="0" tIns="0" rIns="0" bIns="0" rtlCol="0" anchor="t"/>
+          <a:lstStyle/>
+          <a:p>
+            <a:pPr indent="0" marL="0">
+              <a:lnSpc>
+                <a:spcPts val="1500"/>
+              </a:lnSpc>
+              <a:buNone/>
+            </a:pPr>
+            <a:r>
+              <a:rPr lang="en-US" sz="1200" dirty="0">
                 <a:solidFill>
                   <a:srgbClr val="3F5545"/>
                 </a:solidFill>
@@ -4758,9 +4857,70 @@
                 <a:ea typeface="Calibri" pitchFamily="34" charset="-122"/>
                 <a:cs typeface="Calibri" pitchFamily="34" charset="-120"/>
               </a:rPr>
-              <a:t>and answering them straight is what makes the rest of the pitch believable.</a:t>
-            </a:r>
-            <a:endParaRPr lang="en-US" sz="1300" dirty="0"/>
+              <a:t>Six Acts mapped to features, with sources — and the gaps named rather than hidden.</a:t>
+            </a:r>
+            <a:endParaRPr lang="en-US" sz="1200" dirty="0"/>
+          </a:p>
+        </p:txBody>
+      </p:sp>
+      <p:sp>
+        <p:nvSpPr>
+          <p:cNvPr id="36" name="Shape 28"/>
+          <p:cNvSpPr/>
+          <p:nvPr/>
+        </p:nvSpPr>
+        <p:spPr>
+          <a:xfrm>
+            <a:off x="566928" y="5687568"/>
+            <a:ext cx="11057839" cy="621792"/>
+          </a:xfrm>
+          <a:prstGeom prst="roundRect">
+            <a:avLst>
+              <a:gd name="adj" fmla="val 8824"/>
+            </a:avLst>
+          </a:prstGeom>
+          <a:solidFill>
+            <a:srgbClr val="1B5E20"/>
+          </a:solidFill>
+          <a:ln/>
+        </p:spPr>
+      </p:sp>
+      <p:sp>
+        <p:nvSpPr>
+          <p:cNvPr id="37" name="Text 29"/>
+          <p:cNvSpPr/>
+          <p:nvPr/>
+        </p:nvSpPr>
+        <p:spPr>
+          <a:xfrm>
+            <a:off x="841248" y="5687568"/>
+            <a:ext cx="10509199" cy="621792"/>
+          </a:xfrm>
+          <a:prstGeom prst="rect">
+            <a:avLst/>
+          </a:prstGeom>
+          <a:noFill/>
+          <a:ln/>
+        </p:spPr>
+        <p:txBody>
+          <a:bodyPr wrap="square" lIns="0" tIns="0" rIns="0" bIns="0" rtlCol="0" anchor="ctr"/>
+          <a:lstStyle/>
+          <a:p>
+            <a:pPr indent="0" marL="0">
+              <a:buNone/>
+            </a:pPr>
+            <a:r>
+              <a:rPr lang="en-US" sz="1350" b="1" dirty="0">
+                <a:solidFill>
+                  <a:srgbClr val="FFFFFF"/>
+                </a:solidFill>
+                <a:latin typeface="Calibri" pitchFamily="34" charset="0"/>
+                <a:ea typeface="Calibri" pitchFamily="34" charset="-122"/>
+                <a:cs typeface="Calibri" pitchFamily="34" charset="-120"/>
+              </a:rPr>
+              <a:t>We built the boring, unglamorous part first — real auth, real database, real legal research. That is the difference between a showcase and a system.</a:t>
+            </a:r>
+            <a:endParaRPr lang="en-US" sz="1350" dirty="0"/>
           </a:p>
         </p:txBody>
       </p:sp>
@@ -4891,6 +5051,873 @@
             <a:r>
               <a:rPr lang="en-US" sz="3400" b="1" spc="-40" kern="0" dirty="0">
                 <a:solidFill>
+                  <a:srgbClr val="0A2410"/>
+                </a:solidFill>
+                <a:latin typeface="Arial" pitchFamily="34" charset="0"/>
+                <a:ea typeface="Arial" pitchFamily="34" charset="-122"/>
+                <a:cs typeface="Arial" pitchFamily="34" charset="-120"/>
+              </a:rPr>
+              <a:t>QUESTIONS YOU'LL GET AT THE STAND</a:t>
+            </a:r>
+            <a:endParaRPr lang="en-US" sz="3400" dirty="0"/>
+          </a:p>
+        </p:txBody>
+      </p:sp>
+      <p:sp>
+        <p:nvSpPr>
+          <p:cNvPr id="5" name="Shape 3"/>
+          <p:cNvSpPr/>
+          <p:nvPr/>
+        </p:nvSpPr>
+        <p:spPr>
+          <a:xfrm>
+            <a:off x="566928" y="1517904"/>
+            <a:ext cx="5504688" cy="1865376"/>
+          </a:xfrm>
+          <a:prstGeom prst="roundRect">
+            <a:avLst>
+              <a:gd name="adj" fmla="val 2941"/>
+            </a:avLst>
+          </a:prstGeom>
+          <a:solidFill>
+            <a:srgbClr val="FFFFFF"/>
+          </a:solidFill>
+          <a:ln w="12700">
+            <a:solidFill>
+              <a:srgbClr val="D8E6DB"/>
+            </a:solidFill>
+            <a:prstDash val="solid"/>
+          </a:ln>
+          <a:effectLst>
+            <a:outerShdw sx="100000" sy="100000" kx="0" ky="0" algn="bl" rotWithShape="0" blurRad="127000" dist="25400" dir="5400000">
+              <a:srgbClr val="1B5E20">
+                <a:alpha val="10000"/>
+              </a:srgbClr>
+            </a:outerShdw>
+          </a:effectLst>
+        </p:spPr>
+      </p:sp>
+      <p:sp>
+        <p:nvSpPr>
+          <p:cNvPr id="6" name="Shape 4"/>
+          <p:cNvSpPr/>
+          <p:nvPr/>
+        </p:nvSpPr>
+        <p:spPr>
+          <a:xfrm>
+            <a:off x="841248" y="1792224"/>
+            <a:ext cx="475488" cy="475488"/>
+          </a:xfrm>
+          <a:prstGeom prst="ellipse">
+            <a:avLst/>
+          </a:prstGeom>
+          <a:solidFill>
+            <a:srgbClr val="FBC02D"/>
+          </a:solidFill>
+          <a:ln/>
+        </p:spPr>
+      </p:sp>
+      <p:pic>
+        <p:nvPicPr>
+          <p:cNvPr id="7" name="Image 0" descr="preencoded.png">    </p:cNvPr>
+          <p:cNvPicPr>
+            <a:picLocks noChangeAspect="1"/>
+          </p:cNvPicPr>
+          <p:nvPr/>
+        </p:nvPicPr>
+        <p:blipFill>
+          <a:blip r:embed="rId2"/>
+          <a:stretch>
+            <a:fillRect/>
+          </a:stretch>
+        </p:blipFill>
+        <p:spPr>
+          <a:xfrm>
+            <a:off x="964875" y="1915851"/>
+            <a:ext cx="228234" cy="228234"/>
+          </a:xfrm>
+          <a:prstGeom prst="rect">
+            <a:avLst/>
+          </a:prstGeom>
+        </p:spPr>
+      </p:pic>
+      <p:sp>
+        <p:nvSpPr>
+          <p:cNvPr id="8" name="Text 5"/>
+          <p:cNvSpPr/>
+          <p:nvPr/>
+        </p:nvSpPr>
+        <p:spPr>
+          <a:xfrm>
+            <a:off x="1444752" y="1755648"/>
+            <a:ext cx="4352544" cy="548640"/>
+          </a:xfrm>
+          <a:prstGeom prst="rect">
+            <a:avLst/>
+          </a:prstGeom>
+          <a:noFill/>
+          <a:ln/>
+        </p:spPr>
+        <p:txBody>
+          <a:bodyPr wrap="square" lIns="0" tIns="0" rIns="0" bIns="0" rtlCol="0" anchor="ctr"/>
+          <a:lstStyle/>
+          <a:p>
+            <a:pPr indent="0" marL="0">
+              <a:lnSpc>
+                <a:spcPts val="1800"/>
+              </a:lnSpc>
+              <a:buNone/>
+            </a:pPr>
+            <a:r>
+              <a:rPr lang="en-US" sz="1400" b="1" dirty="0">
+                <a:solidFill>
+                  <a:srgbClr val="0A2410"/>
+                </a:solidFill>
+                <a:latin typeface="Arial" pitchFamily="34" charset="0"/>
+                <a:ea typeface="Arial" pitchFamily="34" charset="-122"/>
+                <a:cs typeface="Arial" pitchFamily="34" charset="-120"/>
+              </a:rPr>
+              <a:t>What if a farmer doesn't have a smartphone?</a:t>
+            </a:r>
+            <a:endParaRPr lang="en-US" sz="1400" dirty="0"/>
+          </a:p>
+        </p:txBody>
+      </p:sp>
+      <p:sp>
+        <p:nvSpPr>
+          <p:cNvPr id="9" name="Text 6"/>
+          <p:cNvSpPr/>
+          <p:nvPr/>
+        </p:nvSpPr>
+        <p:spPr>
+          <a:xfrm>
+            <a:off x="841248" y="2377440"/>
+            <a:ext cx="4956048" cy="914400"/>
+          </a:xfrm>
+          <a:prstGeom prst="rect">
+            <a:avLst/>
+          </a:prstGeom>
+          <a:noFill/>
+          <a:ln/>
+        </p:spPr>
+        <p:txBody>
+          <a:bodyPr wrap="square" lIns="0" tIns="0" rIns="0" bIns="0" rtlCol="0" anchor="t"/>
+          <a:lstStyle/>
+          <a:p>
+            <a:pPr indent="0" marL="0">
+              <a:lnSpc>
+                <a:spcPts val="1600"/>
+              </a:lnSpc>
+              <a:buNone/>
+            </a:pPr>
+            <a:r>
+              <a:rPr lang="en-US" sz="1250" dirty="0">
+                <a:solidFill>
+                  <a:srgbClr val="3F5545"/>
+                </a:solidFill>
+                <a:latin typeface="Calibri" pitchFamily="34" charset="0"/>
+                <a:ea typeface="Calibri" pitchFamily="34" charset="-122"/>
+                <a:cs typeface="Calibri" pitchFamily="34" charset="-120"/>
+              </a:rPr>
+              <a:t>A real gap in version one — it needs a phone or the web app. Every digital agriculture tool has to solve it. It is on the roadmap, not something we pretend isn't a limitation.</a:t>
+            </a:r>
+            <a:endParaRPr lang="en-US" sz="1250" dirty="0"/>
+          </a:p>
+        </p:txBody>
+      </p:sp>
+      <p:sp>
+        <p:nvSpPr>
+          <p:cNvPr id="10" name="Shape 7"/>
+          <p:cNvSpPr/>
+          <p:nvPr/>
+        </p:nvSpPr>
+        <p:spPr>
+          <a:xfrm>
+            <a:off x="6300216" y="1517904"/>
+            <a:ext cx="5504688" cy="1865376"/>
+          </a:xfrm>
+          <a:prstGeom prst="roundRect">
+            <a:avLst>
+              <a:gd name="adj" fmla="val 2941"/>
+            </a:avLst>
+          </a:prstGeom>
+          <a:solidFill>
+            <a:srgbClr val="FFFFFF"/>
+          </a:solidFill>
+          <a:ln w="12700">
+            <a:solidFill>
+              <a:srgbClr val="D8E6DB"/>
+            </a:solidFill>
+            <a:prstDash val="solid"/>
+          </a:ln>
+          <a:effectLst>
+            <a:outerShdw sx="100000" sy="100000" kx="0" ky="0" algn="bl" rotWithShape="0" blurRad="127000" dist="25400" dir="5400000">
+              <a:srgbClr val="1B5E20">
+                <a:alpha val="10000"/>
+              </a:srgbClr>
+            </a:outerShdw>
+          </a:effectLst>
+        </p:spPr>
+      </p:sp>
+      <p:sp>
+        <p:nvSpPr>
+          <p:cNvPr id="11" name="Shape 8"/>
+          <p:cNvSpPr/>
+          <p:nvPr/>
+        </p:nvSpPr>
+        <p:spPr>
+          <a:xfrm>
+            <a:off x="6574536" y="1792224"/>
+            <a:ext cx="475488" cy="475488"/>
+          </a:xfrm>
+          <a:prstGeom prst="ellipse">
+            <a:avLst/>
+          </a:prstGeom>
+          <a:solidFill>
+            <a:srgbClr val="FBC02D"/>
+          </a:solidFill>
+          <a:ln/>
+        </p:spPr>
+      </p:sp>
+      <p:pic>
+        <p:nvPicPr>
+          <p:cNvPr id="12" name="Image 1" descr="preencoded.png">    </p:cNvPr>
+          <p:cNvPicPr>
+            <a:picLocks noChangeAspect="1"/>
+          </p:cNvPicPr>
+          <p:nvPr/>
+        </p:nvPicPr>
+        <p:blipFill>
+          <a:blip r:embed="rId3"/>
+          <a:stretch>
+            <a:fillRect/>
+          </a:stretch>
+        </p:blipFill>
+        <p:spPr>
+          <a:xfrm>
+            <a:off x="6698163" y="1915851"/>
+            <a:ext cx="228234" cy="228234"/>
+          </a:xfrm>
+          <a:prstGeom prst="rect">
+            <a:avLst/>
+          </a:prstGeom>
+        </p:spPr>
+      </p:pic>
+      <p:sp>
+        <p:nvSpPr>
+          <p:cNvPr id="13" name="Text 9"/>
+          <p:cNvSpPr/>
+          <p:nvPr/>
+        </p:nvSpPr>
+        <p:spPr>
+          <a:xfrm>
+            <a:off x="7178040" y="1755648"/>
+            <a:ext cx="4352544" cy="548640"/>
+          </a:xfrm>
+          <a:prstGeom prst="rect">
+            <a:avLst/>
+          </a:prstGeom>
+          <a:noFill/>
+          <a:ln/>
+        </p:spPr>
+        <p:txBody>
+          <a:bodyPr wrap="square" lIns="0" tIns="0" rIns="0" bIns="0" rtlCol="0" anchor="ctr"/>
+          <a:lstStyle/>
+          <a:p>
+            <a:pPr indent="0" marL="0">
+              <a:lnSpc>
+                <a:spcPts val="1800"/>
+              </a:lnSpc>
+              <a:buNone/>
+            </a:pPr>
+            <a:r>
+              <a:rPr lang="en-US" sz="1400" b="1" dirty="0">
+                <a:solidFill>
+                  <a:srgbClr val="0A2410"/>
+                </a:solidFill>
+                <a:latin typeface="Arial" pitchFamily="34" charset="0"/>
+                <a:ea typeface="Arial" pitchFamily="34" charset="-122"/>
+                <a:cs typeface="Arial" pitchFamily="34" charset="-120"/>
+              </a:rPr>
+              <a:t>Isn't this just another app abandoned in a year?</a:t>
+            </a:r>
+            <a:endParaRPr lang="en-US" sz="1400" dirty="0"/>
+          </a:p>
+        </p:txBody>
+      </p:sp>
+      <p:sp>
+        <p:nvSpPr>
+          <p:cNvPr id="14" name="Text 10"/>
+          <p:cNvSpPr/>
+          <p:nvPr/>
+        </p:nvSpPr>
+        <p:spPr>
+          <a:xfrm>
+            <a:off x="6574536" y="2377440"/>
+            <a:ext cx="4956048" cy="914400"/>
+          </a:xfrm>
+          <a:prstGeom prst="rect">
+            <a:avLst/>
+          </a:prstGeom>
+          <a:noFill/>
+          <a:ln/>
+        </p:spPr>
+        <p:txBody>
+          <a:bodyPr wrap="square" lIns="0" tIns="0" rIns="0" bIns="0" rtlCol="0" anchor="t"/>
+          <a:lstStyle/>
+          <a:p>
+            <a:pPr indent="0" marL="0">
+              <a:lnSpc>
+                <a:spcPts val="1600"/>
+              </a:lnSpc>
+              <a:buNone/>
+            </a:pPr>
+            <a:r>
+              <a:rPr lang="en-US" sz="1250" dirty="0">
+                <a:solidFill>
+                  <a:srgbClr val="3F5545"/>
+                </a:solidFill>
+                <a:latin typeface="Calibri" pitchFamily="34" charset="0"/>
+                <a:ea typeface="Calibri" pitchFamily="34" charset="-122"/>
+                <a:cs typeface="Calibri" pitchFamily="34" charset="-120"/>
+              </a:rPr>
+              <a:t>We built the unglamorous part first: real authentication, a real database, real legal research. Most projects at this stage are a mockup — ours has a working backend and hardware you could order parts for today.</a:t>
+            </a:r>
+            <a:endParaRPr lang="en-US" sz="1250" dirty="0"/>
+          </a:p>
+        </p:txBody>
+      </p:sp>
+      <p:sp>
+        <p:nvSpPr>
+          <p:cNvPr id="15" name="Shape 11"/>
+          <p:cNvSpPr/>
+          <p:nvPr/>
+        </p:nvSpPr>
+        <p:spPr>
+          <a:xfrm>
+            <a:off x="566928" y="3584448"/>
+            <a:ext cx="5504688" cy="1865376"/>
+          </a:xfrm>
+          <a:prstGeom prst="roundRect">
+            <a:avLst>
+              <a:gd name="adj" fmla="val 2941"/>
+            </a:avLst>
+          </a:prstGeom>
+          <a:solidFill>
+            <a:srgbClr val="FFFFFF"/>
+          </a:solidFill>
+          <a:ln w="12700">
+            <a:solidFill>
+              <a:srgbClr val="D8E6DB"/>
+            </a:solidFill>
+            <a:prstDash val="solid"/>
+          </a:ln>
+          <a:effectLst>
+            <a:outerShdw sx="100000" sy="100000" kx="0" ky="0" algn="bl" rotWithShape="0" blurRad="127000" dist="25400" dir="5400000">
+              <a:srgbClr val="1B5E20">
+                <a:alpha val="10000"/>
+              </a:srgbClr>
+            </a:outerShdw>
+          </a:effectLst>
+        </p:spPr>
+      </p:sp>
+      <p:sp>
+        <p:nvSpPr>
+          <p:cNvPr id="16" name="Shape 12"/>
+          <p:cNvSpPr/>
+          <p:nvPr/>
+        </p:nvSpPr>
+        <p:spPr>
+          <a:xfrm>
+            <a:off x="841248" y="3858768"/>
+            <a:ext cx="475488" cy="475488"/>
+          </a:xfrm>
+          <a:prstGeom prst="ellipse">
+            <a:avLst/>
+          </a:prstGeom>
+          <a:solidFill>
+            <a:srgbClr val="FBC02D"/>
+          </a:solidFill>
+          <a:ln/>
+        </p:spPr>
+      </p:sp>
+      <p:pic>
+        <p:nvPicPr>
+          <p:cNvPr id="17" name="Image 2" descr="preencoded.png">    </p:cNvPr>
+          <p:cNvPicPr>
+            <a:picLocks noChangeAspect="1"/>
+          </p:cNvPicPr>
+          <p:nvPr/>
+        </p:nvPicPr>
+        <p:blipFill>
+          <a:blip r:embed="rId4"/>
+          <a:stretch>
+            <a:fillRect/>
+          </a:stretch>
+        </p:blipFill>
+        <p:spPr>
+          <a:xfrm>
+            <a:off x="964875" y="3982395"/>
+            <a:ext cx="228234" cy="228234"/>
+          </a:xfrm>
+          <a:prstGeom prst="rect">
+            <a:avLst/>
+          </a:prstGeom>
+        </p:spPr>
+      </p:pic>
+      <p:sp>
+        <p:nvSpPr>
+          <p:cNvPr id="18" name="Text 13"/>
+          <p:cNvSpPr/>
+          <p:nvPr/>
+        </p:nvSpPr>
+        <p:spPr>
+          <a:xfrm>
+            <a:off x="1444752" y="3822192"/>
+            <a:ext cx="4352544" cy="548640"/>
+          </a:xfrm>
+          <a:prstGeom prst="rect">
+            <a:avLst/>
+          </a:prstGeom>
+          <a:noFill/>
+          <a:ln/>
+        </p:spPr>
+        <p:txBody>
+          <a:bodyPr wrap="square" lIns="0" tIns="0" rIns="0" bIns="0" rtlCol="0" anchor="ctr"/>
+          <a:lstStyle/>
+          <a:p>
+            <a:pPr indent="0" marL="0">
+              <a:lnSpc>
+                <a:spcPts val="1800"/>
+              </a:lnSpc>
+              <a:buNone/>
+            </a:pPr>
+            <a:r>
+              <a:rPr lang="en-US" sz="1400" b="1" dirty="0">
+                <a:solidFill>
+                  <a:srgbClr val="0A2410"/>
+                </a:solidFill>
+                <a:latin typeface="Arial" pitchFamily="34" charset="0"/>
+                <a:ea typeface="Arial" pitchFamily="34" charset="-122"/>
+                <a:cs typeface="Arial" pitchFamily="34" charset="-120"/>
+              </a:rPr>
+              <a:t>How is this different from calling the vet or the police?</a:t>
+            </a:r>
+            <a:endParaRPr lang="en-US" sz="1400" dirty="0"/>
+          </a:p>
+        </p:txBody>
+      </p:sp>
+      <p:sp>
+        <p:nvSpPr>
+          <p:cNvPr id="19" name="Text 14"/>
+          <p:cNvSpPr/>
+          <p:nvPr/>
+        </p:nvSpPr>
+        <p:spPr>
+          <a:xfrm>
+            <a:off x="841248" y="4443984"/>
+            <a:ext cx="4956048" cy="914400"/>
+          </a:xfrm>
+          <a:prstGeom prst="rect">
+            <a:avLst/>
+          </a:prstGeom>
+          <a:noFill/>
+          <a:ln/>
+        </p:spPr>
+        <p:txBody>
+          <a:bodyPr wrap="square" lIns="0" tIns="0" rIns="0" bIns="0" rtlCol="0" anchor="t"/>
+          <a:lstStyle/>
+          <a:p>
+            <a:pPr indent="0" marL="0">
+              <a:lnSpc>
+                <a:spcPts val="1600"/>
+              </a:lnSpc>
+              <a:buNone/>
+            </a:pPr>
+            <a:r>
+              <a:rPr lang="en-US" sz="1250" dirty="0">
+                <a:solidFill>
+                  <a:srgbClr val="3F5545"/>
+                </a:solidFill>
+                <a:latin typeface="Calibri" pitchFamily="34" charset="0"/>
+                <a:ea typeface="Calibri" pitchFamily="34" charset="-122"/>
+                <a:cs typeface="Calibri" pitchFamily="34" charset="-120"/>
+              </a:rPr>
+              <a:t>You still call them. PFUMA doesn't replace the relationship, it gives it a paper trail. A phone call disappears. A record in PFUMA doesn't.</a:t>
+            </a:r>
+            <a:endParaRPr lang="en-US" sz="1250" dirty="0"/>
+          </a:p>
+        </p:txBody>
+      </p:sp>
+      <p:sp>
+        <p:nvSpPr>
+          <p:cNvPr id="20" name="Shape 15"/>
+          <p:cNvSpPr/>
+          <p:nvPr/>
+        </p:nvSpPr>
+        <p:spPr>
+          <a:xfrm>
+            <a:off x="6300216" y="3584448"/>
+            <a:ext cx="5504688" cy="1865376"/>
+          </a:xfrm>
+          <a:prstGeom prst="roundRect">
+            <a:avLst>
+              <a:gd name="adj" fmla="val 2941"/>
+            </a:avLst>
+          </a:prstGeom>
+          <a:solidFill>
+            <a:srgbClr val="FFFFFF"/>
+          </a:solidFill>
+          <a:ln w="12700">
+            <a:solidFill>
+              <a:srgbClr val="D8E6DB"/>
+            </a:solidFill>
+            <a:prstDash val="solid"/>
+          </a:ln>
+          <a:effectLst>
+            <a:outerShdw sx="100000" sy="100000" kx="0" ky="0" algn="bl" rotWithShape="0" blurRad="127000" dist="25400" dir="5400000">
+              <a:srgbClr val="1B5E20">
+                <a:alpha val="10000"/>
+              </a:srgbClr>
+            </a:outerShdw>
+          </a:effectLst>
+        </p:spPr>
+      </p:sp>
+      <p:sp>
+        <p:nvSpPr>
+          <p:cNvPr id="21" name="Shape 16"/>
+          <p:cNvSpPr/>
+          <p:nvPr/>
+        </p:nvSpPr>
+        <p:spPr>
+          <a:xfrm>
+            <a:off x="6574536" y="3858768"/>
+            <a:ext cx="475488" cy="475488"/>
+          </a:xfrm>
+          <a:prstGeom prst="ellipse">
+            <a:avLst/>
+          </a:prstGeom>
+          <a:solidFill>
+            <a:srgbClr val="FBC02D"/>
+          </a:solidFill>
+          <a:ln/>
+        </p:spPr>
+      </p:sp>
+      <p:pic>
+        <p:nvPicPr>
+          <p:cNvPr id="22" name="Image 3" descr="preencoded.png">    </p:cNvPr>
+          <p:cNvPicPr>
+            <a:picLocks noChangeAspect="1"/>
+          </p:cNvPicPr>
+          <p:nvPr/>
+        </p:nvPicPr>
+        <p:blipFill>
+          <a:blip r:embed="rId5"/>
+          <a:stretch>
+            <a:fillRect/>
+          </a:stretch>
+        </p:blipFill>
+        <p:spPr>
+          <a:xfrm>
+            <a:off x="6698163" y="3982395"/>
+            <a:ext cx="228234" cy="228234"/>
+          </a:xfrm>
+          <a:prstGeom prst="rect">
+            <a:avLst/>
+          </a:prstGeom>
+        </p:spPr>
+      </p:pic>
+      <p:sp>
+        <p:nvSpPr>
+          <p:cNvPr id="23" name="Text 17"/>
+          <p:cNvSpPr/>
+          <p:nvPr/>
+        </p:nvSpPr>
+        <p:spPr>
+          <a:xfrm>
+            <a:off x="7178040" y="3822192"/>
+            <a:ext cx="4352544" cy="548640"/>
+          </a:xfrm>
+          <a:prstGeom prst="rect">
+            <a:avLst/>
+          </a:prstGeom>
+          <a:noFill/>
+          <a:ln/>
+        </p:spPr>
+        <p:txBody>
+          <a:bodyPr wrap="square" lIns="0" tIns="0" rIns="0" bIns="0" rtlCol="0" anchor="ctr"/>
+          <a:lstStyle/>
+          <a:p>
+            <a:pPr indent="0" marL="0">
+              <a:lnSpc>
+                <a:spcPts val="1800"/>
+              </a:lnSpc>
+              <a:buNone/>
+            </a:pPr>
+            <a:r>
+              <a:rPr lang="en-US" sz="1400" b="1" dirty="0">
+                <a:solidFill>
+                  <a:srgbClr val="0A2410"/>
+                </a:solidFill>
+                <a:latin typeface="Arial" pitchFamily="34" charset="0"/>
+                <a:ea typeface="Arial" pitchFamily="34" charset="-122"/>
+                <a:cs typeface="Arial" pitchFamily="34" charset="-120"/>
+              </a:rPr>
+              <a:t>Who stops a fake officer approving fake sales?</a:t>
+            </a:r>
+            <a:endParaRPr lang="en-US" sz="1400" dirty="0"/>
+          </a:p>
+        </p:txBody>
+      </p:sp>
+      <p:sp>
+        <p:nvSpPr>
+          <p:cNvPr id="24" name="Text 18"/>
+          <p:cNvSpPr/>
+          <p:nvPr/>
+        </p:nvSpPr>
+        <p:spPr>
+          <a:xfrm>
+            <a:off x="6574536" y="4443984"/>
+            <a:ext cx="4956048" cy="914400"/>
+          </a:xfrm>
+          <a:prstGeom prst="rect">
+            <a:avLst/>
+          </a:prstGeom>
+          <a:noFill/>
+          <a:ln/>
+        </p:spPr>
+        <p:txBody>
+          <a:bodyPr wrap="square" lIns="0" tIns="0" rIns="0" bIns="0" rtlCol="0" anchor="t"/>
+          <a:lstStyle/>
+          <a:p>
+            <a:pPr indent="0" marL="0">
+              <a:lnSpc>
+                <a:spcPts val="1600"/>
+              </a:lnSpc>
+              <a:buNone/>
+            </a:pPr>
+            <a:r>
+              <a:rPr lang="en-US" sz="1250" dirty="0">
+                <a:solidFill>
+                  <a:srgbClr val="3F5545"/>
+                </a:solidFill>
+                <a:latin typeface="Calibri" pitchFamily="34" charset="0"/>
+                <a:ea typeface="Calibri" pitchFamily="34" charset="-122"/>
+                <a:cs typeface="Calibri" pitchFamily="34" charset="-120"/>
+              </a:rPr>
+              <a:t>Police accounts aren't self-signup. An existing verified officer creates and vouches for the next one — the same way real ZRP units onboard members. You cannot register as police off the street.</a:t>
+            </a:r>
+            <a:endParaRPr lang="en-US" sz="1250" dirty="0"/>
+          </a:p>
+        </p:txBody>
+      </p:sp>
+      <p:sp>
+        <p:nvSpPr>
+          <p:cNvPr id="25" name="Shape 19"/>
+          <p:cNvSpPr/>
+          <p:nvPr/>
+        </p:nvSpPr>
+        <p:spPr>
+          <a:xfrm>
+            <a:off x="566928" y="5577840"/>
+            <a:ext cx="11057839" cy="658368"/>
+          </a:xfrm>
+          <a:prstGeom prst="roundRect">
+            <a:avLst>
+              <a:gd name="adj" fmla="val 8333"/>
+            </a:avLst>
+          </a:prstGeom>
+          <a:solidFill>
+            <a:srgbClr val="EAF4EC"/>
+          </a:solidFill>
+          <a:ln w="12700">
+            <a:solidFill>
+              <a:srgbClr val="CFE3D4"/>
+            </a:solidFill>
+            <a:prstDash val="solid"/>
+          </a:ln>
+        </p:spPr>
+      </p:sp>
+      <p:sp>
+        <p:nvSpPr>
+          <p:cNvPr id="26" name="Text 20"/>
+          <p:cNvSpPr/>
+          <p:nvPr/>
+        </p:nvSpPr>
+        <p:spPr>
+          <a:xfrm>
+            <a:off x="841248" y="5577840"/>
+            <a:ext cx="10509199" cy="658368"/>
+          </a:xfrm>
+          <a:prstGeom prst="rect">
+            <a:avLst/>
+          </a:prstGeom>
+          <a:noFill/>
+          <a:ln/>
+        </p:spPr>
+        <p:txBody>
+          <a:bodyPr wrap="square" lIns="0" tIns="0" rIns="0" bIns="0" rtlCol="0" anchor="ctr"/>
+          <a:lstStyle/>
+          <a:p>
+            <a:pPr indent="0" marL="0">
+              <a:buNone/>
+            </a:pPr>
+            <a:r>
+              <a:rPr lang="en-US" sz="1300" b="1" dirty="0">
+                <a:solidFill>
+                  <a:srgbClr val="1B5E20"/>
+                </a:solidFill>
+                <a:latin typeface="Calibri" pitchFamily="34" charset="0"/>
+                <a:ea typeface="Calibri" pitchFamily="34" charset="-122"/>
+                <a:cs typeface="Calibri" pitchFamily="34" charset="-120"/>
+              </a:rPr>
+              <a:t>Don't dodge these — they are good questions,  </a:t>
+            </a:r>
+            <a:pPr indent="0" marL="0">
+              <a:buNone/>
+            </a:pPr>
+            <a:r>
+              <a:rPr lang="en-US" sz="1300" dirty="0">
+                <a:solidFill>
+                  <a:srgbClr val="3F5545"/>
+                </a:solidFill>
+                <a:latin typeface="Calibri" pitchFamily="34" charset="0"/>
+                <a:ea typeface="Calibri" pitchFamily="34" charset="-122"/>
+                <a:cs typeface="Calibri" pitchFamily="34" charset="-120"/>
+              </a:rPr>
+              <a:t>and answering them straight is what makes the rest of the pitch believable.</a:t>
+            </a:r>
+            <a:endParaRPr lang="en-US" sz="1300" dirty="0"/>
+          </a:p>
+        </p:txBody>
+      </p:sp>
+    </p:spTree>
+  </p:cSld>
+  <p:clrMapOvr>
+    <a:masterClrMapping/>
+  </p:clrMapOvr>
+</p:sld>
+</file>
+
+<file path=ppt/slides/slide13.xml><?xml version="1.0" encoding="utf-8"?>
+<p:sld xmlns:a="http://schemas.openxmlformats.org/drawingml/2006/main" xmlns:r="http://schemas.openxmlformats.org/officeDocument/2006/relationships" xmlns:p="http://schemas.openxmlformats.org/presentationml/2006/main">
+  <p:cSld name="Slide 13">
+    <p:bg>
+      <p:bgPr>
+        <a:blipFill dpi="0" rotWithShape="1">
+          <a:blip r:embed="rId1">
+            <a:lum/>
+          </a:blip>
+          <a:srcRect/>
+          <a:stretch>
+            <a:fillRect/>
+          </a:stretch>
+        </a:blipFill>
+        <a:effectLst/>
+      </p:bgPr>
+    </p:bg>
+    <p:spTree>
+      <p:nvGrpSpPr>
+        <p:cNvPr id="1" name=""/>
+        <p:cNvGrpSpPr/>
+        <p:nvPr/>
+      </p:nvGrpSpPr>
+      <p:grpSpPr>
+        <a:xfrm>
+          <a:off x="0" y="0"/>
+          <a:ext cx="0" cy="0"/>
+          <a:chOff x="0" y="0"/>
+          <a:chExt cx="0" cy="0"/>
+        </a:xfrm>
+      </p:grpSpPr>
+      <p:sp>
+        <p:nvSpPr>
+          <p:cNvPr id="2" name="Shape 0"/>
+          <p:cNvSpPr/>
+          <p:nvPr/>
+        </p:nvSpPr>
+        <p:spPr>
+          <a:xfrm>
+            <a:off x="566928" y="420624"/>
+            <a:ext cx="749808" cy="749808"/>
+          </a:xfrm>
+          <a:prstGeom prst="roundRect">
+            <a:avLst>
+              <a:gd name="adj" fmla="val 17073"/>
+            </a:avLst>
+          </a:prstGeom>
+          <a:solidFill>
+            <a:srgbClr val="FBC02D"/>
+          </a:solidFill>
+          <a:ln/>
+        </p:spPr>
+      </p:sp>
+      <p:sp>
+        <p:nvSpPr>
+          <p:cNvPr id="3" name="Text 1"/>
+          <p:cNvSpPr/>
+          <p:nvPr/>
+        </p:nvSpPr>
+        <p:spPr>
+          <a:xfrm>
+            <a:off x="566928" y="420624"/>
+            <a:ext cx="749808" cy="749808"/>
+          </a:xfrm>
+          <a:prstGeom prst="rect">
+            <a:avLst/>
+          </a:prstGeom>
+          <a:noFill/>
+          <a:ln/>
+        </p:spPr>
+        <p:txBody>
+          <a:bodyPr wrap="square" lIns="0" tIns="0" rIns="0" bIns="0" rtlCol="0" anchor="ctr"/>
+          <a:lstStyle/>
+          <a:p>
+            <a:pPr algn="ctr" indent="0" marL="0">
+              <a:buNone/>
+            </a:pPr>
+            <a:r>
+              <a:rPr lang="en-US" sz="3000" b="1" dirty="0">
+                <a:solidFill>
+                  <a:srgbClr val="1B5E20"/>
+                </a:solidFill>
+                <a:latin typeface="Arial" pitchFamily="34" charset="0"/>
+                <a:ea typeface="Arial" pitchFamily="34" charset="-122"/>
+                <a:cs typeface="Arial" pitchFamily="34" charset="-120"/>
+              </a:rPr>
+              <a:t>12</a:t>
+            </a:r>
+            <a:endParaRPr lang="en-US" sz="3000" dirty="0"/>
+          </a:p>
+        </p:txBody>
+      </p:sp>
+      <p:sp>
+        <p:nvSpPr>
+          <p:cNvPr id="4" name="Text 2"/>
+          <p:cNvSpPr/>
+          <p:nvPr/>
+        </p:nvSpPr>
+        <p:spPr>
+          <a:xfrm>
+            <a:off x="1536192" y="365760"/>
+            <a:ext cx="10088575" cy="859536"/>
+          </a:xfrm>
+          <a:prstGeom prst="rect">
+            <a:avLst/>
+          </a:prstGeom>
+          <a:noFill/>
+          <a:ln/>
+        </p:spPr>
+        <p:txBody>
+          <a:bodyPr wrap="square" lIns="0" tIns="0" rIns="0" bIns="0" rtlCol="0" anchor="ctr"/>
+          <a:lstStyle/>
+          <a:p>
+            <a:pPr algn="l" indent="0" marL="0">
+              <a:buNone/>
+            </a:pPr>
+            <a:r>
+              <a:rPr lang="en-US" sz="3400" b="1" spc="-40" kern="0" dirty="0">
+                <a:solidFill>
                   <a:srgbClr val="FFFFFF"/>
                 </a:solidFill>
                 <a:latin typeface="Arial" pitchFamily="34" charset="0"/>
@@ -5001,7 +6028,7 @@
                 <a:ea typeface="Calibri" pitchFamily="34" charset="-122"/>
                 <a:cs typeface="Calibri" pitchFamily="34" charset="-120"/>
               </a:rPr>
-              <a:t>Five roles, one shared record. A sale that cannot go live until police clear it. An AI assistant that answers in a farmer's own words, and every feature built around an Act that already exists.</a:t>
+              <a:t>Five roles, one shared record. A sale that cannot go live until police clear it. An AI assistant that answers in a farmer's own words, and a collar that raises the alarm before anyone notices the animal is gone.</a:t>
             </a:r>
             <a:endParaRPr lang="en-US" sz="1550" dirty="0"/>
           </a:p>
@@ -5474,7 +6501,7 @@
                 <a:ea typeface="Calibri" pitchFamily="34" charset="-122"/>
                 <a:cs typeface="Calibri" pitchFamily="34" charset="-120"/>
               </a:rPr>
-              <a:t>It's real — working backend, real database, cited legal research</a:t>
+              <a:t>It's real — working backend, real hardware, cited legal research</a:t>
             </a:r>
             <a:endParaRPr lang="en-US" sz="1300" dirty="0"/>
           </a:p>
@@ -7532,7 +8559,7 @@
                 <a:ea typeface="Calibri" pitchFamily="34" charset="-122"/>
                 <a:cs typeface="Calibri" pitchFamily="34" charset="-120"/>
               </a:rPr>
-              <a:t>Registers animals once — breed, tag, brand, health. Then gets weight tracking, vaccination due-dates and overdue flags, and a verified profile buyers trust.</a:t>
+              <a:t>Registers animals once — breed, tag, brand, health. Then gets weight tracking, vaccination due-dates and geofence alerts, and a verified profile buyers trust.</a:t>
             </a:r>
             <a:endParaRPr lang="en-US" sz="1200" dirty="0"/>
           </a:p>
@@ -8843,7 +9870,7 @@
                 <a:ea typeface="Arial" pitchFamily="34" charset="-122"/>
                 <a:cs typeface="Arial" pitchFamily="34" charset="-120"/>
               </a:rPr>
-              <a:t>TRACK</a:t>
+              <a:t>MONITOR</a:t>
             </a:r>
             <a:endParaRPr lang="en-US" sz="1350" dirty="0"/>
           </a:p>
@@ -8885,7 +9912,7 @@
                 <a:ea typeface="Calibri" pitchFamily="34" charset="-122"/>
                 <a:cs typeface="Calibri" pitchFamily="34" charset="-120"/>
               </a:rPr>
-              <a:t>Weight, vaccinations, weaning and gestation run on countdowns. Overdue, due today and upcoming are colour-coded, not remembered.</a:t>
+              <a:t>The collar reports temperature, heart rate, movement and location. A fever spike or a boundary breach raises an alert immediately.</a:t>
             </a:r>
             <a:endParaRPr lang="en-US" sz="1200" dirty="0"/>
           </a:p>
@@ -10393,7 +11420,7 @@
                 <a:ea typeface="Arial" pitchFamily="34" charset="-122"/>
                 <a:cs typeface="Arial" pitchFamily="34" charset="-120"/>
               </a:rPr>
-              <a:t>Marketplace &amp; Clearance</a:t>
+              <a:t>IoT Command Center</a:t>
             </a:r>
             <a:endParaRPr lang="en-US" sz="1300" dirty="0"/>
           </a:p>
@@ -10435,7 +11462,7 @@
                 <a:ea typeface="Calibri" pitchFamily="34" charset="-122"/>
                 <a:cs typeface="Calibri" pitchFamily="34" charset="-120"/>
               </a:rPr>
-              <a:t>Listings, bids and movement-permit records, gated on police sign-off.</a:t>
+              <a:t>Vitality Index fusing temperature, heart rate and activity. GPS geofencing.</a:t>
             </a:r>
             <a:endParaRPr lang="en-US" sz="1150" dirty="0"/>
           </a:p>
@@ -12379,7 +13406,7 @@
                 <a:ea typeface="Arial" pitchFamily="34" charset="-122"/>
                 <a:cs typeface="Arial" pitchFamily="34" charset="-120"/>
               </a:rPr>
-              <a:t>BUILT ON ZIMBABWEAN LAW</a:t>
+              <a:t>THE COLLAR THAT WATCHES THE HERD</a:t>
             </a:r>
             <a:endParaRPr lang="en-US" sz="3400" dirty="0"/>
           </a:p>
@@ -12418,6 +13445,1539 @@
                 <a:ea typeface="Calibri" pitchFamily="34" charset="-122"/>
                 <a:cs typeface="Calibri" pitchFamily="34" charset="-120"/>
               </a:rPr>
+              <a:t>We did not just build software. The collar is a real, buildable design — wiring diagrams, bill of materials and firmware included.</a:t>
+            </a:r>
+            <a:endParaRPr lang="en-US" sz="1500" dirty="0"/>
+          </a:p>
+        </p:txBody>
+      </p:sp>
+      <p:sp>
+        <p:nvSpPr>
+          <p:cNvPr id="6" name="Shape 4"/>
+          <p:cNvSpPr/>
+          <p:nvPr/>
+        </p:nvSpPr>
+        <p:spPr>
+          <a:xfrm>
+            <a:off x="566928" y="1956816"/>
+            <a:ext cx="2560320" cy="1188720"/>
+          </a:xfrm>
+          <a:prstGeom prst="roundRect">
+            <a:avLst>
+              <a:gd name="adj" fmla="val 4615"/>
+            </a:avLst>
+          </a:prstGeom>
+          <a:solidFill>
+            <a:srgbClr val="1B5E20"/>
+          </a:solidFill>
+          <a:ln/>
+          <a:effectLst>
+            <a:outerShdw sx="100000" sy="100000" kx="0" ky="0" algn="bl" rotWithShape="0" blurRad="127000" dist="25400" dir="5400000">
+              <a:srgbClr val="1B5E20">
+                <a:alpha val="10000"/>
+              </a:srgbClr>
+            </a:outerShdw>
+          </a:effectLst>
+        </p:spPr>
+      </p:sp>
+      <p:sp>
+        <p:nvSpPr>
+          <p:cNvPr id="7" name="Text 5"/>
+          <p:cNvSpPr/>
+          <p:nvPr/>
+        </p:nvSpPr>
+        <p:spPr>
+          <a:xfrm>
+            <a:off x="786384" y="2121408"/>
+            <a:ext cx="2121408" cy="310896"/>
+          </a:xfrm>
+          <a:prstGeom prst="rect">
+            <a:avLst/>
+          </a:prstGeom>
+          <a:noFill/>
+          <a:ln/>
+        </p:spPr>
+        <p:txBody>
+          <a:bodyPr wrap="square" lIns="0" tIns="0" rIns="0" bIns="0" rtlCol="0" anchor="ctr"/>
+          <a:lstStyle/>
+          <a:p>
+            <a:pPr indent="0" marL="0">
+              <a:buNone/>
+            </a:pPr>
+            <a:r>
+              <a:rPr lang="en-US" sz="1200" b="1" spc="60" kern="0" dirty="0">
+                <a:solidFill>
+                  <a:srgbClr val="FBC02D"/>
+                </a:solidFill>
+                <a:latin typeface="Arial" pitchFamily="34" charset="0"/>
+                <a:ea typeface="Arial" pitchFamily="34" charset="-122"/>
+                <a:cs typeface="Arial" pitchFamily="34" charset="-120"/>
+              </a:rPr>
+              <a:t>CN-01 COLLAR NODE</a:t>
+            </a:r>
+            <a:endParaRPr lang="en-US" sz="1200" dirty="0"/>
+          </a:p>
+        </p:txBody>
+      </p:sp>
+      <p:sp>
+        <p:nvSpPr>
+          <p:cNvPr id="8" name="Text 6"/>
+          <p:cNvSpPr/>
+          <p:nvPr/>
+        </p:nvSpPr>
+        <p:spPr>
+          <a:xfrm>
+            <a:off x="786384" y="2432304"/>
+            <a:ext cx="2121408" cy="566928"/>
+          </a:xfrm>
+          <a:prstGeom prst="rect">
+            <a:avLst/>
+          </a:prstGeom>
+          <a:noFill/>
+          <a:ln/>
+        </p:spPr>
+        <p:txBody>
+          <a:bodyPr wrap="square" lIns="0" tIns="0" rIns="0" bIns="0" rtlCol="0" anchor="t"/>
+          <a:lstStyle/>
+          <a:p>
+            <a:pPr indent="0" marL="0">
+              <a:lnSpc>
+                <a:spcPts val="1450"/>
+              </a:lnSpc>
+              <a:buNone/>
+            </a:pPr>
+            <a:r>
+              <a:rPr lang="en-US" sz="1150" dirty="0">
+                <a:solidFill>
+                  <a:srgbClr val="DBEFE0"/>
+                </a:solidFill>
+                <a:latin typeface="Calibri" pitchFamily="34" charset="0"/>
+                <a:ea typeface="Calibri" pitchFamily="34" charset="-122"/>
+                <a:cs typeface="Calibri" pitchFamily="34" charset="-120"/>
+              </a:rPr>
+              <a:t>ESP32-WROOM-32, solar + LiPo, worn on the animal</a:t>
+            </a:r>
+            <a:endParaRPr lang="en-US" sz="1150" dirty="0"/>
+          </a:p>
+        </p:txBody>
+      </p:sp>
+      <p:pic>
+        <p:nvPicPr>
+          <p:cNvPr id="9" name="Image 0" descr="preencoded.png">    </p:cNvPr>
+          <p:cNvPicPr>
+            <a:picLocks noChangeAspect="1"/>
+          </p:cNvPicPr>
+          <p:nvPr/>
+        </p:nvPicPr>
+        <p:blipFill>
+          <a:blip r:embed="rId2"/>
+          <a:stretch>
+            <a:fillRect/>
+          </a:stretch>
+        </p:blipFill>
+        <p:spPr>
+          <a:xfrm>
+            <a:off x="3154680" y="2468880"/>
+            <a:ext cx="164592" cy="164592"/>
+          </a:xfrm>
+          <a:prstGeom prst="rect">
+            <a:avLst/>
+          </a:prstGeom>
+        </p:spPr>
+      </p:pic>
+      <p:sp>
+        <p:nvSpPr>
+          <p:cNvPr id="10" name="Shape 7"/>
+          <p:cNvSpPr/>
+          <p:nvPr/>
+        </p:nvSpPr>
+        <p:spPr>
+          <a:xfrm>
+            <a:off x="3346704" y="1956816"/>
+            <a:ext cx="2560320" cy="1188720"/>
+          </a:xfrm>
+          <a:prstGeom prst="roundRect">
+            <a:avLst>
+              <a:gd name="adj" fmla="val 4615"/>
+            </a:avLst>
+          </a:prstGeom>
+          <a:solidFill>
+            <a:srgbClr val="FFFFFF"/>
+          </a:solidFill>
+          <a:ln w="12700">
+            <a:solidFill>
+              <a:srgbClr val="D8E6DB"/>
+            </a:solidFill>
+            <a:prstDash val="solid"/>
+          </a:ln>
+          <a:effectLst>
+            <a:outerShdw sx="100000" sy="100000" kx="0" ky="0" algn="bl" rotWithShape="0" blurRad="127000" dist="25400" dir="5400000">
+              <a:srgbClr val="1B5E20">
+                <a:alpha val="10000"/>
+              </a:srgbClr>
+            </a:outerShdw>
+          </a:effectLst>
+        </p:spPr>
+      </p:sp>
+      <p:sp>
+        <p:nvSpPr>
+          <p:cNvPr id="11" name="Text 8"/>
+          <p:cNvSpPr/>
+          <p:nvPr/>
+        </p:nvSpPr>
+        <p:spPr>
+          <a:xfrm>
+            <a:off x="3566160" y="2121408"/>
+            <a:ext cx="2121408" cy="310896"/>
+          </a:xfrm>
+          <a:prstGeom prst="rect">
+            <a:avLst/>
+          </a:prstGeom>
+          <a:noFill/>
+          <a:ln/>
+        </p:spPr>
+        <p:txBody>
+          <a:bodyPr wrap="square" lIns="0" tIns="0" rIns="0" bIns="0" rtlCol="0" anchor="ctr"/>
+          <a:lstStyle/>
+          <a:p>
+            <a:pPr indent="0" marL="0">
+              <a:buNone/>
+            </a:pPr>
+            <a:r>
+              <a:rPr lang="en-US" sz="1200" b="1" spc="60" kern="0" dirty="0">
+                <a:solidFill>
+                  <a:srgbClr val="1B5E20"/>
+                </a:solidFill>
+                <a:latin typeface="Arial" pitchFamily="34" charset="0"/>
+                <a:ea typeface="Arial" pitchFamily="34" charset="-122"/>
+                <a:cs typeface="Arial" pitchFamily="34" charset="-120"/>
+              </a:rPr>
+              <a:t>LoRa 433 MHz</a:t>
+            </a:r>
+            <a:endParaRPr lang="en-US" sz="1200" dirty="0"/>
+          </a:p>
+        </p:txBody>
+      </p:sp>
+      <p:sp>
+        <p:nvSpPr>
+          <p:cNvPr id="12" name="Text 9"/>
+          <p:cNvSpPr/>
+          <p:nvPr/>
+        </p:nvSpPr>
+        <p:spPr>
+          <a:xfrm>
+            <a:off x="3566160" y="2432304"/>
+            <a:ext cx="2121408" cy="566928"/>
+          </a:xfrm>
+          <a:prstGeom prst="rect">
+            <a:avLst/>
+          </a:prstGeom>
+          <a:noFill/>
+          <a:ln/>
+        </p:spPr>
+        <p:txBody>
+          <a:bodyPr wrap="square" lIns="0" tIns="0" rIns="0" bIns="0" rtlCol="0" anchor="t"/>
+          <a:lstStyle/>
+          <a:p>
+            <a:pPr indent="0" marL="0">
+              <a:lnSpc>
+                <a:spcPts val="1450"/>
+              </a:lnSpc>
+              <a:buNone/>
+            </a:pPr>
+            <a:r>
+              <a:rPr lang="en-US" sz="1150" dirty="0">
+                <a:solidFill>
+                  <a:srgbClr val="3F5545"/>
+                </a:solidFill>
+                <a:latin typeface="Calibri" pitchFamily="34" charset="0"/>
+                <a:ea typeface="Calibri" pitchFamily="34" charset="-122"/>
+                <a:cs typeface="Calibri" pitchFamily="34" charset="-120"/>
+              </a:rPr>
+              <a:t>Long range, no WiFi and no cell signal needed at the kraal</a:t>
+            </a:r>
+            <a:endParaRPr lang="en-US" sz="1150" dirty="0"/>
+          </a:p>
+        </p:txBody>
+      </p:sp>
+      <p:pic>
+        <p:nvPicPr>
+          <p:cNvPr id="13" name="Image 1" descr="preencoded.png">    </p:cNvPr>
+          <p:cNvPicPr>
+            <a:picLocks noChangeAspect="1"/>
+          </p:cNvPicPr>
+          <p:nvPr/>
+        </p:nvPicPr>
+        <p:blipFill>
+          <a:blip r:embed="rId3"/>
+          <a:stretch>
+            <a:fillRect/>
+          </a:stretch>
+        </p:blipFill>
+        <p:spPr>
+          <a:xfrm>
+            <a:off x="5934456" y="2468880"/>
+            <a:ext cx="164592" cy="164592"/>
+          </a:xfrm>
+          <a:prstGeom prst="rect">
+            <a:avLst/>
+          </a:prstGeom>
+        </p:spPr>
+      </p:pic>
+      <p:sp>
+        <p:nvSpPr>
+          <p:cNvPr id="14" name="Shape 10"/>
+          <p:cNvSpPr/>
+          <p:nvPr/>
+        </p:nvSpPr>
+        <p:spPr>
+          <a:xfrm>
+            <a:off x="6126480" y="1956816"/>
+            <a:ext cx="2560320" cy="1188720"/>
+          </a:xfrm>
+          <a:prstGeom prst="roundRect">
+            <a:avLst>
+              <a:gd name="adj" fmla="val 4615"/>
+            </a:avLst>
+          </a:prstGeom>
+          <a:solidFill>
+            <a:srgbClr val="FFFFFF"/>
+          </a:solidFill>
+          <a:ln w="12700">
+            <a:solidFill>
+              <a:srgbClr val="D8E6DB"/>
+            </a:solidFill>
+            <a:prstDash val="solid"/>
+          </a:ln>
+          <a:effectLst>
+            <a:outerShdw sx="100000" sy="100000" kx="0" ky="0" algn="bl" rotWithShape="0" blurRad="127000" dist="25400" dir="5400000">
+              <a:srgbClr val="1B5E20">
+                <a:alpha val="10000"/>
+              </a:srgbClr>
+            </a:outerShdw>
+          </a:effectLst>
+        </p:spPr>
+      </p:sp>
+      <p:sp>
+        <p:nvSpPr>
+          <p:cNvPr id="15" name="Text 11"/>
+          <p:cNvSpPr/>
+          <p:nvPr/>
+        </p:nvSpPr>
+        <p:spPr>
+          <a:xfrm>
+            <a:off x="6345936" y="2121408"/>
+            <a:ext cx="2121408" cy="310896"/>
+          </a:xfrm>
+          <a:prstGeom prst="rect">
+            <a:avLst/>
+          </a:prstGeom>
+          <a:noFill/>
+          <a:ln/>
+        </p:spPr>
+        <p:txBody>
+          <a:bodyPr wrap="square" lIns="0" tIns="0" rIns="0" bIns="0" rtlCol="0" anchor="ctr"/>
+          <a:lstStyle/>
+          <a:p>
+            <a:pPr indent="0" marL="0">
+              <a:buNone/>
+            </a:pPr>
+            <a:r>
+              <a:rPr lang="en-US" sz="1200" b="1" spc="60" kern="0" dirty="0">
+                <a:solidFill>
+                  <a:srgbClr val="1B5E20"/>
+                </a:solidFill>
+                <a:latin typeface="Arial" pitchFamily="34" charset="0"/>
+                <a:ea typeface="Arial" pitchFamily="34" charset="-122"/>
+                <a:cs typeface="Arial" pitchFamily="34" charset="-120"/>
+              </a:rPr>
+              <a:t>BS-01 BASE STATION</a:t>
+            </a:r>
+            <a:endParaRPr lang="en-US" sz="1200" dirty="0"/>
+          </a:p>
+        </p:txBody>
+      </p:sp>
+      <p:sp>
+        <p:nvSpPr>
+          <p:cNvPr id="16" name="Text 12"/>
+          <p:cNvSpPr/>
+          <p:nvPr/>
+        </p:nvSpPr>
+        <p:spPr>
+          <a:xfrm>
+            <a:off x="6345936" y="2432304"/>
+            <a:ext cx="2121408" cy="566928"/>
+          </a:xfrm>
+          <a:prstGeom prst="rect">
+            <a:avLst/>
+          </a:prstGeom>
+          <a:noFill/>
+          <a:ln/>
+        </p:spPr>
+        <p:txBody>
+          <a:bodyPr wrap="square" lIns="0" tIns="0" rIns="0" bIns="0" rtlCol="0" anchor="t"/>
+          <a:lstStyle/>
+          <a:p>
+            <a:pPr indent="0" marL="0">
+              <a:lnSpc>
+                <a:spcPts val="1450"/>
+              </a:lnSpc>
+              <a:buNone/>
+            </a:pPr>
+            <a:r>
+              <a:rPr lang="en-US" sz="1150" dirty="0">
+                <a:solidFill>
+                  <a:srgbClr val="3F5545"/>
+                </a:solidFill>
+                <a:latin typeface="Calibri" pitchFamily="34" charset="0"/>
+                <a:ea typeface="Calibri" pitchFamily="34" charset="-122"/>
+                <a:cs typeface="Calibri" pitchFamily="34" charset="-120"/>
+              </a:rPr>
+              <a:t>Fixed at the farm — LoRa gateway bridging to WiFi</a:t>
+            </a:r>
+            <a:endParaRPr lang="en-US" sz="1150" dirty="0"/>
+          </a:p>
+        </p:txBody>
+      </p:sp>
+      <p:pic>
+        <p:nvPicPr>
+          <p:cNvPr id="17" name="Image 2" descr="preencoded.png">    </p:cNvPr>
+          <p:cNvPicPr>
+            <a:picLocks noChangeAspect="1"/>
+          </p:cNvPicPr>
+          <p:nvPr/>
+        </p:nvPicPr>
+        <p:blipFill>
+          <a:blip r:embed="rId4"/>
+          <a:stretch>
+            <a:fillRect/>
+          </a:stretch>
+        </p:blipFill>
+        <p:spPr>
+          <a:xfrm>
+            <a:off x="8714232" y="2468880"/>
+            <a:ext cx="164592" cy="164592"/>
+          </a:xfrm>
+          <a:prstGeom prst="rect">
+            <a:avLst/>
+          </a:prstGeom>
+        </p:spPr>
+      </p:pic>
+      <p:sp>
+        <p:nvSpPr>
+          <p:cNvPr id="18" name="Shape 13"/>
+          <p:cNvSpPr/>
+          <p:nvPr/>
+        </p:nvSpPr>
+        <p:spPr>
+          <a:xfrm>
+            <a:off x="8906256" y="1956816"/>
+            <a:ext cx="2560320" cy="1188720"/>
+          </a:xfrm>
+          <a:prstGeom prst="roundRect">
+            <a:avLst>
+              <a:gd name="adj" fmla="val 4615"/>
+            </a:avLst>
+          </a:prstGeom>
+          <a:solidFill>
+            <a:srgbClr val="FFFFFF"/>
+          </a:solidFill>
+          <a:ln w="12700">
+            <a:solidFill>
+              <a:srgbClr val="D8E6DB"/>
+            </a:solidFill>
+            <a:prstDash val="solid"/>
+          </a:ln>
+          <a:effectLst>
+            <a:outerShdw sx="100000" sy="100000" kx="0" ky="0" algn="bl" rotWithShape="0" blurRad="127000" dist="25400" dir="5400000">
+              <a:srgbClr val="1B5E20">
+                <a:alpha val="10000"/>
+              </a:srgbClr>
+            </a:outerShdw>
+          </a:effectLst>
+        </p:spPr>
+      </p:sp>
+      <p:sp>
+        <p:nvSpPr>
+          <p:cNvPr id="19" name="Text 14"/>
+          <p:cNvSpPr/>
+          <p:nvPr/>
+        </p:nvSpPr>
+        <p:spPr>
+          <a:xfrm>
+            <a:off x="9125712" y="2121408"/>
+            <a:ext cx="2121408" cy="310896"/>
+          </a:xfrm>
+          <a:prstGeom prst="rect">
+            <a:avLst/>
+          </a:prstGeom>
+          <a:noFill/>
+          <a:ln/>
+        </p:spPr>
+        <p:txBody>
+          <a:bodyPr wrap="square" lIns="0" tIns="0" rIns="0" bIns="0" rtlCol="0" anchor="ctr"/>
+          <a:lstStyle/>
+          <a:p>
+            <a:pPr indent="0" marL="0">
+              <a:buNone/>
+            </a:pPr>
+            <a:r>
+              <a:rPr lang="en-US" sz="1200" b="1" spc="60" kern="0" dirty="0">
+                <a:solidFill>
+                  <a:srgbClr val="1B5E20"/>
+                </a:solidFill>
+                <a:latin typeface="Arial" pitchFamily="34" charset="0"/>
+                <a:ea typeface="Arial" pitchFamily="34" charset="-122"/>
+                <a:cs typeface="Arial" pitchFamily="34" charset="-120"/>
+              </a:rPr>
+              <a:t>FLASK API + APP</a:t>
+            </a:r>
+            <a:endParaRPr lang="en-US" sz="1200" dirty="0"/>
+          </a:p>
+        </p:txBody>
+      </p:sp>
+      <p:sp>
+        <p:nvSpPr>
+          <p:cNvPr id="20" name="Text 15"/>
+          <p:cNvSpPr/>
+          <p:nvPr/>
+        </p:nvSpPr>
+        <p:spPr>
+          <a:xfrm>
+            <a:off x="9125712" y="2432304"/>
+            <a:ext cx="2121408" cy="566928"/>
+          </a:xfrm>
+          <a:prstGeom prst="rect">
+            <a:avLst/>
+          </a:prstGeom>
+          <a:noFill/>
+          <a:ln/>
+        </p:spPr>
+        <p:txBody>
+          <a:bodyPr wrap="square" lIns="0" tIns="0" rIns="0" bIns="0" rtlCol="0" anchor="t"/>
+          <a:lstStyle/>
+          <a:p>
+            <a:pPr indent="0" marL="0">
+              <a:lnSpc>
+                <a:spcPts val="1450"/>
+              </a:lnSpc>
+              <a:buNone/>
+            </a:pPr>
+            <a:r>
+              <a:rPr lang="en-US" sz="1150" dirty="0">
+                <a:solidFill>
+                  <a:srgbClr val="3F5545"/>
+                </a:solidFill>
+                <a:latin typeface="Calibri" pitchFamily="34" charset="0"/>
+                <a:ea typeface="Calibri" pitchFamily="34" charset="-122"/>
+                <a:cs typeface="Calibri" pitchFamily="34" charset="-120"/>
+              </a:rPr>
+              <a:t>Records land in the animal's file; alerts hit the phone</a:t>
+            </a:r>
+            <a:endParaRPr lang="en-US" sz="1150" dirty="0"/>
+          </a:p>
+        </p:txBody>
+      </p:sp>
+      <p:sp>
+        <p:nvSpPr>
+          <p:cNvPr id="21" name="Shape 16"/>
+          <p:cNvSpPr/>
+          <p:nvPr/>
+        </p:nvSpPr>
+        <p:spPr>
+          <a:xfrm>
+            <a:off x="566928" y="3529584"/>
+            <a:ext cx="512064" cy="512064"/>
+          </a:xfrm>
+          <a:prstGeom prst="ellipse">
+            <a:avLst/>
+          </a:prstGeom>
+          <a:solidFill>
+            <a:srgbClr val="E7F3EA"/>
+          </a:solidFill>
+          <a:ln/>
+        </p:spPr>
+      </p:sp>
+      <p:pic>
+        <p:nvPicPr>
+          <p:cNvPr id="22" name="Image 3" descr="preencoded.png">    </p:cNvPr>
+          <p:cNvPicPr>
+            <a:picLocks noChangeAspect="1"/>
+          </p:cNvPicPr>
+          <p:nvPr/>
+        </p:nvPicPr>
+        <p:blipFill>
+          <a:blip r:embed="rId5"/>
+          <a:stretch>
+            <a:fillRect/>
+          </a:stretch>
+        </p:blipFill>
+        <p:spPr>
+          <a:xfrm>
+            <a:off x="700065" y="3662721"/>
+            <a:ext cx="245791" cy="245791"/>
+          </a:xfrm>
+          <a:prstGeom prst="rect">
+            <a:avLst/>
+          </a:prstGeom>
+        </p:spPr>
+      </p:pic>
+      <p:sp>
+        <p:nvSpPr>
+          <p:cNvPr id="23" name="Text 17"/>
+          <p:cNvSpPr/>
+          <p:nvPr/>
+        </p:nvSpPr>
+        <p:spPr>
+          <a:xfrm>
+            <a:off x="1207008" y="3511296"/>
+            <a:ext cx="1920240" cy="274320"/>
+          </a:xfrm>
+          <a:prstGeom prst="rect">
+            <a:avLst/>
+          </a:prstGeom>
+          <a:noFill/>
+          <a:ln/>
+        </p:spPr>
+        <p:txBody>
+          <a:bodyPr wrap="square" lIns="0" tIns="0" rIns="0" bIns="0" rtlCol="0" anchor="ctr"/>
+          <a:lstStyle/>
+          <a:p>
+            <a:pPr indent="0" marL="0">
+              <a:buNone/>
+            </a:pPr>
+            <a:r>
+              <a:rPr lang="en-US" sz="1250" b="1" dirty="0">
+                <a:solidFill>
+                  <a:srgbClr val="0A2410"/>
+                </a:solidFill>
+                <a:latin typeface="Arial" pitchFamily="34" charset="0"/>
+                <a:ea typeface="Arial" pitchFamily="34" charset="-122"/>
+                <a:cs typeface="Arial" pitchFamily="34" charset="-120"/>
+              </a:rPr>
+              <a:t>DS18B20 probe</a:t>
+            </a:r>
+            <a:endParaRPr lang="en-US" sz="1250" dirty="0"/>
+          </a:p>
+        </p:txBody>
+      </p:sp>
+      <p:sp>
+        <p:nvSpPr>
+          <p:cNvPr id="24" name="Text 18"/>
+          <p:cNvSpPr/>
+          <p:nvPr/>
+        </p:nvSpPr>
+        <p:spPr>
+          <a:xfrm>
+            <a:off x="1207008" y="3767328"/>
+            <a:ext cx="1920240" cy="475488"/>
+          </a:xfrm>
+          <a:prstGeom prst="rect">
+            <a:avLst/>
+          </a:prstGeom>
+          <a:noFill/>
+          <a:ln/>
+        </p:spPr>
+        <p:txBody>
+          <a:bodyPr wrap="square" lIns="0" tIns="0" rIns="0" bIns="0" rtlCol="0" anchor="t"/>
+          <a:lstStyle/>
+          <a:p>
+            <a:pPr indent="0" marL="0">
+              <a:lnSpc>
+                <a:spcPts val="1350"/>
+              </a:lnSpc>
+              <a:buNone/>
+            </a:pPr>
+            <a:r>
+              <a:rPr lang="en-US" sz="1100" dirty="0">
+                <a:solidFill>
+                  <a:srgbClr val="3F5545"/>
+                </a:solidFill>
+                <a:latin typeface="Calibri" pitchFamily="34" charset="0"/>
+                <a:ea typeface="Calibri" pitchFamily="34" charset="-122"/>
+                <a:cs typeface="Calibri" pitchFamily="34" charset="-120"/>
+              </a:rPr>
+              <a:t>Body temperature — fever flagged automatically</a:t>
+            </a:r>
+            <a:endParaRPr lang="en-US" sz="1100" dirty="0"/>
+          </a:p>
+        </p:txBody>
+      </p:sp>
+      <p:sp>
+        <p:nvSpPr>
+          <p:cNvPr id="25" name="Shape 19"/>
+          <p:cNvSpPr/>
+          <p:nvPr/>
+        </p:nvSpPr>
+        <p:spPr>
+          <a:xfrm>
+            <a:off x="3346704" y="3529584"/>
+            <a:ext cx="512064" cy="512064"/>
+          </a:xfrm>
+          <a:prstGeom prst="ellipse">
+            <a:avLst/>
+          </a:prstGeom>
+          <a:solidFill>
+            <a:srgbClr val="E7F3EA"/>
+          </a:solidFill>
+          <a:ln/>
+        </p:spPr>
+      </p:sp>
+      <p:pic>
+        <p:nvPicPr>
+          <p:cNvPr id="26" name="Image 4" descr="preencoded.png">    </p:cNvPr>
+          <p:cNvPicPr>
+            <a:picLocks noChangeAspect="1"/>
+          </p:cNvPicPr>
+          <p:nvPr/>
+        </p:nvPicPr>
+        <p:blipFill>
+          <a:blip r:embed="rId6"/>
+          <a:stretch>
+            <a:fillRect/>
+          </a:stretch>
+        </p:blipFill>
+        <p:spPr>
+          <a:xfrm>
+            <a:off x="3479841" y="3662721"/>
+            <a:ext cx="245791" cy="245791"/>
+          </a:xfrm>
+          <a:prstGeom prst="rect">
+            <a:avLst/>
+          </a:prstGeom>
+        </p:spPr>
+      </p:pic>
+      <p:sp>
+        <p:nvSpPr>
+          <p:cNvPr id="27" name="Text 20"/>
+          <p:cNvSpPr/>
+          <p:nvPr/>
+        </p:nvSpPr>
+        <p:spPr>
+          <a:xfrm>
+            <a:off x="3986784" y="3511296"/>
+            <a:ext cx="1920240" cy="274320"/>
+          </a:xfrm>
+          <a:prstGeom prst="rect">
+            <a:avLst/>
+          </a:prstGeom>
+          <a:noFill/>
+          <a:ln/>
+        </p:spPr>
+        <p:txBody>
+          <a:bodyPr wrap="square" lIns="0" tIns="0" rIns="0" bIns="0" rtlCol="0" anchor="ctr"/>
+          <a:lstStyle/>
+          <a:p>
+            <a:pPr indent="0" marL="0">
+              <a:buNone/>
+            </a:pPr>
+            <a:r>
+              <a:rPr lang="en-US" sz="1250" b="1" dirty="0">
+                <a:solidFill>
+                  <a:srgbClr val="0A2410"/>
+                </a:solidFill>
+                <a:latin typeface="Arial" pitchFamily="34" charset="0"/>
+                <a:ea typeface="Arial" pitchFamily="34" charset="-122"/>
+                <a:cs typeface="Arial" pitchFamily="34" charset="-120"/>
+              </a:rPr>
+              <a:t>MAX30102</a:t>
+            </a:r>
+            <a:endParaRPr lang="en-US" sz="1250" dirty="0"/>
+          </a:p>
+        </p:txBody>
+      </p:sp>
+      <p:sp>
+        <p:nvSpPr>
+          <p:cNvPr id="28" name="Text 21"/>
+          <p:cNvSpPr/>
+          <p:nvPr/>
+        </p:nvSpPr>
+        <p:spPr>
+          <a:xfrm>
+            <a:off x="3986784" y="3767328"/>
+            <a:ext cx="1920240" cy="475488"/>
+          </a:xfrm>
+          <a:prstGeom prst="rect">
+            <a:avLst/>
+          </a:prstGeom>
+          <a:noFill/>
+          <a:ln/>
+        </p:spPr>
+        <p:txBody>
+          <a:bodyPr wrap="square" lIns="0" tIns="0" rIns="0" bIns="0" rtlCol="0" anchor="t"/>
+          <a:lstStyle/>
+          <a:p>
+            <a:pPr indent="0" marL="0">
+              <a:lnSpc>
+                <a:spcPts val="1350"/>
+              </a:lnSpc>
+              <a:buNone/>
+            </a:pPr>
+            <a:r>
+              <a:rPr lang="en-US" sz="1100" dirty="0">
+                <a:solidFill>
+                  <a:srgbClr val="3F5545"/>
+                </a:solidFill>
+                <a:latin typeface="Calibri" pitchFamily="34" charset="0"/>
+                <a:ea typeface="Calibri" pitchFamily="34" charset="-122"/>
+                <a:cs typeface="Calibri" pitchFamily="34" charset="-120"/>
+              </a:rPr>
+              <a:t>Heart rate, fused into the Vitality Index</a:t>
+            </a:r>
+            <a:endParaRPr lang="en-US" sz="1100" dirty="0"/>
+          </a:p>
+        </p:txBody>
+      </p:sp>
+      <p:sp>
+        <p:nvSpPr>
+          <p:cNvPr id="29" name="Shape 22"/>
+          <p:cNvSpPr/>
+          <p:nvPr/>
+        </p:nvSpPr>
+        <p:spPr>
+          <a:xfrm>
+            <a:off x="6126480" y="3529584"/>
+            <a:ext cx="512064" cy="512064"/>
+          </a:xfrm>
+          <a:prstGeom prst="ellipse">
+            <a:avLst/>
+          </a:prstGeom>
+          <a:solidFill>
+            <a:srgbClr val="E7F3EA"/>
+          </a:solidFill>
+          <a:ln/>
+        </p:spPr>
+      </p:sp>
+      <p:pic>
+        <p:nvPicPr>
+          <p:cNvPr id="30" name="Image 5" descr="preencoded.png">    </p:cNvPr>
+          <p:cNvPicPr>
+            <a:picLocks noChangeAspect="1"/>
+          </p:cNvPicPr>
+          <p:nvPr/>
+        </p:nvPicPr>
+        <p:blipFill>
+          <a:blip r:embed="rId7"/>
+          <a:stretch>
+            <a:fillRect/>
+          </a:stretch>
+        </p:blipFill>
+        <p:spPr>
+          <a:xfrm>
+            <a:off x="6259617" y="3662721"/>
+            <a:ext cx="245791" cy="245791"/>
+          </a:xfrm>
+          <a:prstGeom prst="rect">
+            <a:avLst/>
+          </a:prstGeom>
+        </p:spPr>
+      </p:pic>
+      <p:sp>
+        <p:nvSpPr>
+          <p:cNvPr id="31" name="Text 23"/>
+          <p:cNvSpPr/>
+          <p:nvPr/>
+        </p:nvSpPr>
+        <p:spPr>
+          <a:xfrm>
+            <a:off x="6766560" y="3511296"/>
+            <a:ext cx="1920240" cy="274320"/>
+          </a:xfrm>
+          <a:prstGeom prst="rect">
+            <a:avLst/>
+          </a:prstGeom>
+          <a:noFill/>
+          <a:ln/>
+        </p:spPr>
+        <p:txBody>
+          <a:bodyPr wrap="square" lIns="0" tIns="0" rIns="0" bIns="0" rtlCol="0" anchor="ctr"/>
+          <a:lstStyle/>
+          <a:p>
+            <a:pPr indent="0" marL="0">
+              <a:buNone/>
+            </a:pPr>
+            <a:r>
+              <a:rPr lang="en-US" sz="1250" b="1" dirty="0">
+                <a:solidFill>
+                  <a:srgbClr val="0A2410"/>
+                </a:solidFill>
+                <a:latin typeface="Arial" pitchFamily="34" charset="0"/>
+                <a:ea typeface="Arial" pitchFamily="34" charset="-122"/>
+                <a:cs typeface="Arial" pitchFamily="34" charset="-120"/>
+              </a:rPr>
+              <a:t>MPU-6050 IMU</a:t>
+            </a:r>
+            <a:endParaRPr lang="en-US" sz="1250" dirty="0"/>
+          </a:p>
+        </p:txBody>
+      </p:sp>
+      <p:sp>
+        <p:nvSpPr>
+          <p:cNvPr id="32" name="Text 24"/>
+          <p:cNvSpPr/>
+          <p:nvPr/>
+        </p:nvSpPr>
+        <p:spPr>
+          <a:xfrm>
+            <a:off x="6766560" y="3767328"/>
+            <a:ext cx="1920240" cy="475488"/>
+          </a:xfrm>
+          <a:prstGeom prst="rect">
+            <a:avLst/>
+          </a:prstGeom>
+          <a:noFill/>
+          <a:ln/>
+        </p:spPr>
+        <p:txBody>
+          <a:bodyPr wrap="square" lIns="0" tIns="0" rIns="0" bIns="0" rtlCol="0" anchor="t"/>
+          <a:lstStyle/>
+          <a:p>
+            <a:pPr indent="0" marL="0">
+              <a:lnSpc>
+                <a:spcPts val="1350"/>
+              </a:lnSpc>
+              <a:buNone/>
+            </a:pPr>
+            <a:r>
+              <a:rPr lang="en-US" sz="1100" dirty="0">
+                <a:solidFill>
+                  <a:srgbClr val="3F5545"/>
+                </a:solidFill>
+                <a:latin typeface="Calibri" pitchFamily="34" charset="0"/>
+                <a:ea typeface="Calibri" pitchFamily="34" charset="-122"/>
+                <a:cs typeface="Calibri" pitchFamily="34" charset="-120"/>
+              </a:rPr>
+              <a:t>Movement and activity, filtered for sensor noise</a:t>
+            </a:r>
+            <a:endParaRPr lang="en-US" sz="1100" dirty="0"/>
+          </a:p>
+        </p:txBody>
+      </p:sp>
+      <p:sp>
+        <p:nvSpPr>
+          <p:cNvPr id="33" name="Shape 25"/>
+          <p:cNvSpPr/>
+          <p:nvPr/>
+        </p:nvSpPr>
+        <p:spPr>
+          <a:xfrm>
+            <a:off x="8906256" y="3529584"/>
+            <a:ext cx="512064" cy="512064"/>
+          </a:xfrm>
+          <a:prstGeom prst="ellipse">
+            <a:avLst/>
+          </a:prstGeom>
+          <a:solidFill>
+            <a:srgbClr val="E7F3EA"/>
+          </a:solidFill>
+          <a:ln/>
+        </p:spPr>
+      </p:sp>
+      <p:pic>
+        <p:nvPicPr>
+          <p:cNvPr id="34" name="Image 6" descr="preencoded.png">    </p:cNvPr>
+          <p:cNvPicPr>
+            <a:picLocks noChangeAspect="1"/>
+          </p:cNvPicPr>
+          <p:nvPr/>
+        </p:nvPicPr>
+        <p:blipFill>
+          <a:blip r:embed="rId8"/>
+          <a:stretch>
+            <a:fillRect/>
+          </a:stretch>
+        </p:blipFill>
+        <p:spPr>
+          <a:xfrm>
+            <a:off x="9039393" y="3662721"/>
+            <a:ext cx="245791" cy="245791"/>
+          </a:xfrm>
+          <a:prstGeom prst="rect">
+            <a:avLst/>
+          </a:prstGeom>
+        </p:spPr>
+      </p:pic>
+      <p:sp>
+        <p:nvSpPr>
+          <p:cNvPr id="35" name="Text 26"/>
+          <p:cNvSpPr/>
+          <p:nvPr/>
+        </p:nvSpPr>
+        <p:spPr>
+          <a:xfrm>
+            <a:off x="9546336" y="3511296"/>
+            <a:ext cx="1920240" cy="274320"/>
+          </a:xfrm>
+          <a:prstGeom prst="rect">
+            <a:avLst/>
+          </a:prstGeom>
+          <a:noFill/>
+          <a:ln/>
+        </p:spPr>
+        <p:txBody>
+          <a:bodyPr wrap="square" lIns="0" tIns="0" rIns="0" bIns="0" rtlCol="0" anchor="ctr"/>
+          <a:lstStyle/>
+          <a:p>
+            <a:pPr indent="0" marL="0">
+              <a:buNone/>
+            </a:pPr>
+            <a:r>
+              <a:rPr lang="en-US" sz="1250" b="1" dirty="0">
+                <a:solidFill>
+                  <a:srgbClr val="0A2410"/>
+                </a:solidFill>
+                <a:latin typeface="Arial" pitchFamily="34" charset="0"/>
+                <a:ea typeface="Arial" pitchFamily="34" charset="-122"/>
+                <a:cs typeface="Arial" pitchFamily="34" charset="-120"/>
+              </a:rPr>
+              <a:t>NEO-6M GPS</a:t>
+            </a:r>
+            <a:endParaRPr lang="en-US" sz="1250" dirty="0"/>
+          </a:p>
+        </p:txBody>
+      </p:sp>
+      <p:sp>
+        <p:nvSpPr>
+          <p:cNvPr id="36" name="Text 27"/>
+          <p:cNvSpPr/>
+          <p:nvPr/>
+        </p:nvSpPr>
+        <p:spPr>
+          <a:xfrm>
+            <a:off x="9546336" y="3767328"/>
+            <a:ext cx="1920240" cy="475488"/>
+          </a:xfrm>
+          <a:prstGeom prst="rect">
+            <a:avLst/>
+          </a:prstGeom>
+          <a:noFill/>
+          <a:ln/>
+        </p:spPr>
+        <p:txBody>
+          <a:bodyPr wrap="square" lIns="0" tIns="0" rIns="0" bIns="0" rtlCol="0" anchor="t"/>
+          <a:lstStyle/>
+          <a:p>
+            <a:pPr indent="0" marL="0">
+              <a:lnSpc>
+                <a:spcPts val="1350"/>
+              </a:lnSpc>
+              <a:buNone/>
+            </a:pPr>
+            <a:r>
+              <a:rPr lang="en-US" sz="1100" dirty="0">
+                <a:solidFill>
+                  <a:srgbClr val="3F5545"/>
+                </a:solidFill>
+                <a:latin typeface="Calibri" pitchFamily="34" charset="0"/>
+                <a:ea typeface="Calibri" pitchFamily="34" charset="-122"/>
+                <a:cs typeface="Calibri" pitchFamily="34" charset="-120"/>
+              </a:rPr>
+              <a:t>Location and geofence breach alerts</a:t>
+            </a:r>
+            <a:endParaRPr lang="en-US" sz="1100" dirty="0"/>
+          </a:p>
+        </p:txBody>
+      </p:sp>
+      <p:sp>
+        <p:nvSpPr>
+          <p:cNvPr id="37" name="Shape 28"/>
+          <p:cNvSpPr/>
+          <p:nvPr/>
+        </p:nvSpPr>
+        <p:spPr>
+          <a:xfrm>
+            <a:off x="566928" y="4626864"/>
+            <a:ext cx="11057839" cy="1316736"/>
+          </a:xfrm>
+          <a:prstGeom prst="roundRect">
+            <a:avLst>
+              <a:gd name="adj" fmla="val 4167"/>
+            </a:avLst>
+          </a:prstGeom>
+          <a:solidFill>
+            <a:srgbClr val="FFFFFF"/>
+          </a:solidFill>
+          <a:ln w="12700">
+            <a:solidFill>
+              <a:srgbClr val="D8E6DB"/>
+            </a:solidFill>
+            <a:prstDash val="solid"/>
+          </a:ln>
+          <a:effectLst>
+            <a:outerShdw sx="100000" sy="100000" kx="0" ky="0" algn="bl" rotWithShape="0" blurRad="127000" dist="25400" dir="5400000">
+              <a:srgbClr val="1B5E20">
+                <a:alpha val="10000"/>
+              </a:srgbClr>
+            </a:outerShdw>
+          </a:effectLst>
+        </p:spPr>
+      </p:sp>
+      <p:sp>
+        <p:nvSpPr>
+          <p:cNvPr id="38" name="Text 29"/>
+          <p:cNvSpPr/>
+          <p:nvPr/>
+        </p:nvSpPr>
+        <p:spPr>
+          <a:xfrm>
+            <a:off x="841248" y="4754880"/>
+            <a:ext cx="4206240" cy="256032"/>
+          </a:xfrm>
+          <a:prstGeom prst="rect">
+            <a:avLst/>
+          </a:prstGeom>
+          <a:noFill/>
+          <a:ln/>
+        </p:spPr>
+        <p:txBody>
+          <a:bodyPr wrap="square" lIns="0" tIns="0" rIns="0" bIns="0" rtlCol="0" anchor="ctr"/>
+          <a:lstStyle/>
+          <a:p>
+            <a:pPr indent="0" marL="0">
+              <a:buNone/>
+            </a:pPr>
+            <a:r>
+              <a:rPr lang="en-US" sz="1000" b="1" spc="140" kern="0" dirty="0">
+                <a:solidFill>
+                  <a:srgbClr val="1B5E20"/>
+                </a:solidFill>
+                <a:latin typeface="Arial" pitchFamily="34" charset="0"/>
+                <a:ea typeface="Arial" pitchFamily="34" charset="-122"/>
+                <a:cs typeface="Arial" pitchFamily="34" charset="-120"/>
+              </a:rPr>
+              <a:t>PARTS WE ALREADY HAVE ON THE BENCH</a:t>
+            </a:r>
+            <a:endParaRPr lang="en-US" sz="1000" dirty="0"/>
+          </a:p>
+        </p:txBody>
+      </p:sp>
+      <p:pic>
+        <p:nvPicPr>
+          <p:cNvPr id="39" name="Image 7" descr="parts_esp32.jpg">    </p:cNvPr>
+          <p:cNvPicPr>
+            <a:picLocks noChangeAspect="1"/>
+          </p:cNvPicPr>
+          <p:nvPr/>
+        </p:nvPicPr>
+        <p:blipFill>
+          <a:blip r:embed="rId9"/>
+          <a:srcRect l="0" r="0" t="0" b="0"/>
+          <a:stretch/>
+        </p:blipFill>
+        <p:spPr>
+          <a:xfrm>
+            <a:off x="841248" y="5084064"/>
+            <a:ext cx="969264" cy="658368"/>
+          </a:xfrm>
+          <a:prstGeom prst="rect">
+            <a:avLst/>
+          </a:prstGeom>
+        </p:spPr>
+      </p:pic>
+      <p:sp>
+        <p:nvSpPr>
+          <p:cNvPr id="40" name="Text 30"/>
+          <p:cNvSpPr/>
+          <p:nvPr/>
+        </p:nvSpPr>
+        <p:spPr>
+          <a:xfrm>
+            <a:off x="1938528" y="5084064"/>
+            <a:ext cx="1207008" cy="658368"/>
+          </a:xfrm>
+          <a:prstGeom prst="rect">
+            <a:avLst/>
+          </a:prstGeom>
+          <a:noFill/>
+          <a:ln/>
+        </p:spPr>
+        <p:txBody>
+          <a:bodyPr wrap="square" lIns="0" tIns="0" rIns="0" bIns="0" rtlCol="0" anchor="ctr"/>
+          <a:lstStyle/>
+          <a:p>
+            <a:pPr indent="0" marL="0">
+              <a:lnSpc>
+                <a:spcPts val="1300"/>
+              </a:lnSpc>
+              <a:buNone/>
+            </a:pPr>
+            <a:r>
+              <a:rPr lang="en-US" sz="1050" dirty="0">
+                <a:solidFill>
+                  <a:srgbClr val="3F5545"/>
+                </a:solidFill>
+                <a:latin typeface="Calibri" pitchFamily="34" charset="0"/>
+                <a:ea typeface="Calibri" pitchFamily="34" charset="-122"/>
+                <a:cs typeface="Calibri" pitchFamily="34" charset="-120"/>
+              </a:rPr>
+              <a:t>ESP32-WROOM-32 devkit</a:t>
+            </a:r>
+            <a:endParaRPr lang="en-US" sz="1050" dirty="0"/>
+          </a:p>
+        </p:txBody>
+      </p:sp>
+      <p:pic>
+        <p:nvPicPr>
+          <p:cNvPr id="41" name="Image 8" descr="parts_mpu.jpg">    </p:cNvPr>
+          <p:cNvPicPr>
+            <a:picLocks noChangeAspect="1"/>
+          </p:cNvPicPr>
+          <p:nvPr/>
+        </p:nvPicPr>
+        <p:blipFill>
+          <a:blip r:embed="rId10"/>
+          <a:srcRect l="0" r="0" t="0" b="0"/>
+          <a:stretch/>
+        </p:blipFill>
+        <p:spPr>
+          <a:xfrm>
+            <a:off x="3218688" y="5084064"/>
+            <a:ext cx="969264" cy="658368"/>
+          </a:xfrm>
+          <a:prstGeom prst="rect">
+            <a:avLst/>
+          </a:prstGeom>
+        </p:spPr>
+      </p:pic>
+      <p:sp>
+        <p:nvSpPr>
+          <p:cNvPr id="42" name="Text 31"/>
+          <p:cNvSpPr/>
+          <p:nvPr/>
+        </p:nvSpPr>
+        <p:spPr>
+          <a:xfrm>
+            <a:off x="4315968" y="5084064"/>
+            <a:ext cx="1207008" cy="658368"/>
+          </a:xfrm>
+          <a:prstGeom prst="rect">
+            <a:avLst/>
+          </a:prstGeom>
+          <a:noFill/>
+          <a:ln/>
+        </p:spPr>
+        <p:txBody>
+          <a:bodyPr wrap="square" lIns="0" tIns="0" rIns="0" bIns="0" rtlCol="0" anchor="ctr"/>
+          <a:lstStyle/>
+          <a:p>
+            <a:pPr indent="0" marL="0">
+              <a:lnSpc>
+                <a:spcPts val="1300"/>
+              </a:lnSpc>
+              <a:buNone/>
+            </a:pPr>
+            <a:r>
+              <a:rPr lang="en-US" sz="1050" dirty="0">
+                <a:solidFill>
+                  <a:srgbClr val="3F5545"/>
+                </a:solidFill>
+                <a:latin typeface="Calibri" pitchFamily="34" charset="0"/>
+                <a:ea typeface="Calibri" pitchFamily="34" charset="-122"/>
+                <a:cs typeface="Calibri" pitchFamily="34" charset="-120"/>
+              </a:rPr>
+              <a:t>MPU-6050 (GY-521)</a:t>
+            </a:r>
+            <a:endParaRPr lang="en-US" sz="1050" dirty="0"/>
+          </a:p>
+        </p:txBody>
+      </p:sp>
+      <p:pic>
+        <p:nvPicPr>
+          <p:cNvPr id="43" name="Image 9" descr="parts_buck.jpg">    </p:cNvPr>
+          <p:cNvPicPr>
+            <a:picLocks noChangeAspect="1"/>
+          </p:cNvPicPr>
+          <p:nvPr/>
+        </p:nvPicPr>
+        <p:blipFill>
+          <a:blip r:embed="rId11"/>
+          <a:srcRect l="0" r="0" t="0" b="0"/>
+          <a:stretch/>
+        </p:blipFill>
+        <p:spPr>
+          <a:xfrm>
+            <a:off x="5596128" y="5084064"/>
+            <a:ext cx="969264" cy="658368"/>
+          </a:xfrm>
+          <a:prstGeom prst="rect">
+            <a:avLst/>
+          </a:prstGeom>
+        </p:spPr>
+      </p:pic>
+      <p:sp>
+        <p:nvSpPr>
+          <p:cNvPr id="44" name="Text 32"/>
+          <p:cNvSpPr/>
+          <p:nvPr/>
+        </p:nvSpPr>
+        <p:spPr>
+          <a:xfrm>
+            <a:off x="6693408" y="5084064"/>
+            <a:ext cx="1207008" cy="658368"/>
+          </a:xfrm>
+          <a:prstGeom prst="rect">
+            <a:avLst/>
+          </a:prstGeom>
+          <a:noFill/>
+          <a:ln/>
+        </p:spPr>
+        <p:txBody>
+          <a:bodyPr wrap="square" lIns="0" tIns="0" rIns="0" bIns="0" rtlCol="0" anchor="ctr"/>
+          <a:lstStyle/>
+          <a:p>
+            <a:pPr indent="0" marL="0">
+              <a:lnSpc>
+                <a:spcPts val="1300"/>
+              </a:lnSpc>
+              <a:buNone/>
+            </a:pPr>
+            <a:r>
+              <a:rPr lang="en-US" sz="1050" dirty="0">
+                <a:solidFill>
+                  <a:srgbClr val="3F5545"/>
+                </a:solidFill>
+                <a:latin typeface="Calibri" pitchFamily="34" charset="0"/>
+                <a:ea typeface="Calibri" pitchFamily="34" charset="-122"/>
+                <a:cs typeface="Calibri" pitchFamily="34" charset="-120"/>
+              </a:rPr>
+              <a:t>LM2596 buck converter</a:t>
+            </a:r>
+            <a:endParaRPr lang="en-US" sz="1050" dirty="0"/>
+          </a:p>
+        </p:txBody>
+      </p:sp>
+      <p:sp>
+        <p:nvSpPr>
+          <p:cNvPr id="45" name="Text 33"/>
+          <p:cNvSpPr/>
+          <p:nvPr/>
+        </p:nvSpPr>
+        <p:spPr>
+          <a:xfrm>
+            <a:off x="8156448" y="4937760"/>
+            <a:ext cx="3193999" cy="914400"/>
+          </a:xfrm>
+          <a:prstGeom prst="rect">
+            <a:avLst/>
+          </a:prstGeom>
+          <a:noFill/>
+          <a:ln/>
+        </p:spPr>
+        <p:txBody>
+          <a:bodyPr wrap="square" lIns="0" tIns="0" rIns="0" bIns="0" rtlCol="0" anchor="ctr"/>
+          <a:lstStyle/>
+          <a:p>
+            <a:pPr indent="0" marL="0">
+              <a:lnSpc>
+                <a:spcPts val="1550"/>
+              </a:lnSpc>
+              <a:buNone/>
+            </a:pPr>
+            <a:r>
+              <a:rPr lang="en-US" sz="1200" b="1" dirty="0">
+                <a:solidFill>
+                  <a:srgbClr val="1B5E20"/>
+                </a:solidFill>
+                <a:latin typeface="Calibri" pitchFamily="34" charset="0"/>
+                <a:ea typeface="Calibri" pitchFamily="34" charset="-122"/>
+                <a:cs typeface="Calibri" pitchFamily="34" charset="-120"/>
+              </a:rPr>
+              <a:t>Buildable today.
+</a:t>
+            </a:r>
+            <a:pPr indent="0" marL="0">
+              <a:lnSpc>
+                <a:spcPts val="1550"/>
+              </a:lnSpc>
+              <a:buNone/>
+            </a:pPr>
+            <a:r>
+              <a:rPr lang="en-US" sz="1200" dirty="0">
+                <a:solidFill>
+                  <a:srgbClr val="3F5545"/>
+                </a:solidFill>
+                <a:latin typeface="Calibri" pitchFamily="34" charset="0"/>
+                <a:ea typeface="Calibri" pitchFamily="34" charset="-122"/>
+                <a:cs typeface="Calibri" pitchFamily="34" charset="-120"/>
+              </a:rPr>
+              <a:t>Full pin-level wiring, BOM with supplier links, and firmware for both boards are in the repo.</a:t>
+            </a:r>
+            <a:endParaRPr lang="en-US" sz="1200" dirty="0"/>
+          </a:p>
+        </p:txBody>
+      </p:sp>
+    </p:spTree>
+  </p:cSld>
+  <p:clrMapOvr>
+    <a:masterClrMapping/>
+  </p:clrMapOvr>
+</p:sld>
+</file>
+
+<file path=ppt/slides/slide9.xml><?xml version="1.0" encoding="utf-8"?>
+<p:sld xmlns:a="http://schemas.openxmlformats.org/drawingml/2006/main" xmlns:r="http://schemas.openxmlformats.org/officeDocument/2006/relationships" xmlns:p="http://schemas.openxmlformats.org/presentationml/2006/main">
+  <p:cSld name="Slide 9">
+    <p:bg>
+      <p:bgPr>
+        <a:blipFill dpi="0" rotWithShape="1">
+          <a:blip r:embed="rId1">
+            <a:lum/>
+          </a:blip>
+          <a:srcRect/>
+          <a:stretch>
+            <a:fillRect/>
+          </a:stretch>
+        </a:blipFill>
+        <a:effectLst/>
+      </p:bgPr>
+    </p:bg>
+    <p:spTree>
+      <p:nvGrpSpPr>
+        <p:cNvPr id="1" name=""/>
+        <p:cNvGrpSpPr/>
+        <p:nvPr/>
+      </p:nvGrpSpPr>
+      <p:grpSpPr>
+        <a:xfrm>
+          <a:off x="0" y="0"/>
+          <a:ext cx="0" cy="0"/>
+          <a:chOff x="0" y="0"/>
+          <a:chExt cx="0" cy="0"/>
+        </a:xfrm>
+      </p:grpSpPr>
+      <p:sp>
+        <p:nvSpPr>
+          <p:cNvPr id="2" name="Shape 0"/>
+          <p:cNvSpPr/>
+          <p:nvPr/>
+        </p:nvSpPr>
+        <p:spPr>
+          <a:xfrm>
+            <a:off x="566928" y="420624"/>
+            <a:ext cx="749808" cy="749808"/>
+          </a:xfrm>
+          <a:prstGeom prst="roundRect">
+            <a:avLst>
+              <a:gd name="adj" fmla="val 17073"/>
+            </a:avLst>
+          </a:prstGeom>
+          <a:solidFill>
+            <a:srgbClr val="FBC02D"/>
+          </a:solidFill>
+          <a:ln/>
+        </p:spPr>
+      </p:sp>
+      <p:sp>
+        <p:nvSpPr>
+          <p:cNvPr id="3" name="Text 1"/>
+          <p:cNvSpPr/>
+          <p:nvPr/>
+        </p:nvSpPr>
+        <p:spPr>
+          <a:xfrm>
+            <a:off x="566928" y="420624"/>
+            <a:ext cx="749808" cy="749808"/>
+          </a:xfrm>
+          <a:prstGeom prst="rect">
+            <a:avLst/>
+          </a:prstGeom>
+          <a:noFill/>
+          <a:ln/>
+        </p:spPr>
+        <p:txBody>
+          <a:bodyPr wrap="square" lIns="0" tIns="0" rIns="0" bIns="0" rtlCol="0" anchor="ctr"/>
+          <a:lstStyle/>
+          <a:p>
+            <a:pPr algn="ctr" indent="0" marL="0">
+              <a:buNone/>
+            </a:pPr>
+            <a:r>
+              <a:rPr lang="en-US" sz="3000" b="1" dirty="0">
+                <a:solidFill>
+                  <a:srgbClr val="1B5E20"/>
+                </a:solidFill>
+                <a:latin typeface="Arial" pitchFamily="34" charset="0"/>
+                <a:ea typeface="Arial" pitchFamily="34" charset="-122"/>
+                <a:cs typeface="Arial" pitchFamily="34" charset="-120"/>
+              </a:rPr>
+              <a:t>08</a:t>
+            </a:r>
+            <a:endParaRPr lang="en-US" sz="3000" dirty="0"/>
+          </a:p>
+        </p:txBody>
+      </p:sp>
+      <p:sp>
+        <p:nvSpPr>
+          <p:cNvPr id="4" name="Text 2"/>
+          <p:cNvSpPr/>
+          <p:nvPr/>
+        </p:nvSpPr>
+        <p:spPr>
+          <a:xfrm>
+            <a:off x="1536192" y="365760"/>
+            <a:ext cx="10088575" cy="859536"/>
+          </a:xfrm>
+          <a:prstGeom prst="rect">
+            <a:avLst/>
+          </a:prstGeom>
+          <a:noFill/>
+          <a:ln/>
+        </p:spPr>
+        <p:txBody>
+          <a:bodyPr wrap="square" lIns="0" tIns="0" rIns="0" bIns="0" rtlCol="0" anchor="ctr"/>
+          <a:lstStyle/>
+          <a:p>
+            <a:pPr algn="l" indent="0" marL="0">
+              <a:buNone/>
+            </a:pPr>
+            <a:r>
+              <a:rPr lang="en-US" sz="3400" b="1" spc="-40" kern="0" dirty="0">
+                <a:solidFill>
+                  <a:srgbClr val="0A2410"/>
+                </a:solidFill>
+                <a:latin typeface="Arial" pitchFamily="34" charset="0"/>
+                <a:ea typeface="Arial" pitchFamily="34" charset="-122"/>
+                <a:cs typeface="Arial" pitchFamily="34" charset="-120"/>
+              </a:rPr>
+              <a:t>BUILT ON ZIMBABWEAN LAW</a:t>
+            </a:r>
+            <a:endParaRPr lang="en-US" sz="3400" dirty="0"/>
+          </a:p>
+        </p:txBody>
+      </p:sp>
+      <p:sp>
+        <p:nvSpPr>
+          <p:cNvPr id="5" name="Text 3"/>
+          <p:cNvSpPr/>
+          <p:nvPr/>
+        </p:nvSpPr>
+        <p:spPr>
+          <a:xfrm>
+            <a:off x="566928" y="1371600"/>
+            <a:ext cx="10607040" cy="347472"/>
+          </a:xfrm>
+          <a:prstGeom prst="rect">
+            <a:avLst/>
+          </a:prstGeom>
+          <a:noFill/>
+          <a:ln/>
+        </p:spPr>
+        <p:txBody>
+          <a:bodyPr wrap="square" lIns="0" tIns="0" rIns="0" bIns="0" rtlCol="0" anchor="ctr"/>
+          <a:lstStyle/>
+          <a:p>
+            <a:pPr indent="0" marL="0">
+              <a:buNone/>
+            </a:pPr>
+            <a:r>
+              <a:rPr lang="en-US" sz="1500" dirty="0">
+                <a:solidFill>
+                  <a:srgbClr val="3F5545"/>
+                </a:solidFill>
+                <a:latin typeface="Calibri" pitchFamily="34" charset="0"/>
+                <a:ea typeface="Calibri" pitchFamily="34" charset="-122"/>
+                <a:cs typeface="Calibri" pitchFamily="34" charset="-120"/>
+              </a:rPr>
               <a:t>Every headline feature maps to a specific Act — researched, cited, and in the repo for anyone who wants to check it.</a:t>
             </a:r>
             <a:endParaRPr lang="en-US" sz="1500" dirty="0"/>
@@ -12426,7 +14986,7 @@
       </p:sp>
       <p:graphicFrame>
         <p:nvGraphicFramePr>
-          <p:cNvPr id="9" name="Table 0"/>
+          <p:cNvPr id="10" name="Table 0"/>
           <p:cNvGraphicFramePr>
             <a:graphicFrameLocks noGrp="1"/>
           </p:cNvGraphicFramePr>
@@ -13514,944 +16074,6 @@
 </p:sld>
 </file>
 
-<file path=ppt/slides/slide9.xml><?xml version="1.0" encoding="utf-8"?>
-<p:sld xmlns:a="http://schemas.openxmlformats.org/drawingml/2006/main" xmlns:r="http://schemas.openxmlformats.org/officeDocument/2006/relationships" xmlns:p="http://schemas.openxmlformats.org/presentationml/2006/main">
-  <p:cSld name="Slide 9">
-    <p:bg>
-      <p:bgPr>
-        <a:blipFill dpi="0" rotWithShape="1">
-          <a:blip r:embed="rId1">
-            <a:lum/>
-          </a:blip>
-          <a:srcRect/>
-          <a:stretch>
-            <a:fillRect/>
-          </a:stretch>
-        </a:blipFill>
-        <a:effectLst/>
-      </p:bgPr>
-    </p:bg>
-    <p:spTree>
-      <p:nvGrpSpPr>
-        <p:cNvPr id="1" name=""/>
-        <p:cNvGrpSpPr/>
-        <p:nvPr/>
-      </p:nvGrpSpPr>
-      <p:grpSpPr>
-        <a:xfrm>
-          <a:off x="0" y="0"/>
-          <a:ext cx="0" cy="0"/>
-          <a:chOff x="0" y="0"/>
-          <a:chExt cx="0" cy="0"/>
-        </a:xfrm>
-      </p:grpSpPr>
-      <p:sp>
-        <p:nvSpPr>
-          <p:cNvPr id="2" name="Shape 0"/>
-          <p:cNvSpPr/>
-          <p:nvPr/>
-        </p:nvSpPr>
-        <p:spPr>
-          <a:xfrm>
-            <a:off x="566928" y="420624"/>
-            <a:ext cx="749808" cy="749808"/>
-          </a:xfrm>
-          <a:prstGeom prst="roundRect">
-            <a:avLst>
-              <a:gd name="adj" fmla="val 17073"/>
-            </a:avLst>
-          </a:prstGeom>
-          <a:solidFill>
-            <a:srgbClr val="FBC02D"/>
-          </a:solidFill>
-          <a:ln/>
-        </p:spPr>
-      </p:sp>
-      <p:sp>
-        <p:nvSpPr>
-          <p:cNvPr id="3" name="Text 1"/>
-          <p:cNvSpPr/>
-          <p:nvPr/>
-        </p:nvSpPr>
-        <p:spPr>
-          <a:xfrm>
-            <a:off x="566928" y="420624"/>
-            <a:ext cx="749808" cy="749808"/>
-          </a:xfrm>
-          <a:prstGeom prst="rect">
-            <a:avLst/>
-          </a:prstGeom>
-          <a:noFill/>
-          <a:ln/>
-        </p:spPr>
-        <p:txBody>
-          <a:bodyPr wrap="square" lIns="0" tIns="0" rIns="0" bIns="0" rtlCol="0" anchor="ctr"/>
-          <a:lstStyle/>
-          <a:p>
-            <a:pPr algn="ctr" indent="0" marL="0">
-              <a:buNone/>
-            </a:pPr>
-            <a:r>
-              <a:rPr lang="en-US" sz="3000" b="1" dirty="0">
-                <a:solidFill>
-                  <a:srgbClr val="1B5E20"/>
-                </a:solidFill>
-                <a:latin typeface="Arial" pitchFamily="34" charset="0"/>
-                <a:ea typeface="Arial" pitchFamily="34" charset="-122"/>
-                <a:cs typeface="Arial" pitchFamily="34" charset="-120"/>
-              </a:rPr>
-              <a:t>08</a:t>
-            </a:r>
-            <a:endParaRPr lang="en-US" sz="3000" dirty="0"/>
-          </a:p>
-        </p:txBody>
-      </p:sp>
-      <p:sp>
-        <p:nvSpPr>
-          <p:cNvPr id="4" name="Text 2"/>
-          <p:cNvSpPr/>
-          <p:nvPr/>
-        </p:nvSpPr>
-        <p:spPr>
-          <a:xfrm>
-            <a:off x="1536192" y="365760"/>
-            <a:ext cx="10088575" cy="859536"/>
-          </a:xfrm>
-          <a:prstGeom prst="rect">
-            <a:avLst/>
-          </a:prstGeom>
-          <a:noFill/>
-          <a:ln/>
-        </p:spPr>
-        <p:txBody>
-          <a:bodyPr wrap="square" lIns="0" tIns="0" rIns="0" bIns="0" rtlCol="0" anchor="ctr"/>
-          <a:lstStyle/>
-          <a:p>
-            <a:pPr algn="l" indent="0" marL="0">
-              <a:buNone/>
-            </a:pPr>
-            <a:r>
-              <a:rPr lang="en-US" sz="3400" b="1" spc="-40" kern="0" dirty="0">
-                <a:solidFill>
-                  <a:srgbClr val="0A2410"/>
-                </a:solidFill>
-                <a:latin typeface="Arial" pitchFamily="34" charset="0"/>
-                <a:ea typeface="Arial" pitchFamily="34" charset="-122"/>
-                <a:cs typeface="Arial" pitchFamily="34" charset="-120"/>
-              </a:rPr>
-              <a:t>WHAT THIS CHANGES</a:t>
-            </a:r>
-            <a:endParaRPr lang="en-US" sz="3400" dirty="0"/>
-          </a:p>
-        </p:txBody>
-      </p:sp>
-      <p:sp>
-        <p:nvSpPr>
-          <p:cNvPr id="5" name="Shape 3"/>
-          <p:cNvSpPr/>
-          <p:nvPr/>
-        </p:nvSpPr>
-        <p:spPr>
-          <a:xfrm>
-            <a:off x="566928" y="1517904"/>
-            <a:ext cx="11057839" cy="822960"/>
-          </a:xfrm>
-          <a:prstGeom prst="roundRect">
-            <a:avLst>
-              <a:gd name="adj" fmla="val 6667"/>
-            </a:avLst>
-          </a:prstGeom>
-          <a:solidFill>
-            <a:srgbClr val="FFFFFF"/>
-          </a:solidFill>
-          <a:ln w="12700">
-            <a:solidFill>
-              <a:srgbClr val="D8E6DB"/>
-            </a:solidFill>
-            <a:prstDash val="solid"/>
-          </a:ln>
-        </p:spPr>
-      </p:sp>
-      <p:sp>
-        <p:nvSpPr>
-          <p:cNvPr id="6" name="Shape 4"/>
-          <p:cNvSpPr/>
-          <p:nvPr/>
-        </p:nvSpPr>
-        <p:spPr>
-          <a:xfrm>
-            <a:off x="822960" y="1673352"/>
-            <a:ext cx="512064" cy="512064"/>
-          </a:xfrm>
-          <a:prstGeom prst="ellipse">
-            <a:avLst/>
-          </a:prstGeom>
-          <a:solidFill>
-            <a:srgbClr val="1B5E20"/>
-          </a:solidFill>
-          <a:ln/>
-        </p:spPr>
-      </p:sp>
-      <p:pic>
-        <p:nvPicPr>
-          <p:cNvPr id="7" name="Image 0" descr="preencoded.png">    </p:cNvPr>
-          <p:cNvPicPr>
-            <a:picLocks noChangeAspect="1"/>
-          </p:cNvPicPr>
-          <p:nvPr/>
-        </p:nvPicPr>
-        <p:blipFill>
-          <a:blip r:embed="rId2"/>
-          <a:stretch>
-            <a:fillRect/>
-          </a:stretch>
-        </p:blipFill>
-        <p:spPr>
-          <a:xfrm>
-            <a:off x="956097" y="1806489"/>
-            <a:ext cx="245791" cy="245791"/>
-          </a:xfrm>
-          <a:prstGeom prst="rect">
-            <a:avLst/>
-          </a:prstGeom>
-        </p:spPr>
-      </p:pic>
-      <p:sp>
-        <p:nvSpPr>
-          <p:cNvPr id="8" name="Text 5"/>
-          <p:cNvSpPr/>
-          <p:nvPr/>
-        </p:nvSpPr>
-        <p:spPr>
-          <a:xfrm>
-            <a:off x="1499616" y="1517904"/>
-            <a:ext cx="2377440" cy="822960"/>
-          </a:xfrm>
-          <a:prstGeom prst="rect">
-            <a:avLst/>
-          </a:prstGeom>
-          <a:noFill/>
-          <a:ln/>
-        </p:spPr>
-        <p:txBody>
-          <a:bodyPr wrap="square" lIns="0" tIns="0" rIns="0" bIns="0" rtlCol="0" anchor="ctr"/>
-          <a:lstStyle/>
-          <a:p>
-            <a:pPr indent="0" marL="0">
-              <a:buNone/>
-            </a:pPr>
-            <a:r>
-              <a:rPr lang="en-US" sz="1200" b="1" spc="80" kern="0" dirty="0">
-                <a:solidFill>
-                  <a:srgbClr val="1B5E20"/>
-                </a:solidFill>
-                <a:latin typeface="Arial" pitchFamily="34" charset="0"/>
-                <a:ea typeface="Arial" pitchFamily="34" charset="-122"/>
-                <a:cs typeface="Arial" pitchFamily="34" charset="-120"/>
-              </a:rPr>
-              <a:t>FOR THE FARMER</a:t>
-            </a:r>
-            <a:endParaRPr lang="en-US" sz="1200" dirty="0"/>
-          </a:p>
-        </p:txBody>
-      </p:sp>
-      <p:sp>
-        <p:nvSpPr>
-          <p:cNvPr id="9" name="Text 6"/>
-          <p:cNvSpPr/>
-          <p:nvPr/>
-        </p:nvSpPr>
-        <p:spPr>
-          <a:xfrm>
-            <a:off x="3913632" y="1517904"/>
-            <a:ext cx="7436815" cy="822960"/>
-          </a:xfrm>
-          <a:prstGeom prst="rect">
-            <a:avLst/>
-          </a:prstGeom>
-          <a:noFill/>
-          <a:ln/>
-        </p:spPr>
-        <p:txBody>
-          <a:bodyPr wrap="square" lIns="0" tIns="0" rIns="0" bIns="0" rtlCol="0" anchor="ctr"/>
-          <a:lstStyle/>
-          <a:p>
-            <a:pPr indent="0" marL="0">
-              <a:lnSpc>
-                <a:spcPts val="1550"/>
-              </a:lnSpc>
-              <a:buNone/>
-            </a:pPr>
-            <a:r>
-              <a:rPr lang="en-US" sz="1250" dirty="0">
-                <a:solidFill>
-                  <a:srgbClr val="3F5545"/>
-                </a:solidFill>
-                <a:latin typeface="Calibri" pitchFamily="34" charset="0"/>
-                <a:ea typeface="Calibri" pitchFamily="34" charset="-122"/>
-                <a:cs typeface="Calibri" pitchFamily="34" charset="-120"/>
-              </a:rPr>
-              <a:t>Ownership he can prove, disease caught early, and a fair, documented sales channel instead of an isolated lowball offer. Verified profiles and clean sale history also make livestock wealth easier to borrow against.</a:t>
-            </a:r>
-            <a:endParaRPr lang="en-US" sz="1250" dirty="0"/>
-          </a:p>
-        </p:txBody>
-      </p:sp>
-      <p:sp>
-        <p:nvSpPr>
-          <p:cNvPr id="10" name="Shape 7"/>
-          <p:cNvSpPr/>
-          <p:nvPr/>
-        </p:nvSpPr>
-        <p:spPr>
-          <a:xfrm>
-            <a:off x="566928" y="2450592"/>
-            <a:ext cx="11057839" cy="822960"/>
-          </a:xfrm>
-          <a:prstGeom prst="roundRect">
-            <a:avLst>
-              <a:gd name="adj" fmla="val 6667"/>
-            </a:avLst>
-          </a:prstGeom>
-          <a:solidFill>
-            <a:srgbClr val="FFFFFF"/>
-          </a:solidFill>
-          <a:ln w="12700">
-            <a:solidFill>
-              <a:srgbClr val="D8E6DB"/>
-            </a:solidFill>
-            <a:prstDash val="solid"/>
-          </a:ln>
-        </p:spPr>
-      </p:sp>
-      <p:sp>
-        <p:nvSpPr>
-          <p:cNvPr id="11" name="Shape 8"/>
-          <p:cNvSpPr/>
-          <p:nvPr/>
-        </p:nvSpPr>
-        <p:spPr>
-          <a:xfrm>
-            <a:off x="822960" y="2606040"/>
-            <a:ext cx="512064" cy="512064"/>
-          </a:xfrm>
-          <a:prstGeom prst="ellipse">
-            <a:avLst/>
-          </a:prstGeom>
-          <a:solidFill>
-            <a:srgbClr val="1B5E20"/>
-          </a:solidFill>
-          <a:ln/>
-        </p:spPr>
-      </p:sp>
-      <p:pic>
-        <p:nvPicPr>
-          <p:cNvPr id="12" name="Image 1" descr="preencoded.png">    </p:cNvPr>
-          <p:cNvPicPr>
-            <a:picLocks noChangeAspect="1"/>
-          </p:cNvPicPr>
-          <p:nvPr/>
-        </p:nvPicPr>
-        <p:blipFill>
-          <a:blip r:embed="rId3"/>
-          <a:stretch>
-            <a:fillRect/>
-          </a:stretch>
-        </p:blipFill>
-        <p:spPr>
-          <a:xfrm>
-            <a:off x="956097" y="2739177"/>
-            <a:ext cx="245791" cy="245791"/>
-          </a:xfrm>
-          <a:prstGeom prst="rect">
-            <a:avLst/>
-          </a:prstGeom>
-        </p:spPr>
-      </p:pic>
-      <p:sp>
-        <p:nvSpPr>
-          <p:cNvPr id="13" name="Text 9"/>
-          <p:cNvSpPr/>
-          <p:nvPr/>
-        </p:nvSpPr>
-        <p:spPr>
-          <a:xfrm>
-            <a:off x="1499616" y="2450592"/>
-            <a:ext cx="2377440" cy="822960"/>
-          </a:xfrm>
-          <a:prstGeom prst="rect">
-            <a:avLst/>
-          </a:prstGeom>
-          <a:noFill/>
-          <a:ln/>
-        </p:spPr>
-        <p:txBody>
-          <a:bodyPr wrap="square" lIns="0" tIns="0" rIns="0" bIns="0" rtlCol="0" anchor="ctr"/>
-          <a:lstStyle/>
-          <a:p>
-            <a:pPr indent="0" marL="0">
-              <a:buNone/>
-            </a:pPr>
-            <a:r>
-              <a:rPr lang="en-US" sz="1200" b="1" spc="80" kern="0" dirty="0">
-                <a:solidFill>
-                  <a:srgbClr val="1B5E20"/>
-                </a:solidFill>
-                <a:latin typeface="Arial" pitchFamily="34" charset="0"/>
-                <a:ea typeface="Arial" pitchFamily="34" charset="-122"/>
-                <a:cs typeface="Arial" pitchFamily="34" charset="-120"/>
-              </a:rPr>
-              <a:t>FOR THE VETERINARIAN</a:t>
-            </a:r>
-            <a:endParaRPr lang="en-US" sz="1200" dirty="0"/>
-          </a:p>
-        </p:txBody>
-      </p:sp>
-      <p:sp>
-        <p:nvSpPr>
-          <p:cNvPr id="14" name="Text 10"/>
-          <p:cNvSpPr/>
-          <p:nvPr/>
-        </p:nvSpPr>
-        <p:spPr>
-          <a:xfrm>
-            <a:off x="3913632" y="2450592"/>
-            <a:ext cx="7436815" cy="822960"/>
-          </a:xfrm>
-          <a:prstGeom prst="rect">
-            <a:avLst/>
-          </a:prstGeom>
-          <a:noFill/>
-          <a:ln/>
-        </p:spPr>
-        <p:txBody>
-          <a:bodyPr wrap="square" lIns="0" tIns="0" rIns="0" bIns="0" rtlCol="0" anchor="ctr"/>
-          <a:lstStyle/>
-          <a:p>
-            <a:pPr indent="0" marL="0">
-              <a:lnSpc>
-                <a:spcPts val="1550"/>
-              </a:lnSpc>
-              <a:buNone/>
-            </a:pPr>
-            <a:r>
-              <a:rPr lang="en-US" sz="1250" dirty="0">
-                <a:solidFill>
-                  <a:srgbClr val="3F5545"/>
-                </a:solidFill>
-                <a:latin typeface="Calibri" pitchFamily="34" charset="0"/>
-                <a:ea typeface="Calibri" pitchFamily="34" charset="-122"/>
-                <a:cs typeface="Calibri" pitchFamily="34" charset="-120"/>
-              </a:rPr>
-              <a:t>Fewer wasted trips and real outbreak visibility. Province and district tagging builds exactly the regional surveillance data DVS needs for contact tracing.</a:t>
-            </a:r>
-            <a:endParaRPr lang="en-US" sz="1250" dirty="0"/>
-          </a:p>
-        </p:txBody>
-      </p:sp>
-      <p:sp>
-        <p:nvSpPr>
-          <p:cNvPr id="15" name="Shape 11"/>
-          <p:cNvSpPr/>
-          <p:nvPr/>
-        </p:nvSpPr>
-        <p:spPr>
-          <a:xfrm>
-            <a:off x="566928" y="3383280"/>
-            <a:ext cx="11057839" cy="822960"/>
-          </a:xfrm>
-          <a:prstGeom prst="roundRect">
-            <a:avLst>
-              <a:gd name="adj" fmla="val 6667"/>
-            </a:avLst>
-          </a:prstGeom>
-          <a:solidFill>
-            <a:srgbClr val="FFFFFF"/>
-          </a:solidFill>
-          <a:ln w="12700">
-            <a:solidFill>
-              <a:srgbClr val="D8E6DB"/>
-            </a:solidFill>
-            <a:prstDash val="solid"/>
-          </a:ln>
-        </p:spPr>
-      </p:sp>
-      <p:sp>
-        <p:nvSpPr>
-          <p:cNvPr id="16" name="Shape 12"/>
-          <p:cNvSpPr/>
-          <p:nvPr/>
-        </p:nvSpPr>
-        <p:spPr>
-          <a:xfrm>
-            <a:off x="822960" y="3538728"/>
-            <a:ext cx="512064" cy="512064"/>
-          </a:xfrm>
-          <a:prstGeom prst="ellipse">
-            <a:avLst/>
-          </a:prstGeom>
-          <a:solidFill>
-            <a:srgbClr val="1B5E20"/>
-          </a:solidFill>
-          <a:ln/>
-        </p:spPr>
-      </p:sp>
-      <p:pic>
-        <p:nvPicPr>
-          <p:cNvPr id="17" name="Image 2" descr="preencoded.png">    </p:cNvPr>
-          <p:cNvPicPr>
-            <a:picLocks noChangeAspect="1"/>
-          </p:cNvPicPr>
-          <p:nvPr/>
-        </p:nvPicPr>
-        <p:blipFill>
-          <a:blip r:embed="rId4"/>
-          <a:stretch>
-            <a:fillRect/>
-          </a:stretch>
-        </p:blipFill>
-        <p:spPr>
-          <a:xfrm>
-            <a:off x="956097" y="3671865"/>
-            <a:ext cx="245791" cy="245791"/>
-          </a:xfrm>
-          <a:prstGeom prst="rect">
-            <a:avLst/>
-          </a:prstGeom>
-        </p:spPr>
-      </p:pic>
-      <p:sp>
-        <p:nvSpPr>
-          <p:cNvPr id="18" name="Text 13"/>
-          <p:cNvSpPr/>
-          <p:nvPr/>
-        </p:nvSpPr>
-        <p:spPr>
-          <a:xfrm>
-            <a:off x="1499616" y="3383280"/>
-            <a:ext cx="2377440" cy="822960"/>
-          </a:xfrm>
-          <a:prstGeom prst="rect">
-            <a:avLst/>
-          </a:prstGeom>
-          <a:noFill/>
-          <a:ln/>
-        </p:spPr>
-        <p:txBody>
-          <a:bodyPr wrap="square" lIns="0" tIns="0" rIns="0" bIns="0" rtlCol="0" anchor="ctr"/>
-          <a:lstStyle/>
-          <a:p>
-            <a:pPr indent="0" marL="0">
-              <a:buNone/>
-            </a:pPr>
-            <a:r>
-              <a:rPr lang="en-US" sz="1200" b="1" spc="80" kern="0" dirty="0">
-                <a:solidFill>
-                  <a:srgbClr val="1B5E20"/>
-                </a:solidFill>
-                <a:latin typeface="Arial" pitchFamily="34" charset="0"/>
-                <a:ea typeface="Arial" pitchFamily="34" charset="-122"/>
-                <a:cs typeface="Arial" pitchFamily="34" charset="-120"/>
-              </a:rPr>
-              <a:t>FOR SUPPLIERS AND RETAILERS</a:t>
-            </a:r>
-            <a:endParaRPr lang="en-US" sz="1200" dirty="0"/>
-          </a:p>
-        </p:txBody>
-      </p:sp>
-      <p:sp>
-        <p:nvSpPr>
-          <p:cNvPr id="19" name="Text 14"/>
-          <p:cNvSpPr/>
-          <p:nvPr/>
-        </p:nvSpPr>
-        <p:spPr>
-          <a:xfrm>
-            <a:off x="3913632" y="3383280"/>
-            <a:ext cx="7436815" cy="822960"/>
-          </a:xfrm>
-          <a:prstGeom prst="rect">
-            <a:avLst/>
-          </a:prstGeom>
-          <a:noFill/>
-          <a:ln/>
-        </p:spPr>
-        <p:txBody>
-          <a:bodyPr wrap="square" lIns="0" tIns="0" rIns="0" bIns="0" rtlCol="0" anchor="ctr"/>
-          <a:lstStyle/>
-          <a:p>
-            <a:pPr indent="0" marL="0">
-              <a:lnSpc>
-                <a:spcPts val="1550"/>
-              </a:lnSpc>
-              <a:buNone/>
-            </a:pPr>
-            <a:r>
-              <a:rPr lang="en-US" sz="1250" dirty="0">
-                <a:solidFill>
-                  <a:srgbClr val="3F5545"/>
-                </a:solidFill>
-                <a:latin typeface="Calibri" pitchFamily="34" charset="0"/>
-                <a:ea typeface="Calibri" pitchFamily="34" charset="-122"/>
-                <a:cs typeface="Calibri" pitchFamily="34" charset="-120"/>
-              </a:rPr>
-              <a:t>A direct channel to the farmers who need their stock, and buyers who are no longer one bad purchase away from a receiving-stolen-goods charge.</a:t>
-            </a:r>
-            <a:endParaRPr lang="en-US" sz="1250" dirty="0"/>
-          </a:p>
-        </p:txBody>
-      </p:sp>
-      <p:sp>
-        <p:nvSpPr>
-          <p:cNvPr id="20" name="Shape 15"/>
-          <p:cNvSpPr/>
-          <p:nvPr/>
-        </p:nvSpPr>
-        <p:spPr>
-          <a:xfrm>
-            <a:off x="566928" y="4315968"/>
-            <a:ext cx="11057839" cy="822960"/>
-          </a:xfrm>
-          <a:prstGeom prst="roundRect">
-            <a:avLst>
-              <a:gd name="adj" fmla="val 6667"/>
-            </a:avLst>
-          </a:prstGeom>
-          <a:solidFill>
-            <a:srgbClr val="FFFFFF"/>
-          </a:solidFill>
-          <a:ln w="12700">
-            <a:solidFill>
-              <a:srgbClr val="D8E6DB"/>
-            </a:solidFill>
-            <a:prstDash val="solid"/>
-          </a:ln>
-        </p:spPr>
-      </p:sp>
-      <p:sp>
-        <p:nvSpPr>
-          <p:cNvPr id="21" name="Shape 16"/>
-          <p:cNvSpPr/>
-          <p:nvPr/>
-        </p:nvSpPr>
-        <p:spPr>
-          <a:xfrm>
-            <a:off x="822960" y="4471416"/>
-            <a:ext cx="512064" cy="512064"/>
-          </a:xfrm>
-          <a:prstGeom prst="ellipse">
-            <a:avLst/>
-          </a:prstGeom>
-          <a:solidFill>
-            <a:srgbClr val="1B5E20"/>
-          </a:solidFill>
-          <a:ln/>
-        </p:spPr>
-      </p:sp>
-      <p:pic>
-        <p:nvPicPr>
-          <p:cNvPr id="22" name="Image 3" descr="preencoded.png">    </p:cNvPr>
-          <p:cNvPicPr>
-            <a:picLocks noChangeAspect="1"/>
-          </p:cNvPicPr>
-          <p:nvPr/>
-        </p:nvPicPr>
-        <p:blipFill>
-          <a:blip r:embed="rId5"/>
-          <a:stretch>
-            <a:fillRect/>
-          </a:stretch>
-        </p:blipFill>
-        <p:spPr>
-          <a:xfrm>
-            <a:off x="956097" y="4604553"/>
-            <a:ext cx="245791" cy="245791"/>
-          </a:xfrm>
-          <a:prstGeom prst="rect">
-            <a:avLst/>
-          </a:prstGeom>
-        </p:spPr>
-      </p:pic>
-      <p:sp>
-        <p:nvSpPr>
-          <p:cNvPr id="23" name="Text 17"/>
-          <p:cNvSpPr/>
-          <p:nvPr/>
-        </p:nvSpPr>
-        <p:spPr>
-          <a:xfrm>
-            <a:off x="1499616" y="4315968"/>
-            <a:ext cx="2377440" cy="822960"/>
-          </a:xfrm>
-          <a:prstGeom prst="rect">
-            <a:avLst/>
-          </a:prstGeom>
-          <a:noFill/>
-          <a:ln/>
-        </p:spPr>
-        <p:txBody>
-          <a:bodyPr wrap="square" lIns="0" tIns="0" rIns="0" bIns="0" rtlCol="0" anchor="ctr"/>
-          <a:lstStyle/>
-          <a:p>
-            <a:pPr indent="0" marL="0">
-              <a:buNone/>
-            </a:pPr>
-            <a:r>
-              <a:rPr lang="en-US" sz="1200" b="1" spc="80" kern="0" dirty="0">
-                <a:solidFill>
-                  <a:srgbClr val="1B5E20"/>
-                </a:solidFill>
-                <a:latin typeface="Arial" pitchFamily="34" charset="0"/>
-                <a:ea typeface="Arial" pitchFamily="34" charset="-122"/>
-                <a:cs typeface="Arial" pitchFamily="34" charset="-120"/>
-              </a:rPr>
-              <a:t>FOR POLICE AND DVS</a:t>
-            </a:r>
-            <a:endParaRPr lang="en-US" sz="1200" dirty="0"/>
-          </a:p>
-        </p:txBody>
-      </p:sp>
-      <p:sp>
-        <p:nvSpPr>
-          <p:cNvPr id="24" name="Text 18"/>
-          <p:cNvSpPr/>
-          <p:nvPr/>
-        </p:nvSpPr>
-        <p:spPr>
-          <a:xfrm>
-            <a:off x="3913632" y="4315968"/>
-            <a:ext cx="7436815" cy="822960"/>
-          </a:xfrm>
-          <a:prstGeom prst="rect">
-            <a:avLst/>
-          </a:prstGeom>
-          <a:noFill/>
-          <a:ln/>
-        </p:spPr>
-        <p:txBody>
-          <a:bodyPr wrap="square" lIns="0" tIns="0" rIns="0" bIns="0" rtlCol="0" anchor="ctr"/>
-          <a:lstStyle/>
-          <a:p>
-            <a:pPr indent="0" marL="0">
-              <a:lnSpc>
-                <a:spcPts val="1550"/>
-              </a:lnSpc>
-              <a:buNone/>
-            </a:pPr>
-            <a:r>
-              <a:rPr lang="en-US" sz="1250" dirty="0">
-                <a:solidFill>
-                  <a:srgbClr val="3F5545"/>
-                </a:solidFill>
-                <a:latin typeface="Calibri" pitchFamily="34" charset="0"/>
-                <a:ea typeface="Calibri" pitchFamily="34" charset="-122"/>
-                <a:cs typeface="Calibri" pitchFamily="34" charset="-120"/>
-              </a:rPr>
-              <a:t>Clearance stops being a paper courtesy and becomes a structural gate. Officers review from a queue instead of chasing paperwork on foot.</a:t>
-            </a:r>
-            <a:endParaRPr lang="en-US" sz="1250" dirty="0"/>
-          </a:p>
-        </p:txBody>
-      </p:sp>
-      <p:sp>
-        <p:nvSpPr>
-          <p:cNvPr id="25" name="Shape 19"/>
-          <p:cNvSpPr/>
-          <p:nvPr/>
-        </p:nvSpPr>
-        <p:spPr>
-          <a:xfrm>
-            <a:off x="566928" y="5248656"/>
-            <a:ext cx="11057839" cy="822960"/>
-          </a:xfrm>
-          <a:prstGeom prst="roundRect">
-            <a:avLst>
-              <a:gd name="adj" fmla="val 6667"/>
-            </a:avLst>
-          </a:prstGeom>
-          <a:solidFill>
-            <a:srgbClr val="FFFFFF"/>
-          </a:solidFill>
-          <a:ln w="12700">
-            <a:solidFill>
-              <a:srgbClr val="D8E6DB"/>
-            </a:solidFill>
-            <a:prstDash val="solid"/>
-          </a:ln>
-        </p:spPr>
-      </p:sp>
-      <p:sp>
-        <p:nvSpPr>
-          <p:cNvPr id="26" name="Shape 20"/>
-          <p:cNvSpPr/>
-          <p:nvPr/>
-        </p:nvSpPr>
-        <p:spPr>
-          <a:xfrm>
-            <a:off x="822960" y="5404104"/>
-            <a:ext cx="512064" cy="512064"/>
-          </a:xfrm>
-          <a:prstGeom prst="ellipse">
-            <a:avLst/>
-          </a:prstGeom>
-          <a:solidFill>
-            <a:srgbClr val="1B5E20"/>
-          </a:solidFill>
-          <a:ln/>
-        </p:spPr>
-      </p:sp>
-      <p:pic>
-        <p:nvPicPr>
-          <p:cNvPr id="27" name="Image 4" descr="preencoded.png">    </p:cNvPr>
-          <p:cNvPicPr>
-            <a:picLocks noChangeAspect="1"/>
-          </p:cNvPicPr>
-          <p:nvPr/>
-        </p:nvPicPr>
-        <p:blipFill>
-          <a:blip r:embed="rId6"/>
-          <a:stretch>
-            <a:fillRect/>
-          </a:stretch>
-        </p:blipFill>
-        <p:spPr>
-          <a:xfrm>
-            <a:off x="956097" y="5537241"/>
-            <a:ext cx="245791" cy="245791"/>
-          </a:xfrm>
-          <a:prstGeom prst="rect">
-            <a:avLst/>
-          </a:prstGeom>
-        </p:spPr>
-      </p:pic>
-      <p:sp>
-        <p:nvSpPr>
-          <p:cNvPr id="28" name="Text 21"/>
-          <p:cNvSpPr/>
-          <p:nvPr/>
-        </p:nvSpPr>
-        <p:spPr>
-          <a:xfrm>
-            <a:off x="1499616" y="5248656"/>
-            <a:ext cx="2377440" cy="822960"/>
-          </a:xfrm>
-          <a:prstGeom prst="rect">
-            <a:avLst/>
-          </a:prstGeom>
-          <a:noFill/>
-          <a:ln/>
-        </p:spPr>
-        <p:txBody>
-          <a:bodyPr wrap="square" lIns="0" tIns="0" rIns="0" bIns="0" rtlCol="0" anchor="ctr"/>
-          <a:lstStyle/>
-          <a:p>
-            <a:pPr indent="0" marL="0">
-              <a:buNone/>
-            </a:pPr>
-            <a:r>
-              <a:rPr lang="en-US" sz="1200" b="1" spc="80" kern="0" dirty="0">
-                <a:solidFill>
-                  <a:srgbClr val="1B5E20"/>
-                </a:solidFill>
-                <a:latin typeface="Arial" pitchFamily="34" charset="0"/>
-                <a:ea typeface="Arial" pitchFamily="34" charset="-122"/>
-                <a:cs typeface="Arial" pitchFamily="34" charset="-120"/>
-              </a:rPr>
-              <a:t>FOR THE COUNTRY</a:t>
-            </a:r>
-            <a:endParaRPr lang="en-US" sz="1200" dirty="0"/>
-          </a:p>
-        </p:txBody>
-      </p:sp>
-      <p:sp>
-        <p:nvSpPr>
-          <p:cNvPr id="29" name="Text 22"/>
-          <p:cNvSpPr/>
-          <p:nvPr/>
-        </p:nvSpPr>
-        <p:spPr>
-          <a:xfrm>
-            <a:off x="3913632" y="5248656"/>
-            <a:ext cx="7436815" cy="822960"/>
-          </a:xfrm>
-          <a:prstGeom prst="rect">
-            <a:avLst/>
-          </a:prstGeom>
-          <a:noFill/>
-          <a:ln/>
-        </p:spPr>
-        <p:txBody>
-          <a:bodyPr wrap="square" lIns="0" tIns="0" rIns="0" bIns="0" rtlCol="0" anchor="ctr"/>
-          <a:lstStyle/>
-          <a:p>
-            <a:pPr indent="0" marL="0">
-              <a:lnSpc>
-                <a:spcPts val="1550"/>
-              </a:lnSpc>
-              <a:buNone/>
-            </a:pPr>
-            <a:r>
-              <a:rPr lang="en-US" sz="1250" dirty="0">
-                <a:solidFill>
-                  <a:srgbClr val="3F5545"/>
-                </a:solidFill>
-                <a:latin typeface="Calibri" pitchFamily="34" charset="0"/>
-                <a:ea typeface="Calibri" pitchFamily="34" charset="-122"/>
-                <a:cs typeface="Calibri" pitchFamily="34" charset="-120"/>
-              </a:rPr>
-              <a:t>Fewer disease deaths, less theft, better price discovery and easier access to vets compound into real rural household income — a measurable outcome, not a technology showcase.</a:t>
-            </a:r>
-            <a:endParaRPr lang="en-US" sz="1250" dirty="0"/>
-          </a:p>
-        </p:txBody>
-      </p:sp>
-      <p:sp>
-        <p:nvSpPr>
-          <p:cNvPr id="30" name="Text 23"/>
-          <p:cNvSpPr/>
-          <p:nvPr/>
-        </p:nvSpPr>
-        <p:spPr>
-          <a:xfrm>
-            <a:off x="566928" y="6254496"/>
-            <a:ext cx="11057839" cy="310896"/>
-          </a:xfrm>
-          <a:prstGeom prst="rect">
-            <a:avLst/>
-          </a:prstGeom>
-          <a:noFill/>
-          <a:ln/>
-        </p:spPr>
-        <p:txBody>
-          <a:bodyPr wrap="square" lIns="0" tIns="0" rIns="0" bIns="0" rtlCol="0" anchor="ctr"/>
-          <a:lstStyle/>
-          <a:p>
-            <a:pPr algn="l" indent="0" marL="0">
-              <a:buNone/>
-            </a:pPr>
-            <a:r>
-              <a:rPr lang="en-US" sz="1150" i="1" dirty="0">
-                <a:solidFill>
-                  <a:srgbClr val="6B8272"/>
-                </a:solidFill>
-                <a:latin typeface="Calibri" pitchFamily="34" charset="0"/>
-                <a:ea typeface="Calibri" pitchFamily="34" charset="-122"/>
-                <a:cs typeface="Calibri" pitchFamily="34" charset="-120"/>
-              </a:rPr>
-              <a:t>The signup flow accepts title deeds, 99-year leases, offer letters, A1/A2 permits and communal land allocation letters — so communal farmers are not excluded by design.</a:t>
-            </a:r>
-            <a:endParaRPr lang="en-US" sz="1150" dirty="0"/>
-          </a:p>
-        </p:txBody>
-      </p:sp>
-    </p:spTree>
-  </p:cSld>
-  <p:clrMapOvr>
-    <a:masterClrMapping/>
-  </p:clrMapOvr>
-</p:sld>
-</file>
-
 <file path=ppt/theme/theme1.xml><?xml version="1.0" encoding="utf-8"?>
 <a:theme xmlns:a="http://schemas.openxmlformats.org/drawingml/2006/main" name="Office Theme">
   <a:themeElements>
